--- a/presentation.pptx
+++ b/presentation.pptx
@@ -3,17 +3,23 @@
 <p:presentation xmlns:a="http://schemas.openxmlformats.org/drawingml/2006/main" xmlns:r="http://schemas.openxmlformats.org/officeDocument/2006/relationships" xmlns:p="http://schemas.openxmlformats.org/presentationml/2006/main" saveSubsetFonts="1">
   <p:sldMasterIdLst>
     <p:sldMasterId id="2147483684" r:id="rId1"/>
+    <p:sldMasterId id="2147483708" r:id="rId2"/>
   </p:sldMasterIdLst>
   <p:notesMasterIdLst>
-    <p:notesMasterId r:id="rId8"/>
+    <p:notesMasterId r:id="rId14"/>
   </p:notesMasterIdLst>
   <p:sldIdLst>
-    <p:sldId id="256" r:id="rId2"/>
-    <p:sldId id="262" r:id="rId3"/>
-    <p:sldId id="257" r:id="rId4"/>
-    <p:sldId id="258" r:id="rId5"/>
-    <p:sldId id="264" r:id="rId6"/>
-    <p:sldId id="261" r:id="rId7"/>
+    <p:sldId id="256" r:id="rId3"/>
+    <p:sldId id="267" r:id="rId4"/>
+    <p:sldId id="265" r:id="rId5"/>
+    <p:sldId id="284" r:id="rId6"/>
+    <p:sldId id="262" r:id="rId7"/>
+    <p:sldId id="257" r:id="rId8"/>
+    <p:sldId id="258" r:id="rId9"/>
+    <p:sldId id="285" r:id="rId10"/>
+    <p:sldId id="264" r:id="rId11"/>
+    <p:sldId id="266" r:id="rId12"/>
+    <p:sldId id="261" r:id="rId13"/>
   </p:sldIdLst>
   <p:sldSz cx="12192000" cy="6858000"/>
   <p:notesSz cx="6858000" cy="9144000"/>
@@ -202,7 +208,7 @@
           <a:p>
             <a:fld id="{6EDE0543-023D-4F9B-BC1A-1F2F01CCA38C}" type="datetimeFigureOut">
               <a:rPr lang="de-DE" smtClean="0"/>
-              <a:t>26.08.2024</a:t>
+              <a:t>04.06.2025</a:t>
             </a:fld>
             <a:endParaRPr lang="de-DE"/>
           </a:p>
@@ -558,7 +564,13 @@
   <p:cSld>
     <p:spTree>
       <p:nvGrpSpPr>
-        <p:cNvPr id="1" name=""/>
+        <p:cNvPr id="1" name="">
+          <a:extLst>
+            <a:ext uri="{FF2B5EF4-FFF2-40B4-BE49-F238E27FC236}">
+              <a16:creationId xmlns:a16="http://schemas.microsoft.com/office/drawing/2014/main" id="{B45D7F68-F6AA-5509-663C-F408174190EC}"/>
+            </a:ext>
+          </a:extLst>
+        </p:cNvPr>
         <p:cNvGrpSpPr/>
         <p:nvPr/>
       </p:nvGrpSpPr>
@@ -572,7 +584,13 @@
       </p:grpSpPr>
       <p:sp>
         <p:nvSpPr>
-          <p:cNvPr id="2" name="Folienbildplatzhalter 1"/>
+          <p:cNvPr id="2" name="Folienbildplatzhalter 1">
+            <a:extLst>
+              <a:ext uri="{FF2B5EF4-FFF2-40B4-BE49-F238E27FC236}">
+                <a16:creationId xmlns:a16="http://schemas.microsoft.com/office/drawing/2014/main" id="{9AB07221-ECD1-3A9A-9B06-F554E6F29837}"/>
+              </a:ext>
+            </a:extLst>
+          </p:cNvPr>
           <p:cNvSpPr>
             <a:spLocks noGrp="1" noRot="1" noChangeAspect="1"/>
           </p:cNvSpPr>
@@ -584,7 +602,13 @@
       </p:sp>
       <p:sp>
         <p:nvSpPr>
-          <p:cNvPr id="3" name="Notizenplatzhalter 2"/>
+          <p:cNvPr id="3" name="Notizenplatzhalter 2">
+            <a:extLst>
+              <a:ext uri="{FF2B5EF4-FFF2-40B4-BE49-F238E27FC236}">
+                <a16:creationId xmlns:a16="http://schemas.microsoft.com/office/drawing/2014/main" id="{E169C353-4FC3-136B-F80C-C7AB39B0439A}"/>
+              </a:ext>
+            </a:extLst>
+          </p:cNvPr>
           <p:cNvSpPr>
             <a:spLocks noGrp="1"/>
           </p:cNvSpPr>
@@ -603,7 +627,13 @@
       </p:sp>
       <p:sp>
         <p:nvSpPr>
-          <p:cNvPr id="4" name="Foliennummernplatzhalter 3"/>
+          <p:cNvPr id="4" name="Foliennummernplatzhalter 3">
+            <a:extLst>
+              <a:ext uri="{FF2B5EF4-FFF2-40B4-BE49-F238E27FC236}">
+                <a16:creationId xmlns:a16="http://schemas.microsoft.com/office/drawing/2014/main" id="{99F77807-6E9B-9549-E8E0-5FDC7B5BEDE1}"/>
+              </a:ext>
+            </a:extLst>
+          </p:cNvPr>
           <p:cNvSpPr>
             <a:spLocks noGrp="1"/>
           </p:cNvSpPr>
@@ -627,7 +657,7 @@
     </p:spTree>
     <p:extLst>
       <p:ext uri="{BB962C8B-B14F-4D97-AF65-F5344CB8AC3E}">
-        <p14:creationId xmlns:p14="http://schemas.microsoft.com/office/powerpoint/2010/main" val="4168717520"/>
+        <p14:creationId xmlns:p14="http://schemas.microsoft.com/office/powerpoint/2010/main" val="2598700194"/>
       </p:ext>
     </p:extLst>
   </p:cSld>
@@ -702,7 +732,91 @@
           <a:p>
             <a:fld id="{3FE021C4-C392-4987-A836-A4E314D81604}" type="slidenum">
               <a:rPr lang="de-DE" smtClean="0"/>
-              <a:t>4</a:t>
+              <a:t>5</a:t>
+            </a:fld>
+            <a:endParaRPr lang="de-DE"/>
+          </a:p>
+        </p:txBody>
+      </p:sp>
+    </p:spTree>
+    <p:extLst>
+      <p:ext uri="{BB962C8B-B14F-4D97-AF65-F5344CB8AC3E}">
+        <p14:creationId xmlns:p14="http://schemas.microsoft.com/office/powerpoint/2010/main" val="4168717520"/>
+      </p:ext>
+    </p:extLst>
+  </p:cSld>
+  <p:clrMapOvr>
+    <a:masterClrMapping/>
+  </p:clrMapOvr>
+</p:notes>
+</file>
+
+<file path=ppt/notesSlides/notesSlide4.xml><?xml version="1.0" encoding="utf-8"?>
+<p:notes xmlns:a="http://schemas.openxmlformats.org/drawingml/2006/main" xmlns:r="http://schemas.openxmlformats.org/officeDocument/2006/relationships" xmlns:p="http://schemas.openxmlformats.org/presentationml/2006/main">
+  <p:cSld>
+    <p:spTree>
+      <p:nvGrpSpPr>
+        <p:cNvPr id="1" name=""/>
+        <p:cNvGrpSpPr/>
+        <p:nvPr/>
+      </p:nvGrpSpPr>
+      <p:grpSpPr>
+        <a:xfrm>
+          <a:off x="0" y="0"/>
+          <a:ext cx="0" cy="0"/>
+          <a:chOff x="0" y="0"/>
+          <a:chExt cx="0" cy="0"/>
+        </a:xfrm>
+      </p:grpSpPr>
+      <p:sp>
+        <p:nvSpPr>
+          <p:cNvPr id="2" name="Folienbildplatzhalter 1"/>
+          <p:cNvSpPr>
+            <a:spLocks noGrp="1" noRot="1" noChangeAspect="1"/>
+          </p:cNvSpPr>
+          <p:nvPr>
+            <p:ph type="sldImg"/>
+          </p:nvPr>
+        </p:nvSpPr>
+        <p:spPr/>
+      </p:sp>
+      <p:sp>
+        <p:nvSpPr>
+          <p:cNvPr id="3" name="Notizenplatzhalter 2"/>
+          <p:cNvSpPr>
+            <a:spLocks noGrp="1"/>
+          </p:cNvSpPr>
+          <p:nvPr>
+            <p:ph type="body" idx="1"/>
+          </p:nvPr>
+        </p:nvSpPr>
+        <p:spPr/>
+        <p:txBody>
+          <a:bodyPr/>
+          <a:lstStyle/>
+          <a:p>
+            <a:endParaRPr lang="de-DE"/>
+          </a:p>
+        </p:txBody>
+      </p:sp>
+      <p:sp>
+        <p:nvSpPr>
+          <p:cNvPr id="4" name="Foliennummernplatzhalter 3"/>
+          <p:cNvSpPr>
+            <a:spLocks noGrp="1"/>
+          </p:cNvSpPr>
+          <p:nvPr>
+            <p:ph type="sldNum" sz="quarter" idx="5"/>
+          </p:nvPr>
+        </p:nvSpPr>
+        <p:spPr/>
+        <p:txBody>
+          <a:bodyPr/>
+          <a:lstStyle/>
+          <a:p>
+            <a:fld id="{3FE021C4-C392-4987-A836-A4E314D81604}" type="slidenum">
+              <a:rPr lang="de-DE" smtClean="0"/>
+              <a:t>7</a:t>
             </a:fld>
             <a:endParaRPr lang="de-DE"/>
           </a:p>
@@ -852,7 +966,7 @@
           <a:p>
             <a:fld id="{0116CD17-7A63-479F-AAA5-C17A016314BF}" type="datetimeFigureOut">
               <a:rPr lang="de-DE" smtClean="0"/>
-              <a:t>26.08.2024</a:t>
+              <a:t>04.06.2025</a:t>
             </a:fld>
             <a:endParaRPr lang="de-DE"/>
           </a:p>
@@ -1022,7 +1136,7 @@
           <a:p>
             <a:fld id="{0116CD17-7A63-479F-AAA5-C17A016314BF}" type="datetimeFigureOut">
               <a:rPr lang="de-DE" smtClean="0"/>
-              <a:t>26.08.2024</a:t>
+              <a:t>04.06.2025</a:t>
             </a:fld>
             <a:endParaRPr lang="de-DE"/>
           </a:p>
@@ -1202,7 +1316,7 @@
           <a:p>
             <a:fld id="{0116CD17-7A63-479F-AAA5-C17A016314BF}" type="datetimeFigureOut">
               <a:rPr lang="de-DE" smtClean="0"/>
-              <a:t>26.08.2024</a:t>
+              <a:t>04.06.2025</a:t>
             </a:fld>
             <a:endParaRPr lang="de-DE"/>
           </a:p>
@@ -1260,6 +1374,1869 @@
   <p:clrMapOvr>
     <a:masterClrMapping/>
   </p:clrMapOvr>
+</p:sldLayout>
+</file>
+
+<file path=ppt/slideLayouts/slideLayout12.xml><?xml version="1.0" encoding="utf-8"?>
+<p:sldLayout xmlns:a="http://schemas.openxmlformats.org/drawingml/2006/main" xmlns:r="http://schemas.openxmlformats.org/officeDocument/2006/relationships" xmlns:p="http://schemas.openxmlformats.org/presentationml/2006/main" preserve="1" userDrawn="1">
+  <p:cSld name="2 Ansprechpartner">
+    <p:spTree>
+      <p:nvGrpSpPr>
+        <p:cNvPr id="1" name=""/>
+        <p:cNvGrpSpPr/>
+        <p:nvPr/>
+      </p:nvGrpSpPr>
+      <p:grpSpPr>
+        <a:xfrm>
+          <a:off x="0" y="0"/>
+          <a:ext cx="0" cy="0"/>
+          <a:chOff x="0" y="0"/>
+          <a:chExt cx="0" cy="0"/>
+        </a:xfrm>
+      </p:grpSpPr>
+      <p:sp>
+        <p:nvSpPr>
+          <p:cNvPr id="3" name="Foliennummernplatzhalter 2">
+            <a:extLst>
+              <a:ext uri="{FF2B5EF4-FFF2-40B4-BE49-F238E27FC236}">
+                <a16:creationId xmlns:a16="http://schemas.microsoft.com/office/drawing/2014/main" id="{C0687D49-BC3A-2A21-2607-7F3367A24F63}"/>
+              </a:ext>
+            </a:extLst>
+          </p:cNvPr>
+          <p:cNvSpPr>
+            <a:spLocks noGrp="1"/>
+          </p:cNvSpPr>
+          <p:nvPr>
+            <p:ph type="sldNum" sz="quarter" idx="10"/>
+          </p:nvPr>
+        </p:nvSpPr>
+        <p:spPr/>
+        <p:txBody>
+          <a:bodyPr/>
+          <a:lstStyle/>
+          <a:p>
+            <a:pPr marL="0" marR="0" lvl="0" indent="0" algn="l" defTabSz="914400" rtl="0" eaLnBrk="1" fontAlgn="auto" latinLnBrk="0" hangingPunct="1">
+              <a:lnSpc>
+                <a:spcPct val="100000"/>
+              </a:lnSpc>
+              <a:spcBef>
+                <a:spcPts val="0"/>
+              </a:spcBef>
+              <a:spcAft>
+                <a:spcPts val="0"/>
+              </a:spcAft>
+              <a:buClrTx/>
+              <a:buSzTx/>
+              <a:buFontTx/>
+              <a:buNone/>
+              <a:tabLst/>
+              <a:defRPr/>
+            </a:pPr>
+            <a:fld id="{811EC747-7669-4439-BEFB-BCFCAA3B013D}" type="slidenum">
+              <a:rPr kumimoji="0" lang="de-DE" sz="1400" b="1" i="0" u="none" strike="noStrike" kern="1200" cap="none" spc="0" normalizeH="0" baseline="0" noProof="0" smtClean="0">
+                <a:ln>
+                  <a:noFill/>
+                </a:ln>
+                <a:solidFill>
+                  <a:srgbClr val="1D1D1D"/>
+                </a:solidFill>
+                <a:effectLst/>
+                <a:uLnTx/>
+                <a:uFillTx/>
+                <a:latin typeface="Myriad Pro Light" panose="020B0403030403020204" pitchFamily="34" charset="0"/>
+                <a:ea typeface="+mn-ea"/>
+                <a:cs typeface="+mn-cs"/>
+              </a:rPr>
+              <a:pPr marL="0" marR="0" lvl="0" indent="0" algn="l" defTabSz="914400" rtl="0" eaLnBrk="1" fontAlgn="auto" latinLnBrk="0" hangingPunct="1">
+                <a:lnSpc>
+                  <a:spcPct val="100000"/>
+                </a:lnSpc>
+                <a:spcBef>
+                  <a:spcPts val="0"/>
+                </a:spcBef>
+                <a:spcAft>
+                  <a:spcPts val="0"/>
+                </a:spcAft>
+                <a:buClrTx/>
+                <a:buSzTx/>
+                <a:buFontTx/>
+                <a:buNone/>
+                <a:tabLst/>
+                <a:defRPr/>
+              </a:pPr>
+              <a:t>‹Nr.›</a:t>
+            </a:fld>
+            <a:endParaRPr kumimoji="0" lang="de-DE" sz="1400" b="1" i="0" u="none" strike="noStrike" kern="1200" cap="none" spc="0" normalizeH="0" baseline="0" noProof="0" dirty="0">
+              <a:ln>
+                <a:noFill/>
+              </a:ln>
+              <a:solidFill>
+                <a:srgbClr val="1D1D1D"/>
+              </a:solidFill>
+              <a:effectLst/>
+              <a:uLnTx/>
+              <a:uFillTx/>
+              <a:latin typeface="Myriad Pro Light" panose="020B0403030403020204" pitchFamily="34" charset="0"/>
+              <a:ea typeface="+mn-ea"/>
+              <a:cs typeface="+mn-cs"/>
+            </a:endParaRPr>
+          </a:p>
+        </p:txBody>
+      </p:sp>
+      <p:pic>
+        <p:nvPicPr>
+          <p:cNvPr id="4" name="Grafik 3">
+            <a:extLst>
+              <a:ext uri="{FF2B5EF4-FFF2-40B4-BE49-F238E27FC236}">
+                <a16:creationId xmlns:a16="http://schemas.microsoft.com/office/drawing/2014/main" id="{4511BF9B-3108-914A-2756-A53C1FB8B0DD}"/>
+              </a:ext>
+            </a:extLst>
+          </p:cNvPr>
+          <p:cNvPicPr>
+            <a:picLocks noChangeAspect="1"/>
+          </p:cNvPicPr>
+          <p:nvPr userDrawn="1"/>
+        </p:nvPicPr>
+        <p:blipFill>
+          <a:blip r:embed="rId2">
+            <a:extLst>
+              <a:ext uri="{28A0092B-C50C-407E-A947-70E740481C1C}">
+                <a14:useLocalDpi xmlns:a14="http://schemas.microsoft.com/office/drawing/2010/main" val="0"/>
+              </a:ext>
+            </a:extLst>
+          </a:blip>
+          <a:stretch>
+            <a:fillRect/>
+          </a:stretch>
+        </p:blipFill>
+        <p:spPr>
+          <a:xfrm>
+            <a:off x="2869200" y="1584000"/>
+            <a:ext cx="1705064" cy="1695600"/>
+          </a:xfrm>
+          <a:prstGeom prst="rect">
+            <a:avLst/>
+          </a:prstGeom>
+        </p:spPr>
+      </p:pic>
+      <p:sp>
+        <p:nvSpPr>
+          <p:cNvPr id="5" name="Bildplatzhalter 11">
+            <a:extLst>
+              <a:ext uri="{FF2B5EF4-FFF2-40B4-BE49-F238E27FC236}">
+                <a16:creationId xmlns:a16="http://schemas.microsoft.com/office/drawing/2014/main" id="{1C3123B3-A24B-A369-CE0C-9C9599D2CA56}"/>
+              </a:ext>
+            </a:extLst>
+          </p:cNvPr>
+          <p:cNvSpPr>
+            <a:spLocks noGrp="1" noChangeAspect="1"/>
+          </p:cNvSpPr>
+          <p:nvPr>
+            <p:ph type="pic" sz="quarter" idx="12"/>
+          </p:nvPr>
+        </p:nvSpPr>
+        <p:spPr>
+          <a:xfrm>
+            <a:off x="2950723" y="1684912"/>
+            <a:ext cx="1499153" cy="1465200"/>
+          </a:xfrm>
+          <a:custGeom>
+            <a:avLst/>
+            <a:gdLst>
+              <a:gd name="connsiteX0" fmla="*/ 1718842 w 3315081"/>
+              <a:gd name="connsiteY0" fmla="*/ 132 h 3240000"/>
+              <a:gd name="connsiteX1" fmla="*/ 1831149 w 3315081"/>
+              <a:gd name="connsiteY1" fmla="*/ 4233 h 3240000"/>
+              <a:gd name="connsiteX2" fmla="*/ 2768663 w 3315081"/>
+              <a:gd name="connsiteY2" fmla="*/ 341535 h 3240000"/>
+              <a:gd name="connsiteX3" fmla="*/ 3253400 w 3315081"/>
+              <a:gd name="connsiteY3" fmla="*/ 1071562 h 3240000"/>
+              <a:gd name="connsiteX4" fmla="*/ 3288440 w 3315081"/>
+              <a:gd name="connsiteY4" fmla="*/ 1883348 h 3240000"/>
+              <a:gd name="connsiteX5" fmla="*/ 3134984 w 3315081"/>
+              <a:gd name="connsiteY5" fmla="*/ 2419024 h 3240000"/>
+              <a:gd name="connsiteX6" fmla="*/ 3098101 w 3315081"/>
+              <a:gd name="connsiteY6" fmla="*/ 2483916 h 3240000"/>
+              <a:gd name="connsiteX7" fmla="*/ 3075044 w 3315081"/>
+              <a:gd name="connsiteY7" fmla="*/ 2464892 h 3240000"/>
+              <a:gd name="connsiteX8" fmla="*/ 2793253 w 3315081"/>
+              <a:gd name="connsiteY8" fmla="*/ 2378817 h 3240000"/>
+              <a:gd name="connsiteX9" fmla="*/ 2289253 w 3315081"/>
+              <a:gd name="connsiteY9" fmla="*/ 2882817 h 3240000"/>
+              <a:gd name="connsiteX10" fmla="*/ 2328860 w 3315081"/>
+              <a:gd name="connsiteY10" fmla="*/ 3078997 h 3240000"/>
+              <a:gd name="connsiteX11" fmla="*/ 2333819 w 3315081"/>
+              <a:gd name="connsiteY11" fmla="*/ 3088133 h 3240000"/>
+              <a:gd name="connsiteX12" fmla="*/ 2324806 w 3315081"/>
+              <a:gd name="connsiteY12" fmla="*/ 3092271 h 3240000"/>
+              <a:gd name="connsiteX13" fmla="*/ 1422335 w 3315081"/>
+              <a:gd name="connsiteY13" fmla="*/ 3220578 h 3240000"/>
+              <a:gd name="connsiteX14" fmla="*/ 520183 w 3315081"/>
+              <a:gd name="connsiteY14" fmla="*/ 2741859 h 3240000"/>
+              <a:gd name="connsiteX15" fmla="*/ 1051 w 3315081"/>
+              <a:gd name="connsiteY15" fmla="*/ 1705849 h 3240000"/>
+              <a:gd name="connsiteX16" fmla="*/ 403379 w 3315081"/>
+              <a:gd name="connsiteY16" fmla="*/ 691947 h 3240000"/>
+              <a:gd name="connsiteX17" fmla="*/ 999079 w 3315081"/>
+              <a:gd name="connsiteY17" fmla="*/ 178008 h 3240000"/>
+              <a:gd name="connsiteX18" fmla="*/ 1718842 w 3315081"/>
+              <a:gd name="connsiteY18" fmla="*/ 132 h 3240000"/>
+            </a:gdLst>
+            <a:ahLst/>
+            <a:cxnLst>
+              <a:cxn ang="0">
+                <a:pos x="connsiteX0" y="connsiteY0"/>
+              </a:cxn>
+              <a:cxn ang="0">
+                <a:pos x="connsiteX1" y="connsiteY1"/>
+              </a:cxn>
+              <a:cxn ang="0">
+                <a:pos x="connsiteX2" y="connsiteY2"/>
+              </a:cxn>
+              <a:cxn ang="0">
+                <a:pos x="connsiteX3" y="connsiteY3"/>
+              </a:cxn>
+              <a:cxn ang="0">
+                <a:pos x="connsiteX4" y="connsiteY4"/>
+              </a:cxn>
+              <a:cxn ang="0">
+                <a:pos x="connsiteX5" y="connsiteY5"/>
+              </a:cxn>
+              <a:cxn ang="0">
+                <a:pos x="connsiteX6" y="connsiteY6"/>
+              </a:cxn>
+              <a:cxn ang="0">
+                <a:pos x="connsiteX7" y="connsiteY7"/>
+              </a:cxn>
+              <a:cxn ang="0">
+                <a:pos x="connsiteX8" y="connsiteY8"/>
+              </a:cxn>
+              <a:cxn ang="0">
+                <a:pos x="connsiteX9" y="connsiteY9"/>
+              </a:cxn>
+              <a:cxn ang="0">
+                <a:pos x="connsiteX10" y="connsiteY10"/>
+              </a:cxn>
+              <a:cxn ang="0">
+                <a:pos x="connsiteX11" y="connsiteY11"/>
+              </a:cxn>
+              <a:cxn ang="0">
+                <a:pos x="connsiteX12" y="connsiteY12"/>
+              </a:cxn>
+              <a:cxn ang="0">
+                <a:pos x="connsiteX13" y="connsiteY13"/>
+              </a:cxn>
+              <a:cxn ang="0">
+                <a:pos x="connsiteX14" y="connsiteY14"/>
+              </a:cxn>
+              <a:cxn ang="0">
+                <a:pos x="connsiteX15" y="connsiteY15"/>
+              </a:cxn>
+              <a:cxn ang="0">
+                <a:pos x="connsiteX16" y="connsiteY16"/>
+              </a:cxn>
+              <a:cxn ang="0">
+                <a:pos x="connsiteX17" y="connsiteY17"/>
+              </a:cxn>
+              <a:cxn ang="0">
+                <a:pos x="connsiteX18" y="connsiteY18"/>
+              </a:cxn>
+            </a:cxnLst>
+            <a:rect l="l" t="t" r="r" b="b"/>
+            <a:pathLst>
+              <a:path w="3315081" h="3240000">
+                <a:moveTo>
+                  <a:pt x="1718842" y="132"/>
+                </a:moveTo>
+                <a:cubicBezTo>
+                  <a:pt x="1756726" y="-440"/>
+                  <a:pt x="1794283" y="826"/>
+                  <a:pt x="1831149" y="4233"/>
+                </a:cubicBezTo>
+                <a:cubicBezTo>
+                  <a:pt x="2126080" y="31488"/>
+                  <a:pt x="2496580" y="133473"/>
+                  <a:pt x="2768663" y="341535"/>
+                </a:cubicBezTo>
+                <a:cubicBezTo>
+                  <a:pt x="3040745" y="549597"/>
+                  <a:pt x="3174557" y="816539"/>
+                  <a:pt x="3253400" y="1071562"/>
+                </a:cubicBezTo>
+                <a:cubicBezTo>
+                  <a:pt x="3332243" y="1326584"/>
+                  <a:pt x="3325589" y="1625788"/>
+                  <a:pt x="3288440" y="1883348"/>
+                </a:cubicBezTo>
+                <a:cubicBezTo>
+                  <a:pt x="3260579" y="2076518"/>
+                  <a:pt x="3218668" y="2256236"/>
+                  <a:pt x="3134984" y="2419024"/>
+                </a:cubicBezTo>
+                <a:lnTo>
+                  <a:pt x="3098101" y="2483916"/>
+                </a:lnTo>
+                <a:lnTo>
+                  <a:pt x="3075044" y="2464892"/>
+                </a:lnTo>
+                <a:cubicBezTo>
+                  <a:pt x="2994605" y="2410549"/>
+                  <a:pt x="2897635" y="2378817"/>
+                  <a:pt x="2793253" y="2378817"/>
+                </a:cubicBezTo>
+                <a:cubicBezTo>
+                  <a:pt x="2514901" y="2378817"/>
+                  <a:pt x="2289253" y="2604465"/>
+                  <a:pt x="2289253" y="2882817"/>
+                </a:cubicBezTo>
+                <a:cubicBezTo>
+                  <a:pt x="2289253" y="2952405"/>
+                  <a:pt x="2303356" y="3018699"/>
+                  <a:pt x="2328860" y="3078997"/>
+                </a:cubicBezTo>
+                <a:lnTo>
+                  <a:pt x="2333819" y="3088133"/>
+                </a:lnTo>
+                <a:lnTo>
+                  <a:pt x="2324806" y="3092271"/>
+                </a:lnTo>
+                <a:cubicBezTo>
+                  <a:pt x="2076245" y="3196773"/>
+                  <a:pt x="1723106" y="3278980"/>
+                  <a:pt x="1422335" y="3220578"/>
+                </a:cubicBezTo>
+                <a:cubicBezTo>
+                  <a:pt x="1121565" y="3162177"/>
+                  <a:pt x="771664" y="2999181"/>
+                  <a:pt x="520183" y="2741859"/>
+                </a:cubicBezTo>
+                <a:cubicBezTo>
+                  <a:pt x="268702" y="2484538"/>
+                  <a:pt x="20518" y="2047501"/>
+                  <a:pt x="1051" y="1705849"/>
+                </a:cubicBezTo>
+                <a:cubicBezTo>
+                  <a:pt x="-18417" y="1364198"/>
+                  <a:pt x="237041" y="946587"/>
+                  <a:pt x="403379" y="691947"/>
+                </a:cubicBezTo>
+                <a:cubicBezTo>
+                  <a:pt x="569717" y="437307"/>
+                  <a:pt x="801026" y="269266"/>
+                  <a:pt x="999079" y="178008"/>
+                </a:cubicBezTo>
+                <a:cubicBezTo>
+                  <a:pt x="1172376" y="98157"/>
+                  <a:pt x="1453650" y="4132"/>
+                  <a:pt x="1718842" y="132"/>
+                </a:cubicBezTo>
+                <a:close/>
+              </a:path>
+            </a:pathLst>
+          </a:custGeom>
+        </p:spPr>
+        <p:txBody>
+          <a:bodyPr wrap="square">
+            <a:noAutofit/>
+          </a:bodyPr>
+          <a:lstStyle>
+            <a:lvl1pPr marL="0" indent="0">
+              <a:buFontTx/>
+              <a:buNone/>
+              <a:defRPr sz="1400">
+                <a:latin typeface="Open Sans" panose="020B0606030504020204" pitchFamily="34" charset="0"/>
+                <a:ea typeface="Open Sans" panose="020B0606030504020204" pitchFamily="34" charset="0"/>
+                <a:cs typeface="Open Sans" panose="020B0606030504020204" pitchFamily="34" charset="0"/>
+              </a:defRPr>
+            </a:lvl1pPr>
+          </a:lstStyle>
+          <a:p>
+            <a:endParaRPr lang="de-DE" dirty="0"/>
+          </a:p>
+        </p:txBody>
+      </p:sp>
+      <p:pic>
+        <p:nvPicPr>
+          <p:cNvPr id="6" name="Grafik 5">
+            <a:extLst>
+              <a:ext uri="{FF2B5EF4-FFF2-40B4-BE49-F238E27FC236}">
+                <a16:creationId xmlns:a16="http://schemas.microsoft.com/office/drawing/2014/main" id="{62CCFB8A-4F8B-1EAA-5D8A-9379CABA7DCC}"/>
+              </a:ext>
+            </a:extLst>
+          </p:cNvPr>
+          <p:cNvPicPr>
+            <a:picLocks noChangeAspect="1"/>
+          </p:cNvPicPr>
+          <p:nvPr userDrawn="1"/>
+        </p:nvPicPr>
+        <p:blipFill>
+          <a:blip r:embed="rId2">
+            <a:extLst>
+              <a:ext uri="{28A0092B-C50C-407E-A947-70E740481C1C}">
+                <a14:useLocalDpi xmlns:a14="http://schemas.microsoft.com/office/drawing/2010/main" val="0"/>
+              </a:ext>
+            </a:extLst>
+          </a:blip>
+          <a:stretch>
+            <a:fillRect/>
+          </a:stretch>
+        </p:blipFill>
+        <p:spPr>
+          <a:xfrm>
+            <a:off x="7639200" y="1584000"/>
+            <a:ext cx="1705064" cy="1695600"/>
+          </a:xfrm>
+          <a:prstGeom prst="rect">
+            <a:avLst/>
+          </a:prstGeom>
+        </p:spPr>
+      </p:pic>
+      <p:pic>
+        <p:nvPicPr>
+          <p:cNvPr id="7" name="Grafik 6">
+            <a:extLst>
+              <a:ext uri="{FF2B5EF4-FFF2-40B4-BE49-F238E27FC236}">
+                <a16:creationId xmlns:a16="http://schemas.microsoft.com/office/drawing/2014/main" id="{79831654-DEC8-452A-362D-A89C6274D3FA}"/>
+              </a:ext>
+            </a:extLst>
+          </p:cNvPr>
+          <p:cNvPicPr>
+            <a:picLocks noChangeAspect="1"/>
+          </p:cNvPicPr>
+          <p:nvPr userDrawn="1"/>
+        </p:nvPicPr>
+        <p:blipFill>
+          <a:blip r:embed="rId3">
+            <a:extLst>
+              <a:ext uri="{28A0092B-C50C-407E-A947-70E740481C1C}">
+                <a14:useLocalDpi xmlns:a14="http://schemas.microsoft.com/office/drawing/2010/main" val="0"/>
+              </a:ext>
+            </a:extLst>
+          </a:blip>
+          <a:stretch>
+            <a:fillRect/>
+          </a:stretch>
+        </p:blipFill>
+        <p:spPr>
+          <a:xfrm>
+            <a:off x="5655600" y="1860521"/>
+            <a:ext cx="901746" cy="1149409"/>
+          </a:xfrm>
+          <a:prstGeom prst="rect">
+            <a:avLst/>
+          </a:prstGeom>
+        </p:spPr>
+      </p:pic>
+      <p:sp>
+        <p:nvSpPr>
+          <p:cNvPr id="8" name="Bildplatzhalter 11">
+            <a:extLst>
+              <a:ext uri="{FF2B5EF4-FFF2-40B4-BE49-F238E27FC236}">
+                <a16:creationId xmlns:a16="http://schemas.microsoft.com/office/drawing/2014/main" id="{7D3567BC-C80C-8F2D-A1B3-698906754E39}"/>
+              </a:ext>
+            </a:extLst>
+          </p:cNvPr>
+          <p:cNvSpPr>
+            <a:spLocks noGrp="1" noChangeAspect="1"/>
+          </p:cNvSpPr>
+          <p:nvPr>
+            <p:ph type="pic" sz="quarter" idx="13"/>
+          </p:nvPr>
+        </p:nvSpPr>
+        <p:spPr>
+          <a:xfrm>
+            <a:off x="7696554" y="1684912"/>
+            <a:ext cx="1499153" cy="1465200"/>
+          </a:xfrm>
+          <a:custGeom>
+            <a:avLst/>
+            <a:gdLst>
+              <a:gd name="connsiteX0" fmla="*/ 1718842 w 3315081"/>
+              <a:gd name="connsiteY0" fmla="*/ 132 h 3240000"/>
+              <a:gd name="connsiteX1" fmla="*/ 1831149 w 3315081"/>
+              <a:gd name="connsiteY1" fmla="*/ 4233 h 3240000"/>
+              <a:gd name="connsiteX2" fmla="*/ 2768663 w 3315081"/>
+              <a:gd name="connsiteY2" fmla="*/ 341535 h 3240000"/>
+              <a:gd name="connsiteX3" fmla="*/ 3253400 w 3315081"/>
+              <a:gd name="connsiteY3" fmla="*/ 1071562 h 3240000"/>
+              <a:gd name="connsiteX4" fmla="*/ 3288440 w 3315081"/>
+              <a:gd name="connsiteY4" fmla="*/ 1883348 h 3240000"/>
+              <a:gd name="connsiteX5" fmla="*/ 3134984 w 3315081"/>
+              <a:gd name="connsiteY5" fmla="*/ 2419024 h 3240000"/>
+              <a:gd name="connsiteX6" fmla="*/ 3098101 w 3315081"/>
+              <a:gd name="connsiteY6" fmla="*/ 2483916 h 3240000"/>
+              <a:gd name="connsiteX7" fmla="*/ 3075044 w 3315081"/>
+              <a:gd name="connsiteY7" fmla="*/ 2464892 h 3240000"/>
+              <a:gd name="connsiteX8" fmla="*/ 2793253 w 3315081"/>
+              <a:gd name="connsiteY8" fmla="*/ 2378817 h 3240000"/>
+              <a:gd name="connsiteX9" fmla="*/ 2289253 w 3315081"/>
+              <a:gd name="connsiteY9" fmla="*/ 2882817 h 3240000"/>
+              <a:gd name="connsiteX10" fmla="*/ 2328860 w 3315081"/>
+              <a:gd name="connsiteY10" fmla="*/ 3078997 h 3240000"/>
+              <a:gd name="connsiteX11" fmla="*/ 2333819 w 3315081"/>
+              <a:gd name="connsiteY11" fmla="*/ 3088133 h 3240000"/>
+              <a:gd name="connsiteX12" fmla="*/ 2324806 w 3315081"/>
+              <a:gd name="connsiteY12" fmla="*/ 3092271 h 3240000"/>
+              <a:gd name="connsiteX13" fmla="*/ 1422335 w 3315081"/>
+              <a:gd name="connsiteY13" fmla="*/ 3220578 h 3240000"/>
+              <a:gd name="connsiteX14" fmla="*/ 520183 w 3315081"/>
+              <a:gd name="connsiteY14" fmla="*/ 2741859 h 3240000"/>
+              <a:gd name="connsiteX15" fmla="*/ 1051 w 3315081"/>
+              <a:gd name="connsiteY15" fmla="*/ 1705849 h 3240000"/>
+              <a:gd name="connsiteX16" fmla="*/ 403379 w 3315081"/>
+              <a:gd name="connsiteY16" fmla="*/ 691947 h 3240000"/>
+              <a:gd name="connsiteX17" fmla="*/ 999079 w 3315081"/>
+              <a:gd name="connsiteY17" fmla="*/ 178008 h 3240000"/>
+              <a:gd name="connsiteX18" fmla="*/ 1718842 w 3315081"/>
+              <a:gd name="connsiteY18" fmla="*/ 132 h 3240000"/>
+            </a:gdLst>
+            <a:ahLst/>
+            <a:cxnLst>
+              <a:cxn ang="0">
+                <a:pos x="connsiteX0" y="connsiteY0"/>
+              </a:cxn>
+              <a:cxn ang="0">
+                <a:pos x="connsiteX1" y="connsiteY1"/>
+              </a:cxn>
+              <a:cxn ang="0">
+                <a:pos x="connsiteX2" y="connsiteY2"/>
+              </a:cxn>
+              <a:cxn ang="0">
+                <a:pos x="connsiteX3" y="connsiteY3"/>
+              </a:cxn>
+              <a:cxn ang="0">
+                <a:pos x="connsiteX4" y="connsiteY4"/>
+              </a:cxn>
+              <a:cxn ang="0">
+                <a:pos x="connsiteX5" y="connsiteY5"/>
+              </a:cxn>
+              <a:cxn ang="0">
+                <a:pos x="connsiteX6" y="connsiteY6"/>
+              </a:cxn>
+              <a:cxn ang="0">
+                <a:pos x="connsiteX7" y="connsiteY7"/>
+              </a:cxn>
+              <a:cxn ang="0">
+                <a:pos x="connsiteX8" y="connsiteY8"/>
+              </a:cxn>
+              <a:cxn ang="0">
+                <a:pos x="connsiteX9" y="connsiteY9"/>
+              </a:cxn>
+              <a:cxn ang="0">
+                <a:pos x="connsiteX10" y="connsiteY10"/>
+              </a:cxn>
+              <a:cxn ang="0">
+                <a:pos x="connsiteX11" y="connsiteY11"/>
+              </a:cxn>
+              <a:cxn ang="0">
+                <a:pos x="connsiteX12" y="connsiteY12"/>
+              </a:cxn>
+              <a:cxn ang="0">
+                <a:pos x="connsiteX13" y="connsiteY13"/>
+              </a:cxn>
+              <a:cxn ang="0">
+                <a:pos x="connsiteX14" y="connsiteY14"/>
+              </a:cxn>
+              <a:cxn ang="0">
+                <a:pos x="connsiteX15" y="connsiteY15"/>
+              </a:cxn>
+              <a:cxn ang="0">
+                <a:pos x="connsiteX16" y="connsiteY16"/>
+              </a:cxn>
+              <a:cxn ang="0">
+                <a:pos x="connsiteX17" y="connsiteY17"/>
+              </a:cxn>
+              <a:cxn ang="0">
+                <a:pos x="connsiteX18" y="connsiteY18"/>
+              </a:cxn>
+            </a:cxnLst>
+            <a:rect l="l" t="t" r="r" b="b"/>
+            <a:pathLst>
+              <a:path w="3315081" h="3240000">
+                <a:moveTo>
+                  <a:pt x="1718842" y="132"/>
+                </a:moveTo>
+                <a:cubicBezTo>
+                  <a:pt x="1756726" y="-440"/>
+                  <a:pt x="1794283" y="826"/>
+                  <a:pt x="1831149" y="4233"/>
+                </a:cubicBezTo>
+                <a:cubicBezTo>
+                  <a:pt x="2126080" y="31488"/>
+                  <a:pt x="2496580" y="133473"/>
+                  <a:pt x="2768663" y="341535"/>
+                </a:cubicBezTo>
+                <a:cubicBezTo>
+                  <a:pt x="3040745" y="549597"/>
+                  <a:pt x="3174557" y="816539"/>
+                  <a:pt x="3253400" y="1071562"/>
+                </a:cubicBezTo>
+                <a:cubicBezTo>
+                  <a:pt x="3332243" y="1326584"/>
+                  <a:pt x="3325589" y="1625788"/>
+                  <a:pt x="3288440" y="1883348"/>
+                </a:cubicBezTo>
+                <a:cubicBezTo>
+                  <a:pt x="3260579" y="2076518"/>
+                  <a:pt x="3218668" y="2256236"/>
+                  <a:pt x="3134984" y="2419024"/>
+                </a:cubicBezTo>
+                <a:lnTo>
+                  <a:pt x="3098101" y="2483916"/>
+                </a:lnTo>
+                <a:lnTo>
+                  <a:pt x="3075044" y="2464892"/>
+                </a:lnTo>
+                <a:cubicBezTo>
+                  <a:pt x="2994605" y="2410549"/>
+                  <a:pt x="2897635" y="2378817"/>
+                  <a:pt x="2793253" y="2378817"/>
+                </a:cubicBezTo>
+                <a:cubicBezTo>
+                  <a:pt x="2514901" y="2378817"/>
+                  <a:pt x="2289253" y="2604465"/>
+                  <a:pt x="2289253" y="2882817"/>
+                </a:cubicBezTo>
+                <a:cubicBezTo>
+                  <a:pt x="2289253" y="2952405"/>
+                  <a:pt x="2303356" y="3018699"/>
+                  <a:pt x="2328860" y="3078997"/>
+                </a:cubicBezTo>
+                <a:lnTo>
+                  <a:pt x="2333819" y="3088133"/>
+                </a:lnTo>
+                <a:lnTo>
+                  <a:pt x="2324806" y="3092271"/>
+                </a:lnTo>
+                <a:cubicBezTo>
+                  <a:pt x="2076245" y="3196773"/>
+                  <a:pt x="1723106" y="3278980"/>
+                  <a:pt x="1422335" y="3220578"/>
+                </a:cubicBezTo>
+                <a:cubicBezTo>
+                  <a:pt x="1121565" y="3162177"/>
+                  <a:pt x="771664" y="2999181"/>
+                  <a:pt x="520183" y="2741859"/>
+                </a:cubicBezTo>
+                <a:cubicBezTo>
+                  <a:pt x="268702" y="2484538"/>
+                  <a:pt x="20518" y="2047501"/>
+                  <a:pt x="1051" y="1705849"/>
+                </a:cubicBezTo>
+                <a:cubicBezTo>
+                  <a:pt x="-18417" y="1364198"/>
+                  <a:pt x="237041" y="946587"/>
+                  <a:pt x="403379" y="691947"/>
+                </a:cubicBezTo>
+                <a:cubicBezTo>
+                  <a:pt x="569717" y="437307"/>
+                  <a:pt x="801026" y="269266"/>
+                  <a:pt x="999079" y="178008"/>
+                </a:cubicBezTo>
+                <a:cubicBezTo>
+                  <a:pt x="1172376" y="98157"/>
+                  <a:pt x="1453650" y="4132"/>
+                  <a:pt x="1718842" y="132"/>
+                </a:cubicBezTo>
+                <a:close/>
+              </a:path>
+            </a:pathLst>
+          </a:custGeom>
+        </p:spPr>
+        <p:txBody>
+          <a:bodyPr wrap="square">
+            <a:noAutofit/>
+          </a:bodyPr>
+          <a:lstStyle>
+            <a:lvl1pPr marL="0" indent="0">
+              <a:buFontTx/>
+              <a:buNone/>
+              <a:defRPr sz="1400">
+                <a:latin typeface="Open Sans" panose="020B0606030504020204" pitchFamily="34" charset="0"/>
+                <a:ea typeface="Open Sans" panose="020B0606030504020204" pitchFamily="34" charset="0"/>
+                <a:cs typeface="Open Sans" panose="020B0606030504020204" pitchFamily="34" charset="0"/>
+              </a:defRPr>
+            </a:lvl1pPr>
+          </a:lstStyle>
+          <a:p>
+            <a:endParaRPr lang="de-DE" dirty="0"/>
+          </a:p>
+        </p:txBody>
+      </p:sp>
+      <p:sp>
+        <p:nvSpPr>
+          <p:cNvPr id="9" name="Textplatzhalter 2">
+            <a:extLst>
+              <a:ext uri="{FF2B5EF4-FFF2-40B4-BE49-F238E27FC236}">
+                <a16:creationId xmlns:a16="http://schemas.microsoft.com/office/drawing/2014/main" id="{6AB0503E-C2C7-9B54-11D0-FBFA61F726FC}"/>
+              </a:ext>
+            </a:extLst>
+          </p:cNvPr>
+          <p:cNvSpPr>
+            <a:spLocks noGrp="1"/>
+          </p:cNvSpPr>
+          <p:nvPr>
+            <p:ph type="body" sz="quarter" idx="14" hasCustomPrompt="1"/>
+          </p:nvPr>
+        </p:nvSpPr>
+        <p:spPr>
+          <a:xfrm>
+            <a:off x="438804" y="817200"/>
+            <a:ext cx="10994612" cy="440100"/>
+          </a:xfrm>
+          <a:prstGeom prst="rect">
+            <a:avLst/>
+          </a:prstGeom>
+        </p:spPr>
+        <p:txBody>
+          <a:bodyPr/>
+          <a:lstStyle>
+            <a:lvl1pPr marL="0" indent="0" algn="l">
+              <a:buFontTx/>
+              <a:buNone/>
+              <a:defRPr sz="2400">
+                <a:solidFill>
+                  <a:srgbClr val="1D1D1B"/>
+                </a:solidFill>
+                <a:latin typeface="Open Sans" panose="020B0606030504020204" pitchFamily="34" charset="0"/>
+                <a:ea typeface="Open Sans" panose="020B0606030504020204" pitchFamily="34" charset="0"/>
+                <a:cs typeface="Open Sans" panose="020B0606030504020204" pitchFamily="34" charset="0"/>
+              </a:defRPr>
+            </a:lvl1pPr>
+          </a:lstStyle>
+          <a:p>
+            <a:pPr lvl="0"/>
+            <a:r>
+              <a:rPr lang="de-DE" dirty="0"/>
+              <a:t>Titel einfügen</a:t>
+            </a:r>
+          </a:p>
+        </p:txBody>
+      </p:sp>
+    </p:spTree>
+    <p:extLst>
+      <p:ext uri="{BB962C8B-B14F-4D97-AF65-F5344CB8AC3E}">
+        <p14:creationId xmlns:p14="http://schemas.microsoft.com/office/powerpoint/2010/main" val="3336328597"/>
+      </p:ext>
+    </p:extLst>
+  </p:cSld>
+  <p:clrMapOvr>
+    <a:masterClrMapping/>
+  </p:clrMapOvr>
+  <p:extLst>
+    <p:ext uri="{DCECCB84-F9BA-43D5-87BE-67443E8EF086}">
+      <p15:sldGuideLst xmlns:p15="http://schemas.microsoft.com/office/powerpoint/2012/main">
+        <p15:guide id="1" orient="horz" pos="2160">
+          <p15:clr>
+            <a:srgbClr val="FBAE40"/>
+          </p15:clr>
+        </p15:guide>
+        <p15:guide id="2" pos="3840">
+          <p15:clr>
+            <a:srgbClr val="FBAE40"/>
+          </p15:clr>
+        </p15:guide>
+      </p15:sldGuideLst>
+    </p:ext>
+  </p:extLst>
+</p:sldLayout>
+</file>
+
+<file path=ppt/slideLayouts/slideLayout13.xml><?xml version="1.0" encoding="utf-8"?>
+<p:sldLayout xmlns:a="http://schemas.openxmlformats.org/drawingml/2006/main" xmlns:r="http://schemas.openxmlformats.org/officeDocument/2006/relationships" xmlns:p="http://schemas.openxmlformats.org/presentationml/2006/main" preserve="1" userDrawn="1">
+  <p:cSld name="Ein_Ansprechpartner">
+    <p:spTree>
+      <p:nvGrpSpPr>
+        <p:cNvPr id="1" name=""/>
+        <p:cNvGrpSpPr/>
+        <p:nvPr/>
+      </p:nvGrpSpPr>
+      <p:grpSpPr>
+        <a:xfrm>
+          <a:off x="0" y="0"/>
+          <a:ext cx="0" cy="0"/>
+          <a:chOff x="0" y="0"/>
+          <a:chExt cx="0" cy="0"/>
+        </a:xfrm>
+      </p:grpSpPr>
+      <p:sp>
+        <p:nvSpPr>
+          <p:cNvPr id="3" name="Foliennummernplatzhalter 2">
+            <a:extLst>
+              <a:ext uri="{FF2B5EF4-FFF2-40B4-BE49-F238E27FC236}">
+                <a16:creationId xmlns:a16="http://schemas.microsoft.com/office/drawing/2014/main" id="{C0687D49-BC3A-2A21-2607-7F3367A24F63}"/>
+              </a:ext>
+            </a:extLst>
+          </p:cNvPr>
+          <p:cNvSpPr>
+            <a:spLocks noGrp="1"/>
+          </p:cNvSpPr>
+          <p:nvPr>
+            <p:ph type="sldNum" sz="quarter" idx="10"/>
+          </p:nvPr>
+        </p:nvSpPr>
+        <p:spPr/>
+        <p:txBody>
+          <a:bodyPr/>
+          <a:lstStyle/>
+          <a:p>
+            <a:fld id="{811EC747-7669-4439-BEFB-BCFCAA3B013D}" type="slidenum">
+              <a:rPr lang="de-DE" smtClean="0"/>
+              <a:pPr/>
+              <a:t>‹Nr.›</a:t>
+            </a:fld>
+            <a:endParaRPr lang="de-DE" dirty="0"/>
+          </a:p>
+        </p:txBody>
+      </p:sp>
+      <p:pic>
+        <p:nvPicPr>
+          <p:cNvPr id="4" name="Grafik 3">
+            <a:extLst>
+              <a:ext uri="{FF2B5EF4-FFF2-40B4-BE49-F238E27FC236}">
+                <a16:creationId xmlns:a16="http://schemas.microsoft.com/office/drawing/2014/main" id="{4511BF9B-3108-914A-2756-A53C1FB8B0DD}"/>
+              </a:ext>
+            </a:extLst>
+          </p:cNvPr>
+          <p:cNvPicPr>
+            <a:picLocks noChangeAspect="1"/>
+          </p:cNvPicPr>
+          <p:nvPr userDrawn="1"/>
+        </p:nvPicPr>
+        <p:blipFill>
+          <a:blip r:embed="rId2">
+            <a:extLst>
+              <a:ext uri="{28A0092B-C50C-407E-A947-70E740481C1C}">
+                <a14:useLocalDpi xmlns:a14="http://schemas.microsoft.com/office/drawing/2010/main" val="0"/>
+              </a:ext>
+            </a:extLst>
+          </a:blip>
+          <a:stretch>
+            <a:fillRect/>
+          </a:stretch>
+        </p:blipFill>
+        <p:spPr>
+          <a:xfrm>
+            <a:off x="5233802" y="1584000"/>
+            <a:ext cx="1705064" cy="1695600"/>
+          </a:xfrm>
+          <a:prstGeom prst="rect">
+            <a:avLst/>
+          </a:prstGeom>
+        </p:spPr>
+      </p:pic>
+      <p:sp>
+        <p:nvSpPr>
+          <p:cNvPr id="5" name="Bildplatzhalter 11">
+            <a:extLst>
+              <a:ext uri="{FF2B5EF4-FFF2-40B4-BE49-F238E27FC236}">
+                <a16:creationId xmlns:a16="http://schemas.microsoft.com/office/drawing/2014/main" id="{1C3123B3-A24B-A369-CE0C-9C9599D2CA56}"/>
+              </a:ext>
+            </a:extLst>
+          </p:cNvPr>
+          <p:cNvSpPr>
+            <a:spLocks noGrp="1" noChangeAspect="1"/>
+          </p:cNvSpPr>
+          <p:nvPr>
+            <p:ph type="pic" sz="quarter" idx="12"/>
+          </p:nvPr>
+        </p:nvSpPr>
+        <p:spPr>
+          <a:xfrm>
+            <a:off x="5346423" y="1684912"/>
+            <a:ext cx="1499153" cy="1465200"/>
+          </a:xfrm>
+          <a:custGeom>
+            <a:avLst/>
+            <a:gdLst>
+              <a:gd name="connsiteX0" fmla="*/ 1718842 w 3315081"/>
+              <a:gd name="connsiteY0" fmla="*/ 132 h 3240000"/>
+              <a:gd name="connsiteX1" fmla="*/ 1831149 w 3315081"/>
+              <a:gd name="connsiteY1" fmla="*/ 4233 h 3240000"/>
+              <a:gd name="connsiteX2" fmla="*/ 2768663 w 3315081"/>
+              <a:gd name="connsiteY2" fmla="*/ 341535 h 3240000"/>
+              <a:gd name="connsiteX3" fmla="*/ 3253400 w 3315081"/>
+              <a:gd name="connsiteY3" fmla="*/ 1071562 h 3240000"/>
+              <a:gd name="connsiteX4" fmla="*/ 3288440 w 3315081"/>
+              <a:gd name="connsiteY4" fmla="*/ 1883348 h 3240000"/>
+              <a:gd name="connsiteX5" fmla="*/ 3134984 w 3315081"/>
+              <a:gd name="connsiteY5" fmla="*/ 2419024 h 3240000"/>
+              <a:gd name="connsiteX6" fmla="*/ 3098101 w 3315081"/>
+              <a:gd name="connsiteY6" fmla="*/ 2483916 h 3240000"/>
+              <a:gd name="connsiteX7" fmla="*/ 3075044 w 3315081"/>
+              <a:gd name="connsiteY7" fmla="*/ 2464892 h 3240000"/>
+              <a:gd name="connsiteX8" fmla="*/ 2793253 w 3315081"/>
+              <a:gd name="connsiteY8" fmla="*/ 2378817 h 3240000"/>
+              <a:gd name="connsiteX9" fmla="*/ 2289253 w 3315081"/>
+              <a:gd name="connsiteY9" fmla="*/ 2882817 h 3240000"/>
+              <a:gd name="connsiteX10" fmla="*/ 2328860 w 3315081"/>
+              <a:gd name="connsiteY10" fmla="*/ 3078997 h 3240000"/>
+              <a:gd name="connsiteX11" fmla="*/ 2333819 w 3315081"/>
+              <a:gd name="connsiteY11" fmla="*/ 3088133 h 3240000"/>
+              <a:gd name="connsiteX12" fmla="*/ 2324806 w 3315081"/>
+              <a:gd name="connsiteY12" fmla="*/ 3092271 h 3240000"/>
+              <a:gd name="connsiteX13" fmla="*/ 1422335 w 3315081"/>
+              <a:gd name="connsiteY13" fmla="*/ 3220578 h 3240000"/>
+              <a:gd name="connsiteX14" fmla="*/ 520183 w 3315081"/>
+              <a:gd name="connsiteY14" fmla="*/ 2741859 h 3240000"/>
+              <a:gd name="connsiteX15" fmla="*/ 1051 w 3315081"/>
+              <a:gd name="connsiteY15" fmla="*/ 1705849 h 3240000"/>
+              <a:gd name="connsiteX16" fmla="*/ 403379 w 3315081"/>
+              <a:gd name="connsiteY16" fmla="*/ 691947 h 3240000"/>
+              <a:gd name="connsiteX17" fmla="*/ 999079 w 3315081"/>
+              <a:gd name="connsiteY17" fmla="*/ 178008 h 3240000"/>
+              <a:gd name="connsiteX18" fmla="*/ 1718842 w 3315081"/>
+              <a:gd name="connsiteY18" fmla="*/ 132 h 3240000"/>
+            </a:gdLst>
+            <a:ahLst/>
+            <a:cxnLst>
+              <a:cxn ang="0">
+                <a:pos x="connsiteX0" y="connsiteY0"/>
+              </a:cxn>
+              <a:cxn ang="0">
+                <a:pos x="connsiteX1" y="connsiteY1"/>
+              </a:cxn>
+              <a:cxn ang="0">
+                <a:pos x="connsiteX2" y="connsiteY2"/>
+              </a:cxn>
+              <a:cxn ang="0">
+                <a:pos x="connsiteX3" y="connsiteY3"/>
+              </a:cxn>
+              <a:cxn ang="0">
+                <a:pos x="connsiteX4" y="connsiteY4"/>
+              </a:cxn>
+              <a:cxn ang="0">
+                <a:pos x="connsiteX5" y="connsiteY5"/>
+              </a:cxn>
+              <a:cxn ang="0">
+                <a:pos x="connsiteX6" y="connsiteY6"/>
+              </a:cxn>
+              <a:cxn ang="0">
+                <a:pos x="connsiteX7" y="connsiteY7"/>
+              </a:cxn>
+              <a:cxn ang="0">
+                <a:pos x="connsiteX8" y="connsiteY8"/>
+              </a:cxn>
+              <a:cxn ang="0">
+                <a:pos x="connsiteX9" y="connsiteY9"/>
+              </a:cxn>
+              <a:cxn ang="0">
+                <a:pos x="connsiteX10" y="connsiteY10"/>
+              </a:cxn>
+              <a:cxn ang="0">
+                <a:pos x="connsiteX11" y="connsiteY11"/>
+              </a:cxn>
+              <a:cxn ang="0">
+                <a:pos x="connsiteX12" y="connsiteY12"/>
+              </a:cxn>
+              <a:cxn ang="0">
+                <a:pos x="connsiteX13" y="connsiteY13"/>
+              </a:cxn>
+              <a:cxn ang="0">
+                <a:pos x="connsiteX14" y="connsiteY14"/>
+              </a:cxn>
+              <a:cxn ang="0">
+                <a:pos x="connsiteX15" y="connsiteY15"/>
+              </a:cxn>
+              <a:cxn ang="0">
+                <a:pos x="connsiteX16" y="connsiteY16"/>
+              </a:cxn>
+              <a:cxn ang="0">
+                <a:pos x="connsiteX17" y="connsiteY17"/>
+              </a:cxn>
+              <a:cxn ang="0">
+                <a:pos x="connsiteX18" y="connsiteY18"/>
+              </a:cxn>
+            </a:cxnLst>
+            <a:rect l="l" t="t" r="r" b="b"/>
+            <a:pathLst>
+              <a:path w="3315081" h="3240000">
+                <a:moveTo>
+                  <a:pt x="1718842" y="132"/>
+                </a:moveTo>
+                <a:cubicBezTo>
+                  <a:pt x="1756726" y="-440"/>
+                  <a:pt x="1794283" y="826"/>
+                  <a:pt x="1831149" y="4233"/>
+                </a:cubicBezTo>
+                <a:cubicBezTo>
+                  <a:pt x="2126080" y="31488"/>
+                  <a:pt x="2496580" y="133473"/>
+                  <a:pt x="2768663" y="341535"/>
+                </a:cubicBezTo>
+                <a:cubicBezTo>
+                  <a:pt x="3040745" y="549597"/>
+                  <a:pt x="3174557" y="816539"/>
+                  <a:pt x="3253400" y="1071562"/>
+                </a:cubicBezTo>
+                <a:cubicBezTo>
+                  <a:pt x="3332243" y="1326584"/>
+                  <a:pt x="3325589" y="1625788"/>
+                  <a:pt x="3288440" y="1883348"/>
+                </a:cubicBezTo>
+                <a:cubicBezTo>
+                  <a:pt x="3260579" y="2076518"/>
+                  <a:pt x="3218668" y="2256236"/>
+                  <a:pt x="3134984" y="2419024"/>
+                </a:cubicBezTo>
+                <a:lnTo>
+                  <a:pt x="3098101" y="2483916"/>
+                </a:lnTo>
+                <a:lnTo>
+                  <a:pt x="3075044" y="2464892"/>
+                </a:lnTo>
+                <a:cubicBezTo>
+                  <a:pt x="2994605" y="2410549"/>
+                  <a:pt x="2897635" y="2378817"/>
+                  <a:pt x="2793253" y="2378817"/>
+                </a:cubicBezTo>
+                <a:cubicBezTo>
+                  <a:pt x="2514901" y="2378817"/>
+                  <a:pt x="2289253" y="2604465"/>
+                  <a:pt x="2289253" y="2882817"/>
+                </a:cubicBezTo>
+                <a:cubicBezTo>
+                  <a:pt x="2289253" y="2952405"/>
+                  <a:pt x="2303356" y="3018699"/>
+                  <a:pt x="2328860" y="3078997"/>
+                </a:cubicBezTo>
+                <a:lnTo>
+                  <a:pt x="2333819" y="3088133"/>
+                </a:lnTo>
+                <a:lnTo>
+                  <a:pt x="2324806" y="3092271"/>
+                </a:lnTo>
+                <a:cubicBezTo>
+                  <a:pt x="2076245" y="3196773"/>
+                  <a:pt x="1723106" y="3278980"/>
+                  <a:pt x="1422335" y="3220578"/>
+                </a:cubicBezTo>
+                <a:cubicBezTo>
+                  <a:pt x="1121565" y="3162177"/>
+                  <a:pt x="771664" y="2999181"/>
+                  <a:pt x="520183" y="2741859"/>
+                </a:cubicBezTo>
+                <a:cubicBezTo>
+                  <a:pt x="268702" y="2484538"/>
+                  <a:pt x="20518" y="2047501"/>
+                  <a:pt x="1051" y="1705849"/>
+                </a:cubicBezTo>
+                <a:cubicBezTo>
+                  <a:pt x="-18417" y="1364198"/>
+                  <a:pt x="237041" y="946587"/>
+                  <a:pt x="403379" y="691947"/>
+                </a:cubicBezTo>
+                <a:cubicBezTo>
+                  <a:pt x="569717" y="437307"/>
+                  <a:pt x="801026" y="269266"/>
+                  <a:pt x="999079" y="178008"/>
+                </a:cubicBezTo>
+                <a:cubicBezTo>
+                  <a:pt x="1172376" y="98157"/>
+                  <a:pt x="1453650" y="4132"/>
+                  <a:pt x="1718842" y="132"/>
+                </a:cubicBezTo>
+                <a:close/>
+              </a:path>
+            </a:pathLst>
+          </a:custGeom>
+        </p:spPr>
+        <p:txBody>
+          <a:bodyPr wrap="square">
+            <a:noAutofit/>
+          </a:bodyPr>
+          <a:lstStyle>
+            <a:lvl1pPr marL="0" indent="0">
+              <a:buFontTx/>
+              <a:buNone/>
+              <a:defRPr sz="1400">
+                <a:latin typeface="Open Sans" panose="020B0606030504020204" pitchFamily="34" charset="0"/>
+                <a:ea typeface="Open Sans" panose="020B0606030504020204" pitchFamily="34" charset="0"/>
+                <a:cs typeface="Open Sans" panose="020B0606030504020204" pitchFamily="34" charset="0"/>
+              </a:defRPr>
+            </a:lvl1pPr>
+          </a:lstStyle>
+          <a:p>
+            <a:endParaRPr lang="de-DE" dirty="0"/>
+          </a:p>
+        </p:txBody>
+      </p:sp>
+      <p:sp>
+        <p:nvSpPr>
+          <p:cNvPr id="9" name="Textplatzhalter 2">
+            <a:extLst>
+              <a:ext uri="{FF2B5EF4-FFF2-40B4-BE49-F238E27FC236}">
+                <a16:creationId xmlns:a16="http://schemas.microsoft.com/office/drawing/2014/main" id="{6AB0503E-C2C7-9B54-11D0-FBFA61F726FC}"/>
+              </a:ext>
+            </a:extLst>
+          </p:cNvPr>
+          <p:cNvSpPr>
+            <a:spLocks noGrp="1"/>
+          </p:cNvSpPr>
+          <p:nvPr>
+            <p:ph type="body" sz="quarter" idx="14" hasCustomPrompt="1"/>
+          </p:nvPr>
+        </p:nvSpPr>
+        <p:spPr>
+          <a:xfrm>
+            <a:off x="438804" y="817200"/>
+            <a:ext cx="10994612" cy="440100"/>
+          </a:xfrm>
+          <a:prstGeom prst="rect">
+            <a:avLst/>
+          </a:prstGeom>
+        </p:spPr>
+        <p:txBody>
+          <a:bodyPr/>
+          <a:lstStyle>
+            <a:lvl1pPr marL="0" indent="0" algn="l">
+              <a:buFontTx/>
+              <a:buNone/>
+              <a:defRPr sz="2400">
+                <a:solidFill>
+                  <a:srgbClr val="1D1D1B"/>
+                </a:solidFill>
+                <a:latin typeface="Open Sans" panose="020B0606030504020204" pitchFamily="34" charset="0"/>
+                <a:ea typeface="Open Sans" panose="020B0606030504020204" pitchFamily="34" charset="0"/>
+                <a:cs typeface="Open Sans" panose="020B0606030504020204" pitchFamily="34" charset="0"/>
+              </a:defRPr>
+            </a:lvl1pPr>
+          </a:lstStyle>
+          <a:p>
+            <a:pPr lvl="0"/>
+            <a:r>
+              <a:rPr lang="de-DE" dirty="0"/>
+              <a:t>Titel einfügen</a:t>
+            </a:r>
+          </a:p>
+        </p:txBody>
+      </p:sp>
+      <p:pic>
+        <p:nvPicPr>
+          <p:cNvPr id="2" name="Grafik 1">
+            <a:extLst>
+              <a:ext uri="{FF2B5EF4-FFF2-40B4-BE49-F238E27FC236}">
+                <a16:creationId xmlns:a16="http://schemas.microsoft.com/office/drawing/2014/main" id="{ED1CCFC6-6BF4-1F59-424D-260240A78E78}"/>
+              </a:ext>
+            </a:extLst>
+          </p:cNvPr>
+          <p:cNvPicPr>
+            <a:picLocks noChangeAspect="1"/>
+          </p:cNvPicPr>
+          <p:nvPr userDrawn="1"/>
+        </p:nvPicPr>
+        <p:blipFill>
+          <a:blip r:embed="rId3">
+            <a:extLst>
+              <a:ext uri="{28A0092B-C50C-407E-A947-70E740481C1C}">
+                <a14:useLocalDpi xmlns:a14="http://schemas.microsoft.com/office/drawing/2010/main" val="0"/>
+              </a:ext>
+            </a:extLst>
+          </a:blip>
+          <a:stretch>
+            <a:fillRect/>
+          </a:stretch>
+        </p:blipFill>
+        <p:spPr>
+          <a:xfrm>
+            <a:off x="2464456" y="3340573"/>
+            <a:ext cx="288940" cy="317516"/>
+          </a:xfrm>
+          <a:prstGeom prst="rect">
+            <a:avLst/>
+          </a:prstGeom>
+        </p:spPr>
+      </p:pic>
+      <p:pic>
+        <p:nvPicPr>
+          <p:cNvPr id="10" name="Grafik 9">
+            <a:extLst>
+              <a:ext uri="{FF2B5EF4-FFF2-40B4-BE49-F238E27FC236}">
+                <a16:creationId xmlns:a16="http://schemas.microsoft.com/office/drawing/2014/main" id="{B2FF959C-237F-CA91-F191-E8C1CD01FDC5}"/>
+              </a:ext>
+            </a:extLst>
+          </p:cNvPr>
+          <p:cNvPicPr>
+            <a:picLocks noChangeAspect="1"/>
+          </p:cNvPicPr>
+          <p:nvPr userDrawn="1"/>
+        </p:nvPicPr>
+        <p:blipFill>
+          <a:blip r:embed="rId4">
+            <a:extLst>
+              <a:ext uri="{28A0092B-C50C-407E-A947-70E740481C1C}">
+                <a14:useLocalDpi xmlns:a14="http://schemas.microsoft.com/office/drawing/2010/main" val="0"/>
+              </a:ext>
+            </a:extLst>
+          </a:blip>
+          <a:stretch>
+            <a:fillRect/>
+          </a:stretch>
+        </p:blipFill>
+        <p:spPr>
+          <a:xfrm>
+            <a:off x="9440338" y="2074594"/>
+            <a:ext cx="304816" cy="342918"/>
+          </a:xfrm>
+          <a:prstGeom prst="rect">
+            <a:avLst/>
+          </a:prstGeom>
+        </p:spPr>
+      </p:pic>
+      <p:pic>
+        <p:nvPicPr>
+          <p:cNvPr id="11" name="Grafik 10" descr="Ein Bild, das Text enthält.&#10;&#10;Automatisch generierte Beschreibung">
+            <a:extLst>
+              <a:ext uri="{FF2B5EF4-FFF2-40B4-BE49-F238E27FC236}">
+                <a16:creationId xmlns:a16="http://schemas.microsoft.com/office/drawing/2014/main" id="{7CBB89D8-E1A5-A742-DE52-CF77493C7687}"/>
+              </a:ext>
+            </a:extLst>
+          </p:cNvPr>
+          <p:cNvPicPr>
+            <a:picLocks noChangeAspect="1"/>
+          </p:cNvPicPr>
+          <p:nvPr userDrawn="1"/>
+        </p:nvPicPr>
+        <p:blipFill>
+          <a:blip r:embed="rId5">
+            <a:extLst>
+              <a:ext uri="{28A0092B-C50C-407E-A947-70E740481C1C}">
+                <a14:useLocalDpi xmlns:a14="http://schemas.microsoft.com/office/drawing/2010/main" val="0"/>
+              </a:ext>
+            </a:extLst>
+          </a:blip>
+          <a:stretch>
+            <a:fillRect/>
+          </a:stretch>
+        </p:blipFill>
+        <p:spPr>
+          <a:xfrm>
+            <a:off x="10443065" y="5933536"/>
+            <a:ext cx="238137" cy="339742"/>
+          </a:xfrm>
+          <a:prstGeom prst="rect">
+            <a:avLst/>
+          </a:prstGeom>
+        </p:spPr>
+      </p:pic>
+    </p:spTree>
+    <p:extLst>
+      <p:ext uri="{BB962C8B-B14F-4D97-AF65-F5344CB8AC3E}">
+        <p14:creationId xmlns:p14="http://schemas.microsoft.com/office/powerpoint/2010/main" val="818808817"/>
+      </p:ext>
+    </p:extLst>
+  </p:cSld>
+  <p:clrMapOvr>
+    <a:masterClrMapping/>
+  </p:clrMapOvr>
+  <p:extLst>
+    <p:ext uri="{DCECCB84-F9BA-43D5-87BE-67443E8EF086}">
+      <p15:sldGuideLst xmlns:p15="http://schemas.microsoft.com/office/powerpoint/2012/main">
+        <p15:guide id="1" orient="horz" pos="2160">
+          <p15:clr>
+            <a:srgbClr val="FBAE40"/>
+          </p15:clr>
+        </p15:guide>
+        <p15:guide id="2" pos="3840">
+          <p15:clr>
+            <a:srgbClr val="FBAE40"/>
+          </p15:clr>
+        </p15:guide>
+      </p15:sldGuideLst>
+    </p:ext>
+  </p:extLst>
+</p:sldLayout>
+</file>
+
+<file path=ppt/slideLayouts/slideLayout14.xml><?xml version="1.0" encoding="utf-8"?>
+<p:sldLayout xmlns:a="http://schemas.openxmlformats.org/drawingml/2006/main" xmlns:r="http://schemas.openxmlformats.org/officeDocument/2006/relationships" xmlns:p="http://schemas.openxmlformats.org/presentationml/2006/main" userDrawn="1">
+  <p:cSld name="Header, Überschrift, Fließtext in Box">
+    <p:spTree>
+      <p:nvGrpSpPr>
+        <p:cNvPr id="1" name=""/>
+        <p:cNvGrpSpPr/>
+        <p:nvPr/>
+      </p:nvGrpSpPr>
+      <p:grpSpPr>
+        <a:xfrm>
+          <a:off x="0" y="0"/>
+          <a:ext cx="0" cy="0"/>
+          <a:chOff x="0" y="0"/>
+          <a:chExt cx="0" cy="0"/>
+        </a:xfrm>
+      </p:grpSpPr>
+      <p:sp>
+        <p:nvSpPr>
+          <p:cNvPr id="6" name="Foliennummernplatzhalter 5">
+            <a:extLst>
+              <a:ext uri="{FF2B5EF4-FFF2-40B4-BE49-F238E27FC236}">
+                <a16:creationId xmlns:a16="http://schemas.microsoft.com/office/drawing/2014/main" id="{777CEC47-5E2F-58DE-4385-F7EB30035D92}"/>
+              </a:ext>
+            </a:extLst>
+          </p:cNvPr>
+          <p:cNvSpPr>
+            <a:spLocks noGrp="1"/>
+          </p:cNvSpPr>
+          <p:nvPr>
+            <p:ph type="sldNum" sz="quarter" idx="12"/>
+          </p:nvPr>
+        </p:nvSpPr>
+        <p:spPr>
+          <a:xfrm>
+            <a:off x="11433416" y="253140"/>
+            <a:ext cx="602455" cy="365125"/>
+          </a:xfrm>
+          <a:prstGeom prst="rect">
+            <a:avLst/>
+          </a:prstGeom>
+        </p:spPr>
+        <p:txBody>
+          <a:bodyPr/>
+          <a:lstStyle>
+            <a:lvl1pPr>
+              <a:defRPr sz="1200">
+                <a:latin typeface="Open Sans" panose="020B0606030504020204" pitchFamily="34" charset="0"/>
+                <a:ea typeface="Open Sans" panose="020B0606030504020204" pitchFamily="34" charset="0"/>
+                <a:cs typeface="Open Sans" panose="020B0606030504020204" pitchFamily="34" charset="0"/>
+              </a:defRPr>
+            </a:lvl1pPr>
+          </a:lstStyle>
+          <a:p>
+            <a:fld id="{811EC747-7669-4439-BEFB-BCFCAA3B013D}" type="slidenum">
+              <a:rPr lang="de-DE" smtClean="0"/>
+              <a:pPr/>
+              <a:t>‹Nr.›</a:t>
+            </a:fld>
+            <a:endParaRPr lang="de-DE" dirty="0"/>
+          </a:p>
+        </p:txBody>
+      </p:sp>
+      <p:sp>
+        <p:nvSpPr>
+          <p:cNvPr id="3" name="Textplatzhalter 2">
+            <a:extLst>
+              <a:ext uri="{FF2B5EF4-FFF2-40B4-BE49-F238E27FC236}">
+                <a16:creationId xmlns:a16="http://schemas.microsoft.com/office/drawing/2014/main" id="{D912712A-6656-40F8-C1B2-BAC244DE2325}"/>
+              </a:ext>
+            </a:extLst>
+          </p:cNvPr>
+          <p:cNvSpPr>
+            <a:spLocks noGrp="1"/>
+          </p:cNvSpPr>
+          <p:nvPr>
+            <p:ph type="body" sz="quarter" idx="13" hasCustomPrompt="1"/>
+          </p:nvPr>
+        </p:nvSpPr>
+        <p:spPr>
+          <a:xfrm>
+            <a:off x="438804" y="817200"/>
+            <a:ext cx="10994612" cy="440100"/>
+          </a:xfrm>
+          <a:prstGeom prst="rect">
+            <a:avLst/>
+          </a:prstGeom>
+        </p:spPr>
+        <p:txBody>
+          <a:bodyPr/>
+          <a:lstStyle>
+            <a:lvl1pPr marL="0" indent="0" algn="l">
+              <a:buFontTx/>
+              <a:buNone/>
+              <a:defRPr sz="2400">
+                <a:solidFill>
+                  <a:srgbClr val="1D1D1B"/>
+                </a:solidFill>
+                <a:latin typeface="Open Sans" panose="020B0606030504020204" pitchFamily="34" charset="0"/>
+                <a:ea typeface="Open Sans" panose="020B0606030504020204" pitchFamily="34" charset="0"/>
+                <a:cs typeface="Open Sans" panose="020B0606030504020204" pitchFamily="34" charset="0"/>
+              </a:defRPr>
+            </a:lvl1pPr>
+          </a:lstStyle>
+          <a:p>
+            <a:pPr lvl="0"/>
+            <a:r>
+              <a:rPr lang="de-DE" dirty="0"/>
+              <a:t>Titel einfügen</a:t>
+            </a:r>
+          </a:p>
+        </p:txBody>
+      </p:sp>
+      <p:sp>
+        <p:nvSpPr>
+          <p:cNvPr id="4" name="Textplatzhalter 3">
+            <a:extLst>
+              <a:ext uri="{FF2B5EF4-FFF2-40B4-BE49-F238E27FC236}">
+                <a16:creationId xmlns:a16="http://schemas.microsoft.com/office/drawing/2014/main" id="{35EFB08A-E7D9-CC6B-363A-A8B03C4409E2}"/>
+              </a:ext>
+            </a:extLst>
+          </p:cNvPr>
+          <p:cNvSpPr>
+            <a:spLocks noGrp="1"/>
+          </p:cNvSpPr>
+          <p:nvPr>
+            <p:ph type="body" sz="quarter" idx="14" hasCustomPrompt="1"/>
+          </p:nvPr>
+        </p:nvSpPr>
+        <p:spPr>
+          <a:xfrm>
+            <a:off x="829192" y="3650734"/>
+            <a:ext cx="3920017" cy="375462"/>
+          </a:xfrm>
+          <a:prstGeom prst="rect">
+            <a:avLst/>
+          </a:prstGeom>
+        </p:spPr>
+        <p:txBody>
+          <a:bodyPr/>
+          <a:lstStyle>
+            <a:lvl1pPr marL="0" indent="0" algn="ctr">
+              <a:lnSpc>
+                <a:spcPct val="100000"/>
+              </a:lnSpc>
+              <a:spcBef>
+                <a:spcPts val="0"/>
+              </a:spcBef>
+              <a:buFontTx/>
+              <a:buNone/>
+              <a:defRPr sz="1200" b="1" spc="30" baseline="0">
+                <a:solidFill>
+                  <a:srgbClr val="1D1D1B"/>
+                </a:solidFill>
+                <a:latin typeface="Open Sans Semibold" panose="020B0706030804020204" pitchFamily="34" charset="0"/>
+                <a:ea typeface="Open Sans Semibold" panose="020B0706030804020204" pitchFamily="34" charset="0"/>
+                <a:cs typeface="Open Sans Semibold" panose="020B0706030804020204" pitchFamily="34" charset="0"/>
+              </a:defRPr>
+            </a:lvl1pPr>
+          </a:lstStyle>
+          <a:p>
+            <a:pPr lvl="0"/>
+            <a:r>
+              <a:rPr lang="de-DE" dirty="0"/>
+              <a:t>Überschrift </a:t>
+            </a:r>
+          </a:p>
+        </p:txBody>
+      </p:sp>
+      <p:sp>
+        <p:nvSpPr>
+          <p:cNvPr id="5" name="Textplatzhalter 4">
+            <a:extLst>
+              <a:ext uri="{FF2B5EF4-FFF2-40B4-BE49-F238E27FC236}">
+                <a16:creationId xmlns:a16="http://schemas.microsoft.com/office/drawing/2014/main" id="{4E0A288A-5EB5-FEA9-D5BC-7DCD14B0E2F4}"/>
+              </a:ext>
+            </a:extLst>
+          </p:cNvPr>
+          <p:cNvSpPr>
+            <a:spLocks noGrp="1"/>
+          </p:cNvSpPr>
+          <p:nvPr>
+            <p:ph type="body" sz="quarter" idx="16" hasCustomPrompt="1"/>
+          </p:nvPr>
+        </p:nvSpPr>
+        <p:spPr>
+          <a:xfrm>
+            <a:off x="828000" y="4374000"/>
+            <a:ext cx="3921125" cy="1479600"/>
+          </a:xfrm>
+          <a:prstGeom prst="rect">
+            <a:avLst/>
+          </a:prstGeom>
+        </p:spPr>
+        <p:txBody>
+          <a:bodyPr/>
+          <a:lstStyle>
+            <a:lvl1pPr marL="0" indent="0">
+              <a:buFontTx/>
+              <a:buNone/>
+              <a:defRPr sz="1100">
+                <a:latin typeface="Open Sans Light" panose="020B0306030504020204" pitchFamily="34" charset="0"/>
+                <a:ea typeface="Open Sans Light" panose="020B0306030504020204" pitchFamily="34" charset="0"/>
+                <a:cs typeface="Open Sans Light" panose="020B0306030504020204" pitchFamily="34" charset="0"/>
+              </a:defRPr>
+            </a:lvl1pPr>
+          </a:lstStyle>
+          <a:p>
+            <a:pPr lvl="0"/>
+            <a:r>
+              <a:rPr lang="de-DE" dirty="0"/>
+              <a:t>Fließtext</a:t>
+            </a:r>
+          </a:p>
+        </p:txBody>
+      </p:sp>
+    </p:spTree>
+    <p:extLst>
+      <p:ext uri="{BB962C8B-B14F-4D97-AF65-F5344CB8AC3E}">
+        <p14:creationId xmlns:p14="http://schemas.microsoft.com/office/powerpoint/2010/main" val="2154771397"/>
+      </p:ext>
+    </p:extLst>
+  </p:cSld>
+  <p:clrMapOvr>
+    <a:masterClrMapping/>
+  </p:clrMapOvr>
+  <p:extLst>
+    <p:ext uri="{DCECCB84-F9BA-43D5-87BE-67443E8EF086}">
+      <p15:sldGuideLst xmlns:p15="http://schemas.microsoft.com/office/powerpoint/2012/main"/>
+    </p:ext>
+  </p:extLst>
+</p:sldLayout>
+</file>
+
+<file path=ppt/slideLayouts/slideLayout15.xml><?xml version="1.0" encoding="utf-8"?>
+<p:sldLayout xmlns:a="http://schemas.openxmlformats.org/drawingml/2006/main" xmlns:r="http://schemas.openxmlformats.org/officeDocument/2006/relationships" xmlns:p="http://schemas.openxmlformats.org/presentationml/2006/main" userDrawn="1">
+  <p:cSld name="Nur Titel Layout">
+    <p:spTree>
+      <p:nvGrpSpPr>
+        <p:cNvPr id="1" name=""/>
+        <p:cNvGrpSpPr/>
+        <p:nvPr/>
+      </p:nvGrpSpPr>
+      <p:grpSpPr>
+        <a:xfrm>
+          <a:off x="0" y="0"/>
+          <a:ext cx="0" cy="0"/>
+          <a:chOff x="0" y="0"/>
+          <a:chExt cx="0" cy="0"/>
+        </a:xfrm>
+      </p:grpSpPr>
+      <p:sp>
+        <p:nvSpPr>
+          <p:cNvPr id="6" name="Foliennummernplatzhalter 5">
+            <a:extLst>
+              <a:ext uri="{FF2B5EF4-FFF2-40B4-BE49-F238E27FC236}">
+                <a16:creationId xmlns:a16="http://schemas.microsoft.com/office/drawing/2014/main" id="{777CEC47-5E2F-58DE-4385-F7EB30035D92}"/>
+              </a:ext>
+            </a:extLst>
+          </p:cNvPr>
+          <p:cNvSpPr>
+            <a:spLocks noGrp="1"/>
+          </p:cNvSpPr>
+          <p:nvPr>
+            <p:ph type="sldNum" sz="quarter" idx="12"/>
+          </p:nvPr>
+        </p:nvSpPr>
+        <p:spPr>
+          <a:xfrm>
+            <a:off x="11433416" y="253140"/>
+            <a:ext cx="602455" cy="365125"/>
+          </a:xfrm>
+          <a:prstGeom prst="rect">
+            <a:avLst/>
+          </a:prstGeom>
+        </p:spPr>
+        <p:txBody>
+          <a:bodyPr/>
+          <a:lstStyle/>
+          <a:p>
+            <a:fld id="{811EC747-7669-4439-BEFB-BCFCAA3B013D}" type="slidenum">
+              <a:rPr lang="de-DE" smtClean="0"/>
+              <a:t>‹Nr.›</a:t>
+            </a:fld>
+            <a:endParaRPr lang="de-DE" dirty="0"/>
+          </a:p>
+        </p:txBody>
+      </p:sp>
+      <p:sp>
+        <p:nvSpPr>
+          <p:cNvPr id="3" name="Textplatzhalter 2">
+            <a:extLst>
+              <a:ext uri="{FF2B5EF4-FFF2-40B4-BE49-F238E27FC236}">
+                <a16:creationId xmlns:a16="http://schemas.microsoft.com/office/drawing/2014/main" id="{D912712A-6656-40F8-C1B2-BAC244DE2325}"/>
+              </a:ext>
+            </a:extLst>
+          </p:cNvPr>
+          <p:cNvSpPr>
+            <a:spLocks noGrp="1"/>
+          </p:cNvSpPr>
+          <p:nvPr>
+            <p:ph type="body" sz="quarter" idx="13" hasCustomPrompt="1"/>
+          </p:nvPr>
+        </p:nvSpPr>
+        <p:spPr>
+          <a:xfrm>
+            <a:off x="438804" y="817200"/>
+            <a:ext cx="10994612" cy="440100"/>
+          </a:xfrm>
+          <a:prstGeom prst="rect">
+            <a:avLst/>
+          </a:prstGeom>
+        </p:spPr>
+        <p:txBody>
+          <a:bodyPr/>
+          <a:lstStyle>
+            <a:lvl1pPr marL="0" indent="0" algn="l">
+              <a:buFontTx/>
+              <a:buNone/>
+              <a:defRPr sz="2400">
+                <a:solidFill>
+                  <a:srgbClr val="1D1D1B"/>
+                </a:solidFill>
+                <a:latin typeface="Open Sans" panose="020B0606030504020204" pitchFamily="34" charset="0"/>
+                <a:ea typeface="Open Sans" panose="020B0606030504020204" pitchFamily="34" charset="0"/>
+                <a:cs typeface="Open Sans" panose="020B0606030504020204" pitchFamily="34" charset="0"/>
+              </a:defRPr>
+            </a:lvl1pPr>
+          </a:lstStyle>
+          <a:p>
+            <a:pPr lvl="0"/>
+            <a:r>
+              <a:rPr lang="de-DE" dirty="0"/>
+              <a:t>Titel einfügen</a:t>
+            </a:r>
+          </a:p>
+        </p:txBody>
+      </p:sp>
+    </p:spTree>
+    <p:extLst>
+      <p:ext uri="{BB962C8B-B14F-4D97-AF65-F5344CB8AC3E}">
+        <p14:creationId xmlns:p14="http://schemas.microsoft.com/office/powerpoint/2010/main" val="3081940427"/>
+      </p:ext>
+    </p:extLst>
+  </p:cSld>
+  <p:clrMapOvr>
+    <a:masterClrMapping/>
+  </p:clrMapOvr>
+  <p:extLst>
+    <p:ext uri="{DCECCB84-F9BA-43D5-87BE-67443E8EF086}">
+      <p15:sldGuideLst xmlns:p15="http://schemas.microsoft.com/office/powerpoint/2012/main"/>
+    </p:ext>
+  </p:extLst>
+</p:sldLayout>
+</file>
+
+<file path=ppt/slideLayouts/slideLayout16.xml><?xml version="1.0" encoding="utf-8"?>
+<p:sldLayout xmlns:a="http://schemas.openxmlformats.org/drawingml/2006/main" xmlns:r="http://schemas.openxmlformats.org/officeDocument/2006/relationships" xmlns:p="http://schemas.openxmlformats.org/presentationml/2006/main" userDrawn="1">
+  <p:cSld name="Blanko und großer Fließtext">
+    <p:spTree>
+      <p:nvGrpSpPr>
+        <p:cNvPr id="1" name=""/>
+        <p:cNvGrpSpPr/>
+        <p:nvPr/>
+      </p:nvGrpSpPr>
+      <p:grpSpPr>
+        <a:xfrm>
+          <a:off x="0" y="0"/>
+          <a:ext cx="0" cy="0"/>
+          <a:chOff x="0" y="0"/>
+          <a:chExt cx="0" cy="0"/>
+        </a:xfrm>
+      </p:grpSpPr>
+      <p:sp>
+        <p:nvSpPr>
+          <p:cNvPr id="6" name="Foliennummernplatzhalter 5">
+            <a:extLst>
+              <a:ext uri="{FF2B5EF4-FFF2-40B4-BE49-F238E27FC236}">
+                <a16:creationId xmlns:a16="http://schemas.microsoft.com/office/drawing/2014/main" id="{777CEC47-5E2F-58DE-4385-F7EB30035D92}"/>
+              </a:ext>
+            </a:extLst>
+          </p:cNvPr>
+          <p:cNvSpPr>
+            <a:spLocks noGrp="1"/>
+          </p:cNvSpPr>
+          <p:nvPr>
+            <p:ph type="sldNum" sz="quarter" idx="12"/>
+          </p:nvPr>
+        </p:nvSpPr>
+        <p:spPr>
+          <a:xfrm>
+            <a:off x="11433416" y="253140"/>
+            <a:ext cx="602455" cy="365125"/>
+          </a:xfrm>
+          <a:prstGeom prst="rect">
+            <a:avLst/>
+          </a:prstGeom>
+        </p:spPr>
+        <p:txBody>
+          <a:bodyPr/>
+          <a:lstStyle/>
+          <a:p>
+            <a:fld id="{811EC747-7669-4439-BEFB-BCFCAA3B013D}" type="slidenum">
+              <a:rPr lang="de-DE" smtClean="0"/>
+              <a:t>‹Nr.›</a:t>
+            </a:fld>
+            <a:endParaRPr lang="de-DE" dirty="0"/>
+          </a:p>
+        </p:txBody>
+      </p:sp>
+      <p:sp>
+        <p:nvSpPr>
+          <p:cNvPr id="3" name="Textplatzhalter 2">
+            <a:extLst>
+              <a:ext uri="{FF2B5EF4-FFF2-40B4-BE49-F238E27FC236}">
+                <a16:creationId xmlns:a16="http://schemas.microsoft.com/office/drawing/2014/main" id="{6AB82371-C914-F8A8-473A-0C9BBA6B5CF7}"/>
+              </a:ext>
+            </a:extLst>
+          </p:cNvPr>
+          <p:cNvSpPr>
+            <a:spLocks noGrp="1"/>
+          </p:cNvSpPr>
+          <p:nvPr>
+            <p:ph type="body" sz="quarter" idx="13"/>
+          </p:nvPr>
+        </p:nvSpPr>
+        <p:spPr>
+          <a:xfrm>
+            <a:off x="5187950" y="2389188"/>
+            <a:ext cx="4641850" cy="1452562"/>
+          </a:xfrm>
+          <a:prstGeom prst="rect">
+            <a:avLst/>
+          </a:prstGeom>
+        </p:spPr>
+        <p:txBody>
+          <a:bodyPr/>
+          <a:lstStyle>
+            <a:lvl1pPr marL="0" indent="0">
+              <a:lnSpc>
+                <a:spcPct val="100000"/>
+              </a:lnSpc>
+              <a:spcBef>
+                <a:spcPts val="0"/>
+              </a:spcBef>
+              <a:buFontTx/>
+              <a:buNone/>
+              <a:defRPr sz="4000" spc="30" baseline="0">
+                <a:solidFill>
+                  <a:srgbClr val="1D1D1D"/>
+                </a:solidFill>
+                <a:latin typeface="Open Sans" panose="020B0606030504020204" pitchFamily="34" charset="0"/>
+                <a:ea typeface="Open Sans" panose="020B0606030504020204" pitchFamily="34" charset="0"/>
+                <a:cs typeface="Open Sans" panose="020B0606030504020204" pitchFamily="34" charset="0"/>
+              </a:defRPr>
+            </a:lvl1pPr>
+          </a:lstStyle>
+          <a:p>
+            <a:pPr lvl="0"/>
+            <a:r>
+              <a:rPr lang="de-DE" dirty="0"/>
+              <a:t>Mastertextformat</a:t>
+            </a:r>
+          </a:p>
+        </p:txBody>
+      </p:sp>
+      <p:pic>
+        <p:nvPicPr>
+          <p:cNvPr id="4" name="Grafik 3" descr="Ein Bild, das Text enthält.&#10;&#10;Automatisch generierte Beschreibung">
+            <a:extLst>
+              <a:ext uri="{FF2B5EF4-FFF2-40B4-BE49-F238E27FC236}">
+                <a16:creationId xmlns:a16="http://schemas.microsoft.com/office/drawing/2014/main" id="{D4E1944F-514C-DFEC-5CDD-77598528DE44}"/>
+              </a:ext>
+            </a:extLst>
+          </p:cNvPr>
+          <p:cNvPicPr>
+            <a:picLocks noChangeAspect="1"/>
+          </p:cNvPicPr>
+          <p:nvPr userDrawn="1"/>
+        </p:nvPicPr>
+        <p:blipFill>
+          <a:blip r:embed="rId2">
+            <a:extLst>
+              <a:ext uri="{28A0092B-C50C-407E-A947-70E740481C1C}">
+                <a14:useLocalDpi xmlns:a14="http://schemas.microsoft.com/office/drawing/2010/main" val="0"/>
+              </a:ext>
+            </a:extLst>
+          </a:blip>
+          <a:stretch>
+            <a:fillRect/>
+          </a:stretch>
+        </p:blipFill>
+        <p:spPr>
+          <a:xfrm>
+            <a:off x="1752732" y="1542716"/>
+            <a:ext cx="311166" cy="298465"/>
+          </a:xfrm>
+          <a:prstGeom prst="rect">
+            <a:avLst/>
+          </a:prstGeom>
+        </p:spPr>
+      </p:pic>
+      <p:pic>
+        <p:nvPicPr>
+          <p:cNvPr id="5" name="Grafik 4" descr="Ein Bild, das Text enthält.&#10;&#10;Automatisch generierte Beschreibung">
+            <a:extLst>
+              <a:ext uri="{FF2B5EF4-FFF2-40B4-BE49-F238E27FC236}">
+                <a16:creationId xmlns:a16="http://schemas.microsoft.com/office/drawing/2014/main" id="{E14DEC95-C8FF-D328-F067-811F5EF9084B}"/>
+              </a:ext>
+            </a:extLst>
+          </p:cNvPr>
+          <p:cNvPicPr>
+            <a:picLocks noChangeAspect="1"/>
+          </p:cNvPicPr>
+          <p:nvPr userDrawn="1"/>
+        </p:nvPicPr>
+        <p:blipFill>
+          <a:blip r:embed="rId3">
+            <a:extLst>
+              <a:ext uri="{28A0092B-C50C-407E-A947-70E740481C1C}">
+                <a14:useLocalDpi xmlns:a14="http://schemas.microsoft.com/office/drawing/2010/main" val="0"/>
+              </a:ext>
+            </a:extLst>
+          </a:blip>
+          <a:stretch>
+            <a:fillRect/>
+          </a:stretch>
+        </p:blipFill>
+        <p:spPr>
+          <a:xfrm>
+            <a:off x="5781659" y="5504121"/>
+            <a:ext cx="314341" cy="222261"/>
+          </a:xfrm>
+          <a:prstGeom prst="rect">
+            <a:avLst/>
+          </a:prstGeom>
+        </p:spPr>
+      </p:pic>
+      <p:pic>
+        <p:nvPicPr>
+          <p:cNvPr id="7" name="Grafik 6">
+            <a:extLst>
+              <a:ext uri="{FF2B5EF4-FFF2-40B4-BE49-F238E27FC236}">
+                <a16:creationId xmlns:a16="http://schemas.microsoft.com/office/drawing/2014/main" id="{BCCBE579-7B0C-B57E-7E12-A2E9898A4C86}"/>
+              </a:ext>
+            </a:extLst>
+          </p:cNvPr>
+          <p:cNvPicPr>
+            <a:picLocks noChangeAspect="1"/>
+          </p:cNvPicPr>
+          <p:nvPr userDrawn="1"/>
+        </p:nvPicPr>
+        <p:blipFill>
+          <a:blip r:embed="rId4">
+            <a:extLst>
+              <a:ext uri="{28A0092B-C50C-407E-A947-70E740481C1C}">
+                <a14:useLocalDpi xmlns:a14="http://schemas.microsoft.com/office/drawing/2010/main" val="0"/>
+              </a:ext>
+            </a:extLst>
+          </a:blip>
+          <a:stretch>
+            <a:fillRect/>
+          </a:stretch>
+        </p:blipFill>
+        <p:spPr>
+          <a:xfrm>
+            <a:off x="9919906" y="1994400"/>
+            <a:ext cx="276239" cy="260363"/>
+          </a:xfrm>
+          <a:prstGeom prst="rect">
+            <a:avLst/>
+          </a:prstGeom>
+        </p:spPr>
+      </p:pic>
+    </p:spTree>
+    <p:extLst>
+      <p:ext uri="{BB962C8B-B14F-4D97-AF65-F5344CB8AC3E}">
+        <p14:creationId xmlns:p14="http://schemas.microsoft.com/office/powerpoint/2010/main" val="3760124810"/>
+      </p:ext>
+    </p:extLst>
+  </p:cSld>
+  <p:clrMapOvr>
+    <a:masterClrMapping/>
+  </p:clrMapOvr>
+  <p:extLst>
+    <p:ext uri="{DCECCB84-F9BA-43D5-87BE-67443E8EF086}">
+      <p15:sldGuideLst xmlns:p15="http://schemas.microsoft.com/office/powerpoint/2012/main"/>
+    </p:ext>
+  </p:extLst>
 </p:sldLayout>
 </file>
 
@@ -1372,7 +3349,7 @@
           <a:p>
             <a:fld id="{0116CD17-7A63-479F-AAA5-C17A016314BF}" type="datetimeFigureOut">
               <a:rPr lang="de-DE" smtClean="0"/>
-              <a:t>26.08.2024</a:t>
+              <a:t>04.06.2025</a:t>
             </a:fld>
             <a:endParaRPr lang="de-DE"/>
           </a:p>
@@ -1618,7 +3595,7 @@
           <a:p>
             <a:fld id="{0116CD17-7A63-479F-AAA5-C17A016314BF}" type="datetimeFigureOut">
               <a:rPr lang="de-DE" smtClean="0"/>
-              <a:t>26.08.2024</a:t>
+              <a:t>04.06.2025</a:t>
             </a:fld>
             <a:endParaRPr lang="de-DE"/>
           </a:p>
@@ -1850,7 +3827,7 @@
           <a:p>
             <a:fld id="{0116CD17-7A63-479F-AAA5-C17A016314BF}" type="datetimeFigureOut">
               <a:rPr lang="de-DE" smtClean="0"/>
-              <a:t>26.08.2024</a:t>
+              <a:t>04.06.2025</a:t>
             </a:fld>
             <a:endParaRPr lang="de-DE"/>
           </a:p>
@@ -2217,7 +4194,7 @@
           <a:p>
             <a:fld id="{0116CD17-7A63-479F-AAA5-C17A016314BF}" type="datetimeFigureOut">
               <a:rPr lang="de-DE" smtClean="0"/>
-              <a:t>26.08.2024</a:t>
+              <a:t>04.06.2025</a:t>
             </a:fld>
             <a:endParaRPr lang="de-DE"/>
           </a:p>
@@ -2335,7 +4312,7 @@
           <a:p>
             <a:fld id="{0116CD17-7A63-479F-AAA5-C17A016314BF}" type="datetimeFigureOut">
               <a:rPr lang="de-DE" smtClean="0"/>
-              <a:t>26.08.2024</a:t>
+              <a:t>04.06.2025</a:t>
             </a:fld>
             <a:endParaRPr lang="de-DE"/>
           </a:p>
@@ -2430,7 +4407,7 @@
           <a:p>
             <a:fld id="{0116CD17-7A63-479F-AAA5-C17A016314BF}" type="datetimeFigureOut">
               <a:rPr lang="de-DE" smtClean="0"/>
-              <a:t>26.08.2024</a:t>
+              <a:t>04.06.2025</a:t>
             </a:fld>
             <a:endParaRPr lang="de-DE"/>
           </a:p>
@@ -2707,7 +4684,7 @@
           <a:p>
             <a:fld id="{0116CD17-7A63-479F-AAA5-C17A016314BF}" type="datetimeFigureOut">
               <a:rPr lang="de-DE" smtClean="0"/>
-              <a:t>26.08.2024</a:t>
+              <a:t>04.06.2025</a:t>
             </a:fld>
             <a:endParaRPr lang="de-DE"/>
           </a:p>
@@ -2964,7 +4941,7 @@
           <a:p>
             <a:fld id="{0116CD17-7A63-479F-AAA5-C17A016314BF}" type="datetimeFigureOut">
               <a:rPr lang="de-DE" smtClean="0"/>
-              <a:t>26.08.2024</a:t>
+              <a:t>04.06.2025</a:t>
             </a:fld>
             <a:endParaRPr lang="de-DE"/>
           </a:p>
@@ -3177,7 +5154,7 @@
           <a:p>
             <a:fld id="{0116CD17-7A63-479F-AAA5-C17A016314BF}" type="datetimeFigureOut">
               <a:rPr lang="de-DE" smtClean="0"/>
-              <a:t>26.08.2024</a:t>
+              <a:t>04.06.2025</a:t>
             </a:fld>
             <a:endParaRPr lang="de-DE"/>
           </a:p>
@@ -3565,6 +5542,464 @@
 </p:sldMaster>
 </file>
 
+<file path=ppt/slideMasters/slideMaster2.xml><?xml version="1.0" encoding="utf-8"?>
+<p:sldMaster xmlns:a="http://schemas.openxmlformats.org/drawingml/2006/main" xmlns:r="http://schemas.openxmlformats.org/officeDocument/2006/relationships" xmlns:p="http://schemas.openxmlformats.org/presentationml/2006/main" preserve="1">
+  <p:cSld>
+    <p:bg>
+      <p:bgRef idx="1001">
+        <a:schemeClr val="bg1"/>
+      </p:bgRef>
+    </p:bg>
+    <p:spTree>
+      <p:nvGrpSpPr>
+        <p:cNvPr id="1" name=""/>
+        <p:cNvGrpSpPr/>
+        <p:nvPr/>
+      </p:nvGrpSpPr>
+      <p:grpSpPr>
+        <a:xfrm>
+          <a:off x="0" y="0"/>
+          <a:ext cx="0" cy="0"/>
+          <a:chOff x="0" y="0"/>
+          <a:chExt cx="0" cy="0"/>
+        </a:xfrm>
+      </p:grpSpPr>
+      <p:pic>
+        <p:nvPicPr>
+          <p:cNvPr id="8" name="Grafik 7">
+            <a:extLst>
+              <a:ext uri="{FF2B5EF4-FFF2-40B4-BE49-F238E27FC236}">
+                <a16:creationId xmlns:a16="http://schemas.microsoft.com/office/drawing/2014/main" id="{74BE3ABB-B25C-D216-9005-68B3C3A69DC0}"/>
+              </a:ext>
+            </a:extLst>
+          </p:cNvPr>
+          <p:cNvPicPr>
+            <a:picLocks noChangeAspect="1"/>
+          </p:cNvPicPr>
+          <p:nvPr userDrawn="1"/>
+        </p:nvPicPr>
+        <p:blipFill>
+          <a:blip r:embed="rId7">
+            <a:extLst>
+              <a:ext uri="{28A0092B-C50C-407E-A947-70E740481C1C}">
+                <a14:useLocalDpi xmlns:a14="http://schemas.microsoft.com/office/drawing/2010/main" val="0"/>
+              </a:ext>
+            </a:extLst>
+          </a:blip>
+          <a:stretch>
+            <a:fillRect/>
+          </a:stretch>
+        </p:blipFill>
+        <p:spPr>
+          <a:xfrm>
+            <a:off x="73891" y="0"/>
+            <a:ext cx="12192000" cy="6854429"/>
+          </a:xfrm>
+          <a:prstGeom prst="rect">
+            <a:avLst/>
+          </a:prstGeom>
+        </p:spPr>
+      </p:pic>
+      <p:pic>
+        <p:nvPicPr>
+          <p:cNvPr id="10" name="Grafik 9">
+            <a:extLst>
+              <a:ext uri="{FF2B5EF4-FFF2-40B4-BE49-F238E27FC236}">
+                <a16:creationId xmlns:a16="http://schemas.microsoft.com/office/drawing/2014/main" id="{EEFE0875-E137-2720-C7E6-56F210B3359E}"/>
+              </a:ext>
+            </a:extLst>
+          </p:cNvPr>
+          <p:cNvPicPr>
+            <a:picLocks noChangeAspect="1"/>
+          </p:cNvPicPr>
+          <p:nvPr userDrawn="1"/>
+        </p:nvPicPr>
+        <p:blipFill>
+          <a:blip r:embed="rId8">
+            <a:extLst>
+              <a:ext uri="{28A0092B-C50C-407E-A947-70E740481C1C}">
+                <a14:useLocalDpi xmlns:a14="http://schemas.microsoft.com/office/drawing/2010/main" val="0"/>
+              </a:ext>
+            </a:extLst>
+          </a:blip>
+          <a:stretch>
+            <a:fillRect/>
+          </a:stretch>
+        </p:blipFill>
+        <p:spPr>
+          <a:xfrm>
+            <a:off x="10691734" y="5407200"/>
+            <a:ext cx="1571706" cy="1447874"/>
+          </a:xfrm>
+          <a:prstGeom prst="rect">
+            <a:avLst/>
+          </a:prstGeom>
+        </p:spPr>
+      </p:pic>
+      <p:sp>
+        <p:nvSpPr>
+          <p:cNvPr id="11" name="Foliennummernplatzhalter 5">
+            <a:extLst>
+              <a:ext uri="{FF2B5EF4-FFF2-40B4-BE49-F238E27FC236}">
+                <a16:creationId xmlns:a16="http://schemas.microsoft.com/office/drawing/2014/main" id="{3AEC11C7-7137-22E2-CD06-6B215397E25A}"/>
+              </a:ext>
+            </a:extLst>
+          </p:cNvPr>
+          <p:cNvSpPr>
+            <a:spLocks noGrp="1"/>
+          </p:cNvSpPr>
+          <p:nvPr>
+            <p:ph type="sldNum" sz="quarter" idx="4"/>
+          </p:nvPr>
+        </p:nvSpPr>
+        <p:spPr>
+          <a:xfrm>
+            <a:off x="11433416" y="253140"/>
+            <a:ext cx="602455" cy="365125"/>
+          </a:xfrm>
+          <a:prstGeom prst="rect">
+            <a:avLst/>
+          </a:prstGeom>
+        </p:spPr>
+        <p:txBody>
+          <a:bodyPr/>
+          <a:lstStyle>
+            <a:lvl1pPr>
+              <a:defRPr sz="1200" b="1">
+                <a:solidFill>
+                  <a:srgbClr val="1D1D1D"/>
+                </a:solidFill>
+                <a:latin typeface="Open Sans Semibold" panose="020B0706030804020204" pitchFamily="34" charset="0"/>
+                <a:ea typeface="Open Sans Semibold" panose="020B0706030804020204" pitchFamily="34" charset="0"/>
+                <a:cs typeface="Open Sans Semibold" panose="020B0706030804020204" pitchFamily="34" charset="0"/>
+              </a:defRPr>
+            </a:lvl1pPr>
+          </a:lstStyle>
+          <a:p>
+            <a:fld id="{811EC747-7669-4439-BEFB-BCFCAA3B013D}" type="slidenum">
+              <a:rPr lang="de-DE" smtClean="0"/>
+              <a:pPr/>
+              <a:t>‹Nr.›</a:t>
+            </a:fld>
+            <a:endParaRPr lang="de-DE" dirty="0"/>
+          </a:p>
+        </p:txBody>
+      </p:sp>
+    </p:spTree>
+    <p:extLst>
+      <p:ext uri="{BB962C8B-B14F-4D97-AF65-F5344CB8AC3E}">
+        <p14:creationId xmlns:p14="http://schemas.microsoft.com/office/powerpoint/2010/main" val="3653618509"/>
+      </p:ext>
+    </p:extLst>
+  </p:cSld>
+  <p:clrMap bg1="lt1" tx1="dk1" bg2="lt2" tx2="dk2" accent1="accent1" accent2="accent2" accent3="accent3" accent4="accent4" accent5="accent5" accent6="accent6" hlink="hlink" folHlink="folHlink"/>
+  <p:sldLayoutIdLst>
+    <p:sldLayoutId id="2147483709" r:id="rId1"/>
+    <p:sldLayoutId id="2147483710" r:id="rId2"/>
+    <p:sldLayoutId id="2147483711" r:id="rId3"/>
+    <p:sldLayoutId id="2147483712" r:id="rId4"/>
+    <p:sldLayoutId id="2147483714" r:id="rId5"/>
+  </p:sldLayoutIdLst>
+  <p:hf hdr="0" ftr="0" dt="0"/>
+  <p:txStyles>
+    <p:titleStyle>
+      <a:lvl1pPr algn="l" defTabSz="914400" rtl="0" eaLnBrk="1" latinLnBrk="0" hangingPunct="1">
+        <a:lnSpc>
+          <a:spcPct val="90000"/>
+        </a:lnSpc>
+        <a:spcBef>
+          <a:spcPct val="0"/>
+        </a:spcBef>
+        <a:buNone/>
+        <a:defRPr sz="4400" kern="1200">
+          <a:solidFill>
+            <a:schemeClr val="tx1"/>
+          </a:solidFill>
+          <a:latin typeface="+mj-lt"/>
+          <a:ea typeface="+mj-ea"/>
+          <a:cs typeface="+mj-cs"/>
+        </a:defRPr>
+      </a:lvl1pPr>
+    </p:titleStyle>
+    <p:bodyStyle>
+      <a:lvl1pPr marL="228600" indent="-228600" algn="l" defTabSz="914400" rtl="0" eaLnBrk="1" latinLnBrk="0" hangingPunct="1">
+        <a:lnSpc>
+          <a:spcPct val="90000"/>
+        </a:lnSpc>
+        <a:spcBef>
+          <a:spcPts val="1000"/>
+        </a:spcBef>
+        <a:buFont typeface="Arial" panose="020B0604020202020204" pitchFamily="34" charset="0"/>
+        <a:buChar char="•"/>
+        <a:defRPr sz="2800" kern="1200">
+          <a:solidFill>
+            <a:schemeClr val="tx1"/>
+          </a:solidFill>
+          <a:latin typeface="+mn-lt"/>
+          <a:ea typeface="+mn-ea"/>
+          <a:cs typeface="+mn-cs"/>
+        </a:defRPr>
+      </a:lvl1pPr>
+      <a:lvl2pPr marL="685800" indent="-228600" algn="l" defTabSz="914400" rtl="0" eaLnBrk="1" latinLnBrk="0" hangingPunct="1">
+        <a:lnSpc>
+          <a:spcPct val="90000"/>
+        </a:lnSpc>
+        <a:spcBef>
+          <a:spcPts val="500"/>
+        </a:spcBef>
+        <a:buFont typeface="Arial" panose="020B0604020202020204" pitchFamily="34" charset="0"/>
+        <a:buChar char="•"/>
+        <a:defRPr sz="2400" kern="1200">
+          <a:solidFill>
+            <a:schemeClr val="tx1"/>
+          </a:solidFill>
+          <a:latin typeface="+mn-lt"/>
+          <a:ea typeface="+mn-ea"/>
+          <a:cs typeface="+mn-cs"/>
+        </a:defRPr>
+      </a:lvl2pPr>
+      <a:lvl3pPr marL="1143000" indent="-228600" algn="l" defTabSz="914400" rtl="0" eaLnBrk="1" latinLnBrk="0" hangingPunct="1">
+        <a:lnSpc>
+          <a:spcPct val="90000"/>
+        </a:lnSpc>
+        <a:spcBef>
+          <a:spcPts val="500"/>
+        </a:spcBef>
+        <a:buFont typeface="Arial" panose="020B0604020202020204" pitchFamily="34" charset="0"/>
+        <a:buChar char="•"/>
+        <a:defRPr sz="2000" kern="1200">
+          <a:solidFill>
+            <a:schemeClr val="tx1"/>
+          </a:solidFill>
+          <a:latin typeface="+mn-lt"/>
+          <a:ea typeface="+mn-ea"/>
+          <a:cs typeface="+mn-cs"/>
+        </a:defRPr>
+      </a:lvl3pPr>
+      <a:lvl4pPr marL="1600200" indent="-228600" algn="l" defTabSz="914400" rtl="0" eaLnBrk="1" latinLnBrk="0" hangingPunct="1">
+        <a:lnSpc>
+          <a:spcPct val="90000"/>
+        </a:lnSpc>
+        <a:spcBef>
+          <a:spcPts val="500"/>
+        </a:spcBef>
+        <a:buFont typeface="Arial" panose="020B0604020202020204" pitchFamily="34" charset="0"/>
+        <a:buChar char="•"/>
+        <a:defRPr sz="1800" kern="1200">
+          <a:solidFill>
+            <a:schemeClr val="tx1"/>
+          </a:solidFill>
+          <a:latin typeface="+mn-lt"/>
+          <a:ea typeface="+mn-ea"/>
+          <a:cs typeface="+mn-cs"/>
+        </a:defRPr>
+      </a:lvl4pPr>
+      <a:lvl5pPr marL="2057400" indent="-228600" algn="l" defTabSz="914400" rtl="0" eaLnBrk="1" latinLnBrk="0" hangingPunct="1">
+        <a:lnSpc>
+          <a:spcPct val="90000"/>
+        </a:lnSpc>
+        <a:spcBef>
+          <a:spcPts val="500"/>
+        </a:spcBef>
+        <a:buFont typeface="Arial" panose="020B0604020202020204" pitchFamily="34" charset="0"/>
+        <a:buChar char="•"/>
+        <a:defRPr sz="1800" kern="1200">
+          <a:solidFill>
+            <a:schemeClr val="tx1"/>
+          </a:solidFill>
+          <a:latin typeface="+mn-lt"/>
+          <a:ea typeface="+mn-ea"/>
+          <a:cs typeface="+mn-cs"/>
+        </a:defRPr>
+      </a:lvl5pPr>
+      <a:lvl6pPr marL="2514600" indent="-228600" algn="l" defTabSz="914400" rtl="0" eaLnBrk="1" latinLnBrk="0" hangingPunct="1">
+        <a:lnSpc>
+          <a:spcPct val="90000"/>
+        </a:lnSpc>
+        <a:spcBef>
+          <a:spcPts val="500"/>
+        </a:spcBef>
+        <a:buFont typeface="Arial" panose="020B0604020202020204" pitchFamily="34" charset="0"/>
+        <a:buChar char="•"/>
+        <a:defRPr sz="1800" kern="1200">
+          <a:solidFill>
+            <a:schemeClr val="tx1"/>
+          </a:solidFill>
+          <a:latin typeface="+mn-lt"/>
+          <a:ea typeface="+mn-ea"/>
+          <a:cs typeface="+mn-cs"/>
+        </a:defRPr>
+      </a:lvl6pPr>
+      <a:lvl7pPr marL="2971800" indent="-228600" algn="l" defTabSz="914400" rtl="0" eaLnBrk="1" latinLnBrk="0" hangingPunct="1">
+        <a:lnSpc>
+          <a:spcPct val="90000"/>
+        </a:lnSpc>
+        <a:spcBef>
+          <a:spcPts val="500"/>
+        </a:spcBef>
+        <a:buFont typeface="Arial" panose="020B0604020202020204" pitchFamily="34" charset="0"/>
+        <a:buChar char="•"/>
+        <a:defRPr sz="1800" kern="1200">
+          <a:solidFill>
+            <a:schemeClr val="tx1"/>
+          </a:solidFill>
+          <a:latin typeface="+mn-lt"/>
+          <a:ea typeface="+mn-ea"/>
+          <a:cs typeface="+mn-cs"/>
+        </a:defRPr>
+      </a:lvl7pPr>
+      <a:lvl8pPr marL="3429000" indent="-228600" algn="l" defTabSz="914400" rtl="0" eaLnBrk="1" latinLnBrk="0" hangingPunct="1">
+        <a:lnSpc>
+          <a:spcPct val="90000"/>
+        </a:lnSpc>
+        <a:spcBef>
+          <a:spcPts val="500"/>
+        </a:spcBef>
+        <a:buFont typeface="Arial" panose="020B0604020202020204" pitchFamily="34" charset="0"/>
+        <a:buChar char="•"/>
+        <a:defRPr sz="1800" kern="1200">
+          <a:solidFill>
+            <a:schemeClr val="tx1"/>
+          </a:solidFill>
+          <a:latin typeface="+mn-lt"/>
+          <a:ea typeface="+mn-ea"/>
+          <a:cs typeface="+mn-cs"/>
+        </a:defRPr>
+      </a:lvl8pPr>
+      <a:lvl9pPr marL="3886200" indent="-228600" algn="l" defTabSz="914400" rtl="0" eaLnBrk="1" latinLnBrk="0" hangingPunct="1">
+        <a:lnSpc>
+          <a:spcPct val="90000"/>
+        </a:lnSpc>
+        <a:spcBef>
+          <a:spcPts val="500"/>
+        </a:spcBef>
+        <a:buFont typeface="Arial" panose="020B0604020202020204" pitchFamily="34" charset="0"/>
+        <a:buChar char="•"/>
+        <a:defRPr sz="1800" kern="1200">
+          <a:solidFill>
+            <a:schemeClr val="tx1"/>
+          </a:solidFill>
+          <a:latin typeface="+mn-lt"/>
+          <a:ea typeface="+mn-ea"/>
+          <a:cs typeface="+mn-cs"/>
+        </a:defRPr>
+      </a:lvl9pPr>
+    </p:bodyStyle>
+    <p:otherStyle>
+      <a:defPPr>
+        <a:defRPr lang="de-DE"/>
+      </a:defPPr>
+      <a:lvl1pPr marL="0" algn="l" defTabSz="914400" rtl="0" eaLnBrk="1" latinLnBrk="0" hangingPunct="1">
+        <a:defRPr sz="1800" kern="1200">
+          <a:solidFill>
+            <a:schemeClr val="tx1"/>
+          </a:solidFill>
+          <a:latin typeface="+mn-lt"/>
+          <a:ea typeface="+mn-ea"/>
+          <a:cs typeface="+mn-cs"/>
+        </a:defRPr>
+      </a:lvl1pPr>
+      <a:lvl2pPr marL="457200" algn="l" defTabSz="914400" rtl="0" eaLnBrk="1" latinLnBrk="0" hangingPunct="1">
+        <a:defRPr sz="1800" kern="1200">
+          <a:solidFill>
+            <a:schemeClr val="tx1"/>
+          </a:solidFill>
+          <a:latin typeface="+mn-lt"/>
+          <a:ea typeface="+mn-ea"/>
+          <a:cs typeface="+mn-cs"/>
+        </a:defRPr>
+      </a:lvl2pPr>
+      <a:lvl3pPr marL="914400" algn="l" defTabSz="914400" rtl="0" eaLnBrk="1" latinLnBrk="0" hangingPunct="1">
+        <a:defRPr sz="1800" kern="1200">
+          <a:solidFill>
+            <a:schemeClr val="tx1"/>
+          </a:solidFill>
+          <a:latin typeface="+mn-lt"/>
+          <a:ea typeface="+mn-ea"/>
+          <a:cs typeface="+mn-cs"/>
+        </a:defRPr>
+      </a:lvl3pPr>
+      <a:lvl4pPr marL="1371600" algn="l" defTabSz="914400" rtl="0" eaLnBrk="1" latinLnBrk="0" hangingPunct="1">
+        <a:defRPr sz="1800" kern="1200">
+          <a:solidFill>
+            <a:schemeClr val="tx1"/>
+          </a:solidFill>
+          <a:latin typeface="+mn-lt"/>
+          <a:ea typeface="+mn-ea"/>
+          <a:cs typeface="+mn-cs"/>
+        </a:defRPr>
+      </a:lvl4pPr>
+      <a:lvl5pPr marL="1828800" algn="l" defTabSz="914400" rtl="0" eaLnBrk="1" latinLnBrk="0" hangingPunct="1">
+        <a:defRPr sz="1800" kern="1200">
+          <a:solidFill>
+            <a:schemeClr val="tx1"/>
+          </a:solidFill>
+          <a:latin typeface="+mn-lt"/>
+          <a:ea typeface="+mn-ea"/>
+          <a:cs typeface="+mn-cs"/>
+        </a:defRPr>
+      </a:lvl5pPr>
+      <a:lvl6pPr marL="2286000" algn="l" defTabSz="914400" rtl="0" eaLnBrk="1" latinLnBrk="0" hangingPunct="1">
+        <a:defRPr sz="1800" kern="1200">
+          <a:solidFill>
+            <a:schemeClr val="tx1"/>
+          </a:solidFill>
+          <a:latin typeface="+mn-lt"/>
+          <a:ea typeface="+mn-ea"/>
+          <a:cs typeface="+mn-cs"/>
+        </a:defRPr>
+      </a:lvl6pPr>
+      <a:lvl7pPr marL="2743200" algn="l" defTabSz="914400" rtl="0" eaLnBrk="1" latinLnBrk="0" hangingPunct="1">
+        <a:defRPr sz="1800" kern="1200">
+          <a:solidFill>
+            <a:schemeClr val="tx1"/>
+          </a:solidFill>
+          <a:latin typeface="+mn-lt"/>
+          <a:ea typeface="+mn-ea"/>
+          <a:cs typeface="+mn-cs"/>
+        </a:defRPr>
+      </a:lvl7pPr>
+      <a:lvl8pPr marL="3200400" algn="l" defTabSz="914400" rtl="0" eaLnBrk="1" latinLnBrk="0" hangingPunct="1">
+        <a:defRPr sz="1800" kern="1200">
+          <a:solidFill>
+            <a:schemeClr val="tx1"/>
+          </a:solidFill>
+          <a:latin typeface="+mn-lt"/>
+          <a:ea typeface="+mn-ea"/>
+          <a:cs typeface="+mn-cs"/>
+        </a:defRPr>
+      </a:lvl8pPr>
+      <a:lvl9pPr marL="3657600" algn="l" defTabSz="914400" rtl="0" eaLnBrk="1" latinLnBrk="0" hangingPunct="1">
+        <a:defRPr sz="1800" kern="1200">
+          <a:solidFill>
+            <a:schemeClr val="tx1"/>
+          </a:solidFill>
+          <a:latin typeface="+mn-lt"/>
+          <a:ea typeface="+mn-ea"/>
+          <a:cs typeface="+mn-cs"/>
+        </a:defRPr>
+      </a:lvl9pPr>
+    </p:otherStyle>
+  </p:txStyles>
+  <p:extLst>
+    <p:ext uri="{27BBF7A9-308A-43DC-89C8-2F10F3537804}">
+      <p15:sldGuideLst xmlns:p15="http://schemas.microsoft.com/office/powerpoint/2012/main">
+        <p15:guide id="1" orient="horz" pos="2160">
+          <p15:clr>
+            <a:srgbClr val="F26B43"/>
+          </p15:clr>
+        </p15:guide>
+        <p15:guide id="2" pos="3840">
+          <p15:clr>
+            <a:srgbClr val="F26B43"/>
+          </p15:clr>
+        </p15:guide>
+      </p15:sldGuideLst>
+    </p:ext>
+  </p:extLst>
+</p:sldMaster>
+</file>
+
 <file path=ppt/slides/slide1.xml><?xml version="1.0" encoding="utf-8"?>
 <p:sld xmlns:a="http://schemas.openxmlformats.org/drawingml/2006/main" xmlns:r="http://schemas.openxmlformats.org/officeDocument/2006/relationships" xmlns:p="http://schemas.openxmlformats.org/presentationml/2006/main">
   <p:cSld>
@@ -3612,23 +6047,15 @@
           <a:p>
             <a:r>
               <a:rPr lang="en-US" sz="4000" dirty="0"/>
-              <a:t>Self-contained &amp; maintainable Build-Scripts</a:t>
-            </a:r>
-          </a:p>
-          <a:p>
-            <a:r>
-              <a:rPr lang="en-US" sz="4000" dirty="0"/>
-              <a:t>with</a:t>
-            </a:r>
-          </a:p>
-          <a:p>
-            <a:r>
-              <a:rPr lang="en-US" sz="4000" dirty="0" err="1"/>
+              <a:t>TypeScript everywhere: </a:t>
+            </a:r>
+            <a:r>
+              <a:rPr lang="de-DE" sz="4000" dirty="0"/>
+              <a:t>Eine neue Ära von Skripten mit </a:t>
+            </a:r>
+            <a:r>
+              <a:rPr lang="de-DE" sz="4000" dirty="0" err="1"/>
               <a:t>Deno</a:t>
-            </a:r>
-            <a:r>
-              <a:rPr lang="en-US" sz="4000" dirty="0"/>
-              <a:t> &amp; TypeScript</a:t>
             </a:r>
             <a:endParaRPr lang="de-DE" sz="4000" dirty="0"/>
           </a:p>
@@ -3636,10 +6063,10 @@
       </p:sp>
       <p:pic>
         <p:nvPicPr>
-          <p:cNvPr id="4" name="Grafik 3" descr="Ein Bild, das Clipart, Grafiken, Entwurf, Design enthält.&#10;&#10;Automatisch generierte Beschreibung">
+          <p:cNvPr id="5" name="Grafik 4">
             <a:extLst>
               <a:ext uri="{FF2B5EF4-FFF2-40B4-BE49-F238E27FC236}">
-                <a16:creationId xmlns:a16="http://schemas.microsoft.com/office/drawing/2014/main" id="{34A8F653-35EC-E5FB-D724-99B514FCF124}"/>
+                <a16:creationId xmlns:a16="http://schemas.microsoft.com/office/drawing/2014/main" id="{3740557E-F2D9-6B58-DD08-17FC89782952}"/>
               </a:ext>
             </a:extLst>
           </p:cNvPr>
@@ -3651,8 +6078,8 @@
         <p:blipFill>
           <a:blip r:embed="rId3">
             <a:extLst>
-              <a:ext uri="{28A0092B-C50C-407E-A947-70E740481C1C}">
-                <a14:useLocalDpi xmlns:a14="http://schemas.microsoft.com/office/drawing/2010/main" val="0"/>
+              <a:ext uri="{96DAC541-7B7A-43D3-8B79-37D633B846F1}">
+                <asvg:svgBlip xmlns:asvg="http://schemas.microsoft.com/office/drawing/2016/SVG/main" r:embed="rId4"/>
               </a:ext>
             </a:extLst>
           </a:blip>
@@ -3662,8 +6089,8 @@
         </p:blipFill>
         <p:spPr>
           <a:xfrm>
-            <a:off x="4875733" y="657007"/>
-            <a:ext cx="2339635" cy="2339635"/>
+            <a:off x="4764323" y="750405"/>
+            <a:ext cx="2339636" cy="2339636"/>
           </a:xfrm>
           <a:prstGeom prst="rect">
             <a:avLst/>
@@ -3683,7 +6110,1247 @@
 </p:sld>
 </file>
 
+<file path=ppt/slides/slide10.xml><?xml version="1.0" encoding="utf-8"?>
+<p:sld xmlns:a="http://schemas.openxmlformats.org/drawingml/2006/main" xmlns:r="http://schemas.openxmlformats.org/officeDocument/2006/relationships" xmlns:p="http://schemas.openxmlformats.org/presentationml/2006/main">
+  <p:cSld>
+    <p:spTree>
+      <p:nvGrpSpPr>
+        <p:cNvPr id="1" name=""/>
+        <p:cNvGrpSpPr/>
+        <p:nvPr/>
+      </p:nvGrpSpPr>
+      <p:grpSpPr>
+        <a:xfrm>
+          <a:off x="0" y="0"/>
+          <a:ext cx="0" cy="0"/>
+          <a:chOff x="0" y="0"/>
+          <a:chExt cx="0" cy="0"/>
+        </a:xfrm>
+      </p:grpSpPr>
+      <p:sp>
+        <p:nvSpPr>
+          <p:cNvPr id="2" name="Titel 1">
+            <a:extLst>
+              <a:ext uri="{FF2B5EF4-FFF2-40B4-BE49-F238E27FC236}">
+                <a16:creationId xmlns:a16="http://schemas.microsoft.com/office/drawing/2014/main" id="{B4D843C6-4DDE-2B00-4E1B-6900887E9EE6}"/>
+              </a:ext>
+            </a:extLst>
+          </p:cNvPr>
+          <p:cNvSpPr>
+            <a:spLocks noGrp="1"/>
+          </p:cNvSpPr>
+          <p:nvPr>
+            <p:ph type="title"/>
+          </p:nvPr>
+        </p:nvSpPr>
+        <p:spPr/>
+        <p:txBody>
+          <a:bodyPr/>
+          <a:lstStyle/>
+          <a:p>
+            <a:r>
+              <a:rPr lang="en-US" dirty="0"/>
+              <a:t>Node.js is catching up</a:t>
+            </a:r>
+          </a:p>
+        </p:txBody>
+      </p:sp>
+      <p:sp>
+        <p:nvSpPr>
+          <p:cNvPr id="3" name="Inhaltsplatzhalter 2">
+            <a:extLst>
+              <a:ext uri="{FF2B5EF4-FFF2-40B4-BE49-F238E27FC236}">
+                <a16:creationId xmlns:a16="http://schemas.microsoft.com/office/drawing/2014/main" id="{A499063B-8A9F-0CB5-123D-40DCE879C361}"/>
+              </a:ext>
+            </a:extLst>
+          </p:cNvPr>
+          <p:cNvSpPr>
+            <a:spLocks noGrp="1"/>
+          </p:cNvSpPr>
+          <p:nvPr>
+            <p:ph idx="1"/>
+          </p:nvPr>
+        </p:nvSpPr>
+        <p:spPr>
+          <a:xfrm>
+            <a:off x="838200" y="1526102"/>
+            <a:ext cx="10515600" cy="4830556"/>
+          </a:xfrm>
+        </p:spPr>
+        <p:txBody>
+          <a:bodyPr>
+            <a:normAutofit fontScale="62500" lnSpcReduction="20000"/>
+          </a:bodyPr>
+          <a:lstStyle/>
+          <a:p>
+            <a:r>
+              <a:rPr lang="en-US" dirty="0"/>
+              <a:t>TypeScript support</a:t>
+            </a:r>
+          </a:p>
+          <a:p>
+            <a:pPr lvl="1"/>
+            <a:r>
+              <a:rPr lang="en-US" dirty="0"/>
+              <a:t>Node.js added </a:t>
+            </a:r>
+            <a:r>
+              <a:rPr lang="en-US" dirty="0">
+                <a:latin typeface="Aptos Mono" panose="020B0009020202020204" pitchFamily="49" charset="0"/>
+              </a:rPr>
+              <a:t>--experimental-strip-types</a:t>
+            </a:r>
+          </a:p>
+          <a:p>
+            <a:pPr lvl="1"/>
+            <a:r>
+              <a:rPr lang="en-US" dirty="0"/>
+              <a:t>Experimental since </a:t>
+            </a:r>
+            <a:r>
+              <a:rPr lang="de-DE" dirty="0"/>
+              <a:t>v22.6.0 (August 2024)</a:t>
+            </a:r>
+          </a:p>
+          <a:p>
+            <a:pPr lvl="1"/>
+            <a:r>
+              <a:rPr lang="de-DE" dirty="0" err="1"/>
+              <a:t>Stable</a:t>
+            </a:r>
+            <a:r>
+              <a:rPr lang="de-DE" dirty="0"/>
+              <a:t> and </a:t>
+            </a:r>
+            <a:r>
+              <a:rPr lang="de-DE" dirty="0" err="1"/>
+              <a:t>default</a:t>
+            </a:r>
+            <a:r>
+              <a:rPr lang="de-DE" dirty="0"/>
+              <a:t> </a:t>
+            </a:r>
+            <a:r>
+              <a:rPr lang="de-DE" dirty="0" err="1"/>
+              <a:t>since</a:t>
+            </a:r>
+            <a:r>
+              <a:rPr lang="de-DE" dirty="0"/>
+              <a:t> v23.6.0 (</a:t>
+            </a:r>
+            <a:r>
+              <a:rPr lang="de-DE" dirty="0" err="1"/>
+              <a:t>January</a:t>
+            </a:r>
+            <a:r>
+              <a:rPr lang="de-DE" dirty="0"/>
+              <a:t> 2025)</a:t>
+            </a:r>
+          </a:p>
+          <a:p>
+            <a:pPr lvl="2"/>
+            <a:r>
+              <a:rPr lang="de-DE" dirty="0">
+                <a:latin typeface="Aptos Mono" panose="020B0009020202020204" pitchFamily="49" charset="0"/>
+              </a:rPr>
+              <a:t>--</a:t>
+            </a:r>
+            <a:r>
+              <a:rPr lang="de-DE" dirty="0" err="1">
+                <a:latin typeface="Aptos Mono" panose="020B0009020202020204" pitchFamily="49" charset="0"/>
+              </a:rPr>
+              <a:t>no</a:t>
+            </a:r>
+            <a:r>
+              <a:rPr lang="de-DE" dirty="0">
+                <a:latin typeface="Aptos Mono" panose="020B0009020202020204" pitchFamily="49" charset="0"/>
+              </a:rPr>
+              <a:t>-experimental-strip-</a:t>
+            </a:r>
+            <a:r>
+              <a:rPr lang="de-DE" dirty="0" err="1">
+                <a:latin typeface="Aptos Mono" panose="020B0009020202020204" pitchFamily="49" charset="0"/>
+              </a:rPr>
+              <a:t>types</a:t>
+            </a:r>
+            <a:r>
+              <a:rPr lang="de-DE" dirty="0"/>
+              <a:t> </a:t>
+            </a:r>
+            <a:r>
+              <a:rPr lang="de-DE" dirty="0" err="1"/>
+              <a:t>to</a:t>
+            </a:r>
+            <a:r>
+              <a:rPr lang="de-DE" dirty="0"/>
+              <a:t> </a:t>
+            </a:r>
+            <a:r>
+              <a:rPr lang="de-DE" dirty="0" err="1"/>
+              <a:t>prevent</a:t>
+            </a:r>
+            <a:r>
+              <a:rPr lang="de-DE" dirty="0"/>
+              <a:t> type </a:t>
+            </a:r>
+            <a:r>
+              <a:rPr lang="de-DE" dirty="0" err="1"/>
+              <a:t>stripping</a:t>
+            </a:r>
+            <a:endParaRPr lang="de-DE" dirty="0"/>
+          </a:p>
+          <a:p>
+            <a:pPr lvl="1"/>
+            <a:r>
+              <a:rPr lang="en-US" dirty="0"/>
+              <a:t>Replaces TypeScript syntax with whitespaces</a:t>
+            </a:r>
+          </a:p>
+          <a:p>
+            <a:pPr lvl="1"/>
+            <a:r>
+              <a:rPr lang="en-US" dirty="0"/>
+              <a:t>(</a:t>
+            </a:r>
+            <a:r>
+              <a:rPr lang="en-US" dirty="0">
+                <a:latin typeface="Aptos Mono" panose="020B0009020202020204" pitchFamily="49" charset="0"/>
+              </a:rPr>
+              <a:t>--experimental-transform-types</a:t>
+            </a:r>
+            <a:r>
+              <a:rPr lang="en-US" dirty="0"/>
+              <a:t> for TypeScript-only syntax like </a:t>
+            </a:r>
+            <a:r>
+              <a:rPr lang="en-US" dirty="0" err="1"/>
+              <a:t>enums</a:t>
+            </a:r>
+            <a:r>
+              <a:rPr lang="en-US" dirty="0"/>
+              <a:t>)</a:t>
+            </a:r>
+          </a:p>
+          <a:p>
+            <a:pPr lvl="1"/>
+            <a:r>
+              <a:rPr lang="en-US" dirty="0">
+                <a:hlinkClick r:id="rId2"/>
+              </a:rPr>
+              <a:t>https://nodejs.org/api/typescript.html#type-stripping</a:t>
+            </a:r>
+            <a:r>
+              <a:rPr lang="en-US" dirty="0"/>
+              <a:t> </a:t>
+            </a:r>
+          </a:p>
+          <a:p>
+            <a:pPr lvl="1"/>
+            <a:endParaRPr lang="en-US" dirty="0"/>
+          </a:p>
+          <a:p>
+            <a:r>
+              <a:rPr lang="en-US" sz="2800" dirty="0"/>
+              <a:t>Node.js added </a:t>
+            </a:r>
+            <a:r>
+              <a:rPr lang="en-US" sz="2800" dirty="0">
+                <a:latin typeface="Aptos Mono" panose="020F0502020204030204" pitchFamily="49" charset="0"/>
+              </a:rPr>
+              <a:t>--experimental-network-imports</a:t>
+            </a:r>
+          </a:p>
+          <a:p>
+            <a:pPr lvl="1"/>
+            <a:r>
+              <a:rPr lang="en-US" dirty="0"/>
+              <a:t>But removed it in v22.6.0 (August 2024)</a:t>
+            </a:r>
+          </a:p>
+          <a:p>
+            <a:pPr lvl="1"/>
+            <a:r>
+              <a:rPr lang="en-US" dirty="0">
+                <a:hlinkClick r:id="rId3"/>
+              </a:rPr>
+              <a:t>https://github.com/nodejs/node/pull/53822</a:t>
+            </a:r>
+            <a:r>
+              <a:rPr lang="en-US" dirty="0"/>
+              <a:t> </a:t>
+            </a:r>
+          </a:p>
+          <a:p>
+            <a:pPr lvl="1"/>
+            <a:endParaRPr lang="en-US" dirty="0"/>
+          </a:p>
+          <a:p>
+            <a:r>
+              <a:rPr lang="en-US" dirty="0"/>
+              <a:t>Security</a:t>
+            </a:r>
+          </a:p>
+          <a:p>
+            <a:pPr lvl="1"/>
+            <a:r>
+              <a:rPr lang="en-US" dirty="0"/>
+              <a:t>Node.js has now a Permission Model</a:t>
+            </a:r>
+          </a:p>
+          <a:p>
+            <a:pPr lvl="1"/>
+            <a:r>
+              <a:rPr lang="en-US" dirty="0"/>
+              <a:t>Experimental since v20.0.0 (</a:t>
+            </a:r>
+            <a:r>
+              <a:rPr lang="de-DE" dirty="0"/>
+              <a:t>April 2023</a:t>
+            </a:r>
+            <a:r>
+              <a:rPr lang="en-US" dirty="0"/>
+              <a:t>)</a:t>
+            </a:r>
+          </a:p>
+          <a:p>
+            <a:pPr lvl="1"/>
+            <a:r>
+              <a:rPr lang="en-US" dirty="0"/>
+              <a:t>Stable since v23.5.0 (</a:t>
+            </a:r>
+            <a:r>
+              <a:rPr lang="de-DE" dirty="0" err="1"/>
+              <a:t>December</a:t>
+            </a:r>
+            <a:r>
+              <a:rPr lang="de-DE" dirty="0"/>
+              <a:t> 2024)</a:t>
+            </a:r>
+            <a:endParaRPr lang="en-US" dirty="0"/>
+          </a:p>
+          <a:p>
+            <a:pPr lvl="1"/>
+            <a:r>
+              <a:rPr lang="en-US" dirty="0"/>
+              <a:t>Example: </a:t>
+            </a:r>
+            <a:r>
+              <a:rPr lang="en-US" dirty="0">
+                <a:latin typeface="Aptos Mono" panose="020B0009020202020204" pitchFamily="49" charset="0"/>
+              </a:rPr>
+              <a:t>node --permission --allow-fs-read=/folder/ </a:t>
+            </a:r>
+            <a:r>
+              <a:rPr lang="en-US" dirty="0" err="1">
+                <a:latin typeface="Aptos Mono" panose="020B0009020202020204" pitchFamily="49" charset="0"/>
+              </a:rPr>
+              <a:t>script.ts</a:t>
+            </a:r>
+            <a:endParaRPr lang="en-US" dirty="0">
+              <a:latin typeface="Aptos Mono" panose="020B0009020202020204" pitchFamily="49" charset="0"/>
+            </a:endParaRPr>
+          </a:p>
+          <a:p>
+            <a:pPr lvl="1"/>
+            <a:r>
+              <a:rPr lang="en-US" dirty="0">
+                <a:hlinkClick r:id="rId4"/>
+              </a:rPr>
+              <a:t>https://nodejs.org/api/cli.html#--permission</a:t>
+            </a:r>
+            <a:r>
+              <a:rPr lang="en-US" dirty="0"/>
+              <a:t> </a:t>
+            </a:r>
+          </a:p>
+        </p:txBody>
+      </p:sp>
+    </p:spTree>
+    <p:extLst>
+      <p:ext uri="{BB962C8B-B14F-4D97-AF65-F5344CB8AC3E}">
+        <p14:creationId xmlns:p14="http://schemas.microsoft.com/office/powerpoint/2010/main" val="1130963413"/>
+      </p:ext>
+    </p:extLst>
+  </p:cSld>
+  <p:clrMapOvr>
+    <a:masterClrMapping/>
+  </p:clrMapOvr>
+</p:sld>
+</file>
+
+<file path=ppt/slides/slide11.xml><?xml version="1.0" encoding="utf-8"?>
+<p:sld xmlns:a="http://schemas.openxmlformats.org/drawingml/2006/main" xmlns:r="http://schemas.openxmlformats.org/officeDocument/2006/relationships" xmlns:p="http://schemas.openxmlformats.org/presentationml/2006/main">
+  <p:cSld>
+    <p:spTree>
+      <p:nvGrpSpPr>
+        <p:cNvPr id="1" name=""/>
+        <p:cNvGrpSpPr/>
+        <p:nvPr/>
+      </p:nvGrpSpPr>
+      <p:grpSpPr>
+        <a:xfrm>
+          <a:off x="0" y="0"/>
+          <a:ext cx="0" cy="0"/>
+          <a:chOff x="0" y="0"/>
+          <a:chExt cx="0" cy="0"/>
+        </a:xfrm>
+      </p:grpSpPr>
+      <p:sp>
+        <p:nvSpPr>
+          <p:cNvPr id="2" name="Titel 1">
+            <a:extLst>
+              <a:ext uri="{FF2B5EF4-FFF2-40B4-BE49-F238E27FC236}">
+                <a16:creationId xmlns:a16="http://schemas.microsoft.com/office/drawing/2014/main" id="{7C7C06E6-DCE0-9641-CB3E-12F9B4A0EC97}"/>
+              </a:ext>
+            </a:extLst>
+          </p:cNvPr>
+          <p:cNvSpPr>
+            <a:spLocks noGrp="1"/>
+          </p:cNvSpPr>
+          <p:nvPr>
+            <p:ph type="title"/>
+          </p:nvPr>
+        </p:nvSpPr>
+        <p:spPr/>
+        <p:txBody>
+          <a:bodyPr/>
+          <a:lstStyle/>
+          <a:p>
+            <a:r>
+              <a:rPr lang="de-DE" dirty="0"/>
+              <a:t>Advantages </a:t>
+            </a:r>
+            <a:r>
+              <a:rPr lang="de-DE" dirty="0" err="1"/>
+              <a:t>of</a:t>
+            </a:r>
+            <a:r>
+              <a:rPr lang="de-DE" dirty="0"/>
+              <a:t> </a:t>
+            </a:r>
+            <a:r>
+              <a:rPr lang="de-DE" dirty="0" err="1"/>
+              <a:t>using</a:t>
+            </a:r>
+            <a:r>
+              <a:rPr lang="de-DE" dirty="0"/>
+              <a:t> </a:t>
+            </a:r>
+            <a:r>
+              <a:rPr lang="de-DE" dirty="0" err="1"/>
+              <a:t>Deno</a:t>
+            </a:r>
+            <a:r>
+              <a:rPr lang="de-DE" dirty="0"/>
+              <a:t> </a:t>
+            </a:r>
+            <a:r>
+              <a:rPr lang="de-DE" dirty="0" err="1"/>
+              <a:t>for</a:t>
+            </a:r>
+            <a:r>
+              <a:rPr lang="de-DE" dirty="0"/>
+              <a:t> Scripts</a:t>
+            </a:r>
+          </a:p>
+        </p:txBody>
+      </p:sp>
+      <p:sp>
+        <p:nvSpPr>
+          <p:cNvPr id="3" name="Inhaltsplatzhalter 2">
+            <a:extLst>
+              <a:ext uri="{FF2B5EF4-FFF2-40B4-BE49-F238E27FC236}">
+                <a16:creationId xmlns:a16="http://schemas.microsoft.com/office/drawing/2014/main" id="{C855EE0D-EA6B-9F77-A8E6-5A31D580C148}"/>
+              </a:ext>
+            </a:extLst>
+          </p:cNvPr>
+          <p:cNvSpPr>
+            <a:spLocks noGrp="1"/>
+          </p:cNvSpPr>
+          <p:nvPr>
+            <p:ph idx="1"/>
+          </p:nvPr>
+        </p:nvSpPr>
+        <p:spPr/>
+        <p:txBody>
+          <a:bodyPr>
+            <a:normAutofit fontScale="92500" lnSpcReduction="10000"/>
+          </a:bodyPr>
+          <a:lstStyle/>
+          <a:p>
+            <a:r>
+              <a:rPr lang="de-DE" dirty="0" err="1"/>
+              <a:t>Better</a:t>
+            </a:r>
+            <a:r>
+              <a:rPr lang="de-DE" dirty="0"/>
+              <a:t> maintainable </a:t>
+            </a:r>
+            <a:r>
+              <a:rPr lang="de-DE" dirty="0" err="1"/>
+              <a:t>than</a:t>
+            </a:r>
+            <a:r>
+              <a:rPr lang="de-DE" dirty="0"/>
+              <a:t> Bash, Groovy </a:t>
+            </a:r>
+            <a:r>
+              <a:rPr lang="de-DE" dirty="0" err="1"/>
+              <a:t>or</a:t>
+            </a:r>
+            <a:r>
+              <a:rPr lang="de-DE" dirty="0"/>
+              <a:t> JavaScript but </a:t>
+            </a:r>
+            <a:r>
+              <a:rPr lang="de-DE" dirty="0" err="1"/>
+              <a:t>as</a:t>
+            </a:r>
+            <a:r>
+              <a:rPr lang="de-DE" dirty="0"/>
+              <a:t> simple</a:t>
+            </a:r>
+          </a:p>
+          <a:p>
+            <a:pPr lvl="1"/>
+            <a:r>
+              <a:rPr lang="de-DE" dirty="0" err="1"/>
+              <a:t>No</a:t>
+            </a:r>
+            <a:r>
+              <a:rPr lang="de-DE" dirty="0"/>
+              <a:t> </a:t>
+            </a:r>
+            <a:r>
+              <a:rPr lang="de-DE" dirty="0" err="1"/>
+              <a:t>config</a:t>
+            </a:r>
+            <a:r>
+              <a:rPr lang="de-DE" dirty="0"/>
+              <a:t>, </a:t>
+            </a:r>
+            <a:r>
+              <a:rPr lang="de-DE" dirty="0" err="1"/>
+              <a:t>no</a:t>
+            </a:r>
+            <a:r>
+              <a:rPr lang="de-DE" dirty="0"/>
+              <a:t> </a:t>
+            </a:r>
+            <a:r>
+              <a:rPr lang="de-DE" dirty="0" err="1"/>
+              <a:t>package.json</a:t>
+            </a:r>
+            <a:r>
+              <a:rPr lang="de-DE" dirty="0"/>
+              <a:t>, </a:t>
+            </a:r>
+            <a:r>
+              <a:rPr lang="de-DE" dirty="0" err="1"/>
+              <a:t>no</a:t>
+            </a:r>
+            <a:r>
+              <a:rPr lang="de-DE" dirty="0"/>
+              <a:t> </a:t>
+            </a:r>
+            <a:r>
+              <a:rPr lang="de-DE" dirty="0" err="1"/>
+              <a:t>build</a:t>
+            </a:r>
+            <a:r>
+              <a:rPr lang="de-DE" dirty="0"/>
+              <a:t> </a:t>
+            </a:r>
+            <a:r>
+              <a:rPr lang="de-DE" dirty="0" err="1"/>
+              <a:t>step</a:t>
+            </a:r>
+            <a:r>
+              <a:rPr lang="de-DE" dirty="0"/>
+              <a:t> </a:t>
+            </a:r>
+            <a:r>
+              <a:rPr lang="de-DE" dirty="0" err="1"/>
+              <a:t>required</a:t>
+            </a:r>
+            <a:endParaRPr lang="de-DE" dirty="0"/>
+          </a:p>
+          <a:p>
+            <a:endParaRPr lang="de-DE" dirty="0"/>
+          </a:p>
+          <a:p>
+            <a:r>
+              <a:rPr lang="de-DE" dirty="0" err="1"/>
+              <a:t>TypeScript</a:t>
+            </a:r>
+            <a:r>
+              <a:rPr lang="de-DE" dirty="0"/>
+              <a:t> </a:t>
+            </a:r>
+            <a:r>
+              <a:rPr lang="de-DE" dirty="0" err="1"/>
+              <a:t>is</a:t>
+            </a:r>
+            <a:r>
+              <a:rPr lang="de-DE" dirty="0"/>
+              <a:t> </a:t>
+            </a:r>
+            <a:r>
+              <a:rPr lang="de-DE" dirty="0" err="1"/>
+              <a:t>commonly</a:t>
+            </a:r>
+            <a:r>
+              <a:rPr lang="de-DE" dirty="0"/>
+              <a:t> </a:t>
+            </a:r>
+            <a:r>
+              <a:rPr lang="de-DE" dirty="0" err="1"/>
+              <a:t>used</a:t>
+            </a:r>
+            <a:r>
+              <a:rPr lang="de-DE" dirty="0"/>
+              <a:t> </a:t>
+            </a:r>
+            <a:r>
+              <a:rPr lang="de-DE" dirty="0" err="1"/>
+              <a:t>by</a:t>
+            </a:r>
+            <a:r>
+              <a:rPr lang="de-DE" dirty="0"/>
+              <a:t> </a:t>
+            </a:r>
+            <a:r>
+              <a:rPr lang="de-DE" dirty="0" err="1"/>
+              <a:t>developers</a:t>
+            </a:r>
+            <a:endParaRPr lang="de-DE" dirty="0"/>
+          </a:p>
+          <a:p>
+            <a:endParaRPr lang="de-DE" dirty="0"/>
+          </a:p>
+          <a:p>
+            <a:r>
+              <a:rPr lang="de-DE" dirty="0" err="1"/>
+              <a:t>Deno</a:t>
+            </a:r>
+            <a:r>
+              <a:rPr lang="de-DE" dirty="0"/>
+              <a:t> </a:t>
+            </a:r>
+            <a:r>
+              <a:rPr lang="de-DE" dirty="0" err="1"/>
+              <a:t>can</a:t>
+            </a:r>
+            <a:r>
+              <a:rPr lang="de-DE" dirty="0"/>
+              <a:t> </a:t>
+            </a:r>
+            <a:r>
+              <a:rPr lang="de-DE" dirty="0" err="1"/>
+              <a:t>be</a:t>
+            </a:r>
+            <a:r>
+              <a:rPr lang="de-DE" dirty="0"/>
+              <a:t> </a:t>
+            </a:r>
+            <a:r>
+              <a:rPr lang="de-DE" dirty="0" err="1"/>
+              <a:t>used</a:t>
+            </a:r>
+            <a:r>
+              <a:rPr lang="de-DE" dirty="0"/>
+              <a:t> via </a:t>
+            </a:r>
+            <a:r>
+              <a:rPr lang="de-DE" dirty="0" err="1"/>
+              <a:t>npm</a:t>
+            </a:r>
+            <a:r>
+              <a:rPr lang="de-DE" dirty="0"/>
+              <a:t>:</a:t>
+            </a:r>
+          </a:p>
+          <a:p>
+            <a:pPr lvl="1"/>
+            <a:r>
+              <a:rPr lang="de-DE" dirty="0" err="1"/>
+              <a:t>npm</a:t>
+            </a:r>
+            <a:r>
+              <a:rPr lang="de-DE" dirty="0"/>
+              <a:t> </a:t>
+            </a:r>
+            <a:r>
+              <a:rPr lang="de-DE" dirty="0" err="1"/>
+              <a:t>install</a:t>
+            </a:r>
+            <a:r>
+              <a:rPr lang="de-DE" dirty="0"/>
+              <a:t> --save-</a:t>
+            </a:r>
+            <a:r>
+              <a:rPr lang="de-DE" dirty="0" err="1"/>
+              <a:t>dev</a:t>
+            </a:r>
+            <a:r>
+              <a:rPr lang="de-DE" dirty="0"/>
+              <a:t> </a:t>
+            </a:r>
+            <a:r>
+              <a:rPr lang="de-DE" dirty="0" err="1"/>
+              <a:t>deno</a:t>
+            </a:r>
+            <a:r>
+              <a:rPr lang="de-DE" dirty="0"/>
+              <a:t>-bin</a:t>
+            </a:r>
+          </a:p>
+          <a:p>
+            <a:pPr lvl="1"/>
+            <a:r>
+              <a:rPr lang="de-DE" dirty="0">
+                <a:hlinkClick r:id="rId2"/>
+              </a:rPr>
+              <a:t>https://www.npmjs.com/package/deno-bin</a:t>
+            </a:r>
+            <a:endParaRPr lang="de-DE" dirty="0"/>
+          </a:p>
+          <a:p>
+            <a:pPr lvl="1"/>
+            <a:endParaRPr lang="de-DE" dirty="0"/>
+          </a:p>
+          <a:p>
+            <a:r>
+              <a:rPr lang="de-DE" dirty="0" err="1"/>
+              <a:t>Examples</a:t>
+            </a:r>
+            <a:r>
+              <a:rPr lang="de-DE" dirty="0"/>
+              <a:t> </a:t>
+            </a:r>
+            <a:r>
+              <a:rPr lang="de-DE" dirty="0" err="1"/>
+              <a:t>used</a:t>
+            </a:r>
+            <a:r>
+              <a:rPr lang="de-DE" dirty="0"/>
+              <a:t> in Demo:</a:t>
+            </a:r>
+          </a:p>
+          <a:p>
+            <a:pPr lvl="1"/>
+            <a:r>
+              <a:rPr lang="de-DE" dirty="0">
+                <a:hlinkClick r:id="rId3"/>
+              </a:rPr>
+              <a:t>https://github.com/MichiSpebach/denoexamples</a:t>
+            </a:r>
+            <a:r>
+              <a:rPr lang="de-DE" dirty="0"/>
+              <a:t> </a:t>
+            </a:r>
+          </a:p>
+          <a:p>
+            <a:endParaRPr lang="de-DE" dirty="0"/>
+          </a:p>
+          <a:p>
+            <a:endParaRPr lang="de-DE" dirty="0"/>
+          </a:p>
+        </p:txBody>
+      </p:sp>
+    </p:spTree>
+    <p:extLst>
+      <p:ext uri="{BB962C8B-B14F-4D97-AF65-F5344CB8AC3E}">
+        <p14:creationId xmlns:p14="http://schemas.microsoft.com/office/powerpoint/2010/main" val="3146426777"/>
+      </p:ext>
+    </p:extLst>
+  </p:cSld>
+  <p:clrMapOvr>
+    <a:masterClrMapping/>
+  </p:clrMapOvr>
+</p:sld>
+</file>
+
 <file path=ppt/slides/slide2.xml><?xml version="1.0" encoding="utf-8"?>
+<p:sld xmlns:a="http://schemas.openxmlformats.org/drawingml/2006/main" xmlns:r="http://schemas.openxmlformats.org/officeDocument/2006/relationships" xmlns:p="http://schemas.openxmlformats.org/presentationml/2006/main">
+  <p:cSld>
+    <p:spTree>
+      <p:nvGrpSpPr>
+        <p:cNvPr id="1" name="">
+          <a:extLst>
+            <a:ext uri="{FF2B5EF4-FFF2-40B4-BE49-F238E27FC236}">
+              <a16:creationId xmlns:a16="http://schemas.microsoft.com/office/drawing/2014/main" id="{3A05B864-C56C-DDAF-9876-215D061A3B75}"/>
+            </a:ext>
+          </a:extLst>
+        </p:cNvPr>
+        <p:cNvGrpSpPr/>
+        <p:nvPr/>
+      </p:nvGrpSpPr>
+      <p:grpSpPr>
+        <a:xfrm>
+          <a:off x="0" y="0"/>
+          <a:ext cx="0" cy="0"/>
+          <a:chOff x="0" y="0"/>
+          <a:chExt cx="0" cy="0"/>
+        </a:xfrm>
+      </p:grpSpPr>
+      <p:sp>
+        <p:nvSpPr>
+          <p:cNvPr id="3" name="Untertitel 2">
+            <a:extLst>
+              <a:ext uri="{FF2B5EF4-FFF2-40B4-BE49-F238E27FC236}">
+                <a16:creationId xmlns:a16="http://schemas.microsoft.com/office/drawing/2014/main" id="{1D57FB8F-7340-010C-D636-4CA3E8C38AAB}"/>
+              </a:ext>
+            </a:extLst>
+          </p:cNvPr>
+          <p:cNvSpPr>
+            <a:spLocks noGrp="1"/>
+          </p:cNvSpPr>
+          <p:nvPr>
+            <p:ph type="subTitle" idx="1"/>
+          </p:nvPr>
+        </p:nvSpPr>
+        <p:spPr>
+          <a:xfrm>
+            <a:off x="781970" y="3090041"/>
+            <a:ext cx="10304342" cy="2167759"/>
+          </a:xfrm>
+        </p:spPr>
+        <p:txBody>
+          <a:bodyPr>
+            <a:noAutofit/>
+          </a:bodyPr>
+          <a:lstStyle/>
+          <a:p>
+            <a:r>
+              <a:rPr lang="en-US" sz="4000" dirty="0"/>
+              <a:t>TypeScript everywhere: </a:t>
+            </a:r>
+            <a:r>
+              <a:rPr lang="de-DE" sz="4000" dirty="0"/>
+              <a:t>Eine neue Ära von Skripten mit </a:t>
+            </a:r>
+            <a:r>
+              <a:rPr lang="de-DE" sz="4000" dirty="0" err="1"/>
+              <a:t>Deno</a:t>
+            </a:r>
+            <a:r>
+              <a:rPr lang="de-DE" sz="4000" dirty="0"/>
+              <a:t> oder Node</a:t>
+            </a:r>
+          </a:p>
+        </p:txBody>
+      </p:sp>
+      <p:pic>
+        <p:nvPicPr>
+          <p:cNvPr id="9" name="Grafik 8">
+            <a:extLst>
+              <a:ext uri="{FF2B5EF4-FFF2-40B4-BE49-F238E27FC236}">
+                <a16:creationId xmlns:a16="http://schemas.microsoft.com/office/drawing/2014/main" id="{E439B739-CE3D-BCF8-8A6F-ADCD769EE4DE}"/>
+              </a:ext>
+            </a:extLst>
+          </p:cNvPr>
+          <p:cNvPicPr>
+            <a:picLocks noChangeAspect="1"/>
+          </p:cNvPicPr>
+          <p:nvPr/>
+        </p:nvPicPr>
+        <p:blipFill>
+          <a:blip r:embed="rId3"/>
+          <a:stretch>
+            <a:fillRect/>
+          </a:stretch>
+        </p:blipFill>
+        <p:spPr>
+          <a:xfrm>
+            <a:off x="6096000" y="1328151"/>
+            <a:ext cx="3825572" cy="1310754"/>
+          </a:xfrm>
+          <a:prstGeom prst="rect">
+            <a:avLst/>
+          </a:prstGeom>
+        </p:spPr>
+      </p:pic>
+      <p:pic>
+        <p:nvPicPr>
+          <p:cNvPr id="10" name="Grafik 9">
+            <a:extLst>
+              <a:ext uri="{FF2B5EF4-FFF2-40B4-BE49-F238E27FC236}">
+                <a16:creationId xmlns:a16="http://schemas.microsoft.com/office/drawing/2014/main" id="{3691F5D4-5B48-379A-5190-A2053044E9A2}"/>
+              </a:ext>
+            </a:extLst>
+          </p:cNvPr>
+          <p:cNvPicPr>
+            <a:picLocks noChangeAspect="1"/>
+          </p:cNvPicPr>
+          <p:nvPr/>
+        </p:nvPicPr>
+        <p:blipFill>
+          <a:blip r:embed="rId4">
+            <a:extLst>
+              <a:ext uri="{96DAC541-7B7A-43D3-8B79-37D633B846F1}">
+                <asvg:svgBlip xmlns:asvg="http://schemas.microsoft.com/office/drawing/2016/SVG/main" r:embed="rId5"/>
+              </a:ext>
+            </a:extLst>
+          </a:blip>
+          <a:stretch>
+            <a:fillRect/>
+          </a:stretch>
+        </p:blipFill>
+        <p:spPr>
+          <a:xfrm>
+            <a:off x="2886286" y="750405"/>
+            <a:ext cx="2339636" cy="2339636"/>
+          </a:xfrm>
+          <a:prstGeom prst="rect">
+            <a:avLst/>
+          </a:prstGeom>
+        </p:spPr>
+      </p:pic>
+    </p:spTree>
+    <p:extLst>
+      <p:ext uri="{BB962C8B-B14F-4D97-AF65-F5344CB8AC3E}">
+        <p14:creationId xmlns:p14="http://schemas.microsoft.com/office/powerpoint/2010/main" val="42368053"/>
+      </p:ext>
+    </p:extLst>
+  </p:cSld>
+  <p:clrMapOvr>
+    <a:masterClrMapping/>
+  </p:clrMapOvr>
+</p:sld>
+</file>
+
+<file path=ppt/slides/slide3.xml><?xml version="1.0" encoding="utf-8"?>
+<p:sld xmlns:a="http://schemas.openxmlformats.org/drawingml/2006/main" xmlns:r="http://schemas.openxmlformats.org/officeDocument/2006/relationships" xmlns:p="http://schemas.openxmlformats.org/presentationml/2006/main">
+  <p:cSld>
+    <p:spTree>
+      <p:nvGrpSpPr>
+        <p:cNvPr id="1" name=""/>
+        <p:cNvGrpSpPr/>
+        <p:nvPr/>
+      </p:nvGrpSpPr>
+      <p:grpSpPr>
+        <a:xfrm>
+          <a:off x="0" y="0"/>
+          <a:ext cx="0" cy="0"/>
+          <a:chOff x="0" y="0"/>
+          <a:chExt cx="0" cy="0"/>
+        </a:xfrm>
+      </p:grpSpPr>
+      <p:sp>
+        <p:nvSpPr>
+          <p:cNvPr id="2" name="Titel 1">
+            <a:extLst>
+              <a:ext uri="{FF2B5EF4-FFF2-40B4-BE49-F238E27FC236}">
+                <a16:creationId xmlns:a16="http://schemas.microsoft.com/office/drawing/2014/main" id="{45B2D963-1707-44B6-0FC2-9E2FCCC5F1D8}"/>
+              </a:ext>
+            </a:extLst>
+          </p:cNvPr>
+          <p:cNvSpPr>
+            <a:spLocks noGrp="1"/>
+          </p:cNvSpPr>
+          <p:nvPr>
+            <p:ph type="title"/>
+          </p:nvPr>
+        </p:nvSpPr>
+        <p:spPr/>
+        <p:txBody>
+          <a:bodyPr/>
+          <a:lstStyle/>
+          <a:p>
+            <a:r>
+              <a:rPr lang="en-US" dirty="0"/>
+              <a:t>TypeScript everywhere</a:t>
+            </a:r>
+          </a:p>
+        </p:txBody>
+      </p:sp>
+      <p:sp>
+        <p:nvSpPr>
+          <p:cNvPr id="3" name="Inhaltsplatzhalter 2">
+            <a:extLst>
+              <a:ext uri="{FF2B5EF4-FFF2-40B4-BE49-F238E27FC236}">
+                <a16:creationId xmlns:a16="http://schemas.microsoft.com/office/drawing/2014/main" id="{E4276EA0-137B-D770-89A0-74A7044E4C95}"/>
+              </a:ext>
+            </a:extLst>
+          </p:cNvPr>
+          <p:cNvSpPr>
+            <a:spLocks noGrp="1"/>
+          </p:cNvSpPr>
+          <p:nvPr>
+            <p:ph idx="1"/>
+          </p:nvPr>
+        </p:nvSpPr>
+        <p:spPr/>
+        <p:txBody>
+          <a:bodyPr>
+            <a:normAutofit fontScale="92500" lnSpcReduction="10000"/>
+          </a:bodyPr>
+          <a:lstStyle/>
+          <a:p>
+            <a:r>
+              <a:rPr lang="en-US" dirty="0"/>
+              <a:t>Web standards are most open and competitive</a:t>
+            </a:r>
+          </a:p>
+          <a:p>
+            <a:pPr lvl="1"/>
+            <a:r>
+              <a:rPr lang="en-US" dirty="0"/>
+              <a:t>Lots of libraries, runtime engines</a:t>
+            </a:r>
+          </a:p>
+          <a:p>
+            <a:endParaRPr lang="en-US" dirty="0"/>
+          </a:p>
+          <a:p>
+            <a:r>
+              <a:rPr lang="en-US" dirty="0"/>
+              <a:t>JavaScript/TypeScript ubiquitous</a:t>
+            </a:r>
+          </a:p>
+          <a:p>
+            <a:pPr lvl="1"/>
+            <a:r>
+              <a:rPr lang="en-US" dirty="0"/>
+              <a:t>First app of many is written in JavaScript/TypeScript, HTML, CSS</a:t>
+            </a:r>
+          </a:p>
+          <a:p>
+            <a:pPr lvl="1"/>
+            <a:r>
+              <a:rPr lang="en-US" dirty="0"/>
+              <a:t>Everybody knows JavaScript/TypeScript</a:t>
+            </a:r>
+          </a:p>
+          <a:p>
+            <a:pPr lvl="1"/>
+            <a:r>
+              <a:rPr lang="en-US" dirty="0"/>
+              <a:t>Runs on every platform</a:t>
+            </a:r>
+          </a:p>
+          <a:p>
+            <a:endParaRPr lang="en-US" dirty="0"/>
+          </a:p>
+          <a:p>
+            <a:r>
+              <a:rPr lang="en-US" dirty="0"/>
+              <a:t>This talk is especially about what possibilities TypeScript opens up for scripts</a:t>
+            </a:r>
+          </a:p>
+          <a:p>
+            <a:pPr lvl="1"/>
+            <a:r>
+              <a:rPr lang="en-US" dirty="0"/>
+              <a:t>More to expand horizon and give ideas, not so much a deep dive</a:t>
+            </a:r>
+          </a:p>
+        </p:txBody>
+      </p:sp>
+    </p:spTree>
+    <p:extLst>
+      <p:ext uri="{BB962C8B-B14F-4D97-AF65-F5344CB8AC3E}">
+        <p14:creationId xmlns:p14="http://schemas.microsoft.com/office/powerpoint/2010/main" val="4163813634"/>
+      </p:ext>
+    </p:extLst>
+  </p:cSld>
+  <p:clrMapOvr>
+    <a:masterClrMapping/>
+  </p:clrMapOvr>
+</p:sld>
+</file>
+
+<file path=ppt/slides/slide4.xml><?xml version="1.0" encoding="utf-8"?>
+<p:sld xmlns:a="http://schemas.openxmlformats.org/drawingml/2006/main" xmlns:r="http://schemas.openxmlformats.org/officeDocument/2006/relationships" xmlns:p="http://schemas.openxmlformats.org/presentationml/2006/main">
+  <p:cSld>
+    <p:spTree>
+      <p:nvGrpSpPr>
+        <p:cNvPr id="1" name=""/>
+        <p:cNvGrpSpPr/>
+        <p:nvPr/>
+      </p:nvGrpSpPr>
+      <p:grpSpPr>
+        <a:xfrm>
+          <a:off x="0" y="0"/>
+          <a:ext cx="0" cy="0"/>
+          <a:chOff x="0" y="0"/>
+          <a:chExt cx="0" cy="0"/>
+        </a:xfrm>
+      </p:grpSpPr>
+      <p:sp>
+        <p:nvSpPr>
+          <p:cNvPr id="2" name="Titel 1">
+            <a:extLst>
+              <a:ext uri="{FF2B5EF4-FFF2-40B4-BE49-F238E27FC236}">
+                <a16:creationId xmlns:a16="http://schemas.microsoft.com/office/drawing/2014/main" id="{746E2164-7008-AE83-CC90-16965D0FC548}"/>
+              </a:ext>
+            </a:extLst>
+          </p:cNvPr>
+          <p:cNvSpPr>
+            <a:spLocks noGrp="1"/>
+          </p:cNvSpPr>
+          <p:nvPr>
+            <p:ph type="title"/>
+          </p:nvPr>
+        </p:nvSpPr>
+        <p:spPr/>
+        <p:txBody>
+          <a:bodyPr/>
+          <a:lstStyle/>
+          <a:p>
+            <a:r>
+              <a:rPr lang="en-US" dirty="0"/>
+              <a:t>TypeScript everywhere</a:t>
+            </a:r>
+          </a:p>
+        </p:txBody>
+      </p:sp>
+      <p:sp>
+        <p:nvSpPr>
+          <p:cNvPr id="3" name="Inhaltsplatzhalter 2">
+            <a:extLst>
+              <a:ext uri="{FF2B5EF4-FFF2-40B4-BE49-F238E27FC236}">
+                <a16:creationId xmlns:a16="http://schemas.microsoft.com/office/drawing/2014/main" id="{D6F782A1-BC8D-794C-65EF-60A8DA8E41CE}"/>
+              </a:ext>
+            </a:extLst>
+          </p:cNvPr>
+          <p:cNvSpPr>
+            <a:spLocks noGrp="1"/>
+          </p:cNvSpPr>
+          <p:nvPr>
+            <p:ph idx="1"/>
+          </p:nvPr>
+        </p:nvSpPr>
+        <p:spPr/>
+        <p:txBody>
+          <a:bodyPr/>
+          <a:lstStyle/>
+          <a:p>
+            <a:r>
+              <a:rPr lang="en-US" dirty="0"/>
+              <a:t>JavaScript Runtime Environment Overview</a:t>
+            </a:r>
+          </a:p>
+          <a:p>
+            <a:r>
+              <a:rPr lang="en-US" dirty="0"/>
+              <a:t>Deno (with examples)</a:t>
+            </a:r>
+          </a:p>
+          <a:p>
+            <a:r>
+              <a:rPr lang="en-US" dirty="0"/>
+              <a:t>When to use Deno</a:t>
+            </a:r>
+          </a:p>
+          <a:p>
+            <a:r>
+              <a:rPr lang="de-DE" dirty="0" err="1"/>
+              <a:t>Comparison</a:t>
+            </a:r>
+            <a:r>
+              <a:rPr lang="de-DE" dirty="0"/>
+              <a:t> </a:t>
+            </a:r>
+            <a:r>
+              <a:rPr lang="de-DE" dirty="0" err="1"/>
+              <a:t>of</a:t>
+            </a:r>
+            <a:r>
+              <a:rPr lang="de-DE" dirty="0"/>
+              <a:t> l</a:t>
+            </a:r>
+            <a:r>
+              <a:rPr lang="en-US" dirty="0" err="1"/>
+              <a:t>anguages</a:t>
+            </a:r>
+            <a:r>
+              <a:rPr lang="en-US" dirty="0"/>
+              <a:t> for scripts</a:t>
+            </a:r>
+          </a:p>
+          <a:p>
+            <a:pPr lvl="1"/>
+            <a:r>
+              <a:rPr lang="en-US" dirty="0"/>
+              <a:t>Bash, Groovy, JavaScript, TypeScript</a:t>
+            </a:r>
+          </a:p>
+          <a:p>
+            <a:r>
+              <a:rPr lang="en-US" dirty="0"/>
+              <a:t>Node.js is catching up</a:t>
+            </a:r>
+          </a:p>
+          <a:p>
+            <a:pPr lvl="1"/>
+            <a:r>
+              <a:rPr lang="en-US" dirty="0"/>
+              <a:t>Recent developments of Node.js</a:t>
+            </a:r>
+          </a:p>
+          <a:p>
+            <a:r>
+              <a:rPr lang="de-DE" dirty="0"/>
+              <a:t>Advantages </a:t>
+            </a:r>
+            <a:r>
+              <a:rPr lang="de-DE" dirty="0" err="1"/>
+              <a:t>of</a:t>
+            </a:r>
+            <a:r>
+              <a:rPr lang="de-DE" dirty="0"/>
+              <a:t> </a:t>
+            </a:r>
+            <a:r>
+              <a:rPr lang="de-DE" dirty="0" err="1"/>
+              <a:t>using</a:t>
+            </a:r>
+            <a:r>
+              <a:rPr lang="de-DE" dirty="0"/>
+              <a:t> </a:t>
+            </a:r>
+            <a:r>
+              <a:rPr lang="de-DE" dirty="0" err="1"/>
+              <a:t>Deno</a:t>
+            </a:r>
+            <a:r>
+              <a:rPr lang="de-DE" dirty="0"/>
+              <a:t> </a:t>
+            </a:r>
+            <a:r>
+              <a:rPr lang="de-DE" dirty="0" err="1"/>
+              <a:t>for</a:t>
+            </a:r>
+            <a:r>
+              <a:rPr lang="de-DE" dirty="0"/>
+              <a:t> Scripts</a:t>
+            </a:r>
+            <a:endParaRPr lang="en-US" dirty="0"/>
+          </a:p>
+          <a:p>
+            <a:r>
+              <a:rPr lang="en-US" dirty="0"/>
+              <a:t>Discussion and further examples</a:t>
+            </a:r>
+          </a:p>
+        </p:txBody>
+      </p:sp>
+    </p:spTree>
+    <p:extLst>
+      <p:ext uri="{BB962C8B-B14F-4D97-AF65-F5344CB8AC3E}">
+        <p14:creationId xmlns:p14="http://schemas.microsoft.com/office/powerpoint/2010/main" val="3704689263"/>
+      </p:ext>
+    </p:extLst>
+  </p:cSld>
+  <p:clrMapOvr>
+    <a:masterClrMapping/>
+  </p:clrMapOvr>
+</p:sld>
+</file>
+
+<file path=ppt/slides/slide5.xml><?xml version="1.0" encoding="utf-8"?>
 <p:sld xmlns:a="http://schemas.openxmlformats.org/drawingml/2006/main" xmlns:r="http://schemas.openxmlformats.org/officeDocument/2006/relationships" xmlns:p="http://schemas.openxmlformats.org/presentationml/2006/main">
   <p:cSld>
     <p:spTree>
@@ -3762,14 +7429,14 @@
             <p:ph idx="1"/>
             <p:extLst>
               <p:ext uri="{D42A27DB-BD31-4B8C-83A1-F6EECF244321}">
-                <p14:modId xmlns:p14="http://schemas.microsoft.com/office/powerpoint/2010/main" val="3417139047"/>
+                <p14:modId xmlns:p14="http://schemas.microsoft.com/office/powerpoint/2010/main" val="1308490435"/>
               </p:ext>
             </p:extLst>
           </p:nvPr>
         </p:nvGraphicFramePr>
         <p:xfrm>
-          <a:off x="838200" y="1166650"/>
-          <a:ext cx="10515600" cy="4647026"/>
+          <a:off x="838199" y="1166650"/>
+          <a:ext cx="11067920" cy="5079954"/>
         </p:xfrm>
         <a:graphic>
           <a:graphicData uri="http://schemas.openxmlformats.org/drawingml/2006/table">
@@ -3778,14 +7445,14 @@
                 <a:tableStyleId>{2D5ABB26-0587-4C30-8999-92F81FD0307C}</a:tableStyleId>
               </a:tblPr>
               <a:tblGrid>
-                <a:gridCol w="2901381">
+                <a:gridCol w="2926607">
                   <a:extLst>
                     <a:ext uri="{9D8B030D-6E8A-4147-A177-3AD203B41FA5}">
                       <a16:colId xmlns:a16="http://schemas.microsoft.com/office/drawing/2014/main" val="1441318523"/>
                     </a:ext>
                   </a:extLst>
                 </a:gridCol>
-                <a:gridCol w="2144110">
+                <a:gridCol w="2219784">
                   <a:extLst>
                     <a:ext uri="{9D8B030D-6E8A-4147-A177-3AD203B41FA5}">
                       <a16:colId xmlns:a16="http://schemas.microsoft.com/office/drawing/2014/main" val="132730515"/>
@@ -3799,14 +7466,14 @@
                     </a:ext>
                   </a:extLst>
                 </a:gridCol>
-                <a:gridCol w="1715288">
+                <a:gridCol w="1759432">
                   <a:extLst>
                     <a:ext uri="{9D8B030D-6E8A-4147-A177-3AD203B41FA5}">
                       <a16:colId xmlns:a16="http://schemas.microsoft.com/office/drawing/2014/main" val="1504017208"/>
                     </a:ext>
                   </a:extLst>
                 </a:gridCol>
-                <a:gridCol w="1446749">
+                <a:gridCol w="1854025">
                   <a:extLst>
                     <a:ext uri="{9D8B030D-6E8A-4147-A177-3AD203B41FA5}">
                       <a16:colId xmlns:a16="http://schemas.microsoft.com/office/drawing/2014/main" val="1341435858"/>
@@ -4051,7 +7718,7 @@
                       </a:r>
                     </a:p>
                   </a:txBody>
-                  <a:tcPr/>
+                  <a:tcPr anchor="ctr"/>
                 </a:tc>
                 <a:tc>
                   <a:txBody>
@@ -4090,8 +7757,13 @@
                     <a:p>
                       <a:r>
                         <a:rPr lang="de-DE" dirty="0"/>
-                        <a:t>Zig</a:t>
-                      </a:r>
+                        <a:t>Zig, C++, </a:t>
+                      </a:r>
+                      <a:r>
+                        <a:rPr lang="de-DE" dirty="0" err="1"/>
+                        <a:t>TypeScript</a:t>
+                      </a:r>
+                      <a:endParaRPr lang="de-DE" dirty="0"/>
                     </a:p>
                   </a:txBody>
                   <a:tcPr/>
@@ -4101,6 +7773,14 @@
                     <a:bodyPr/>
                     <a:lstStyle/>
                     <a:p>
+                      <a:r>
+                        <a:rPr lang="de-DE" dirty="0"/>
+                        <a:t>Rust, JavaScript, </a:t>
+                      </a:r>
+                      <a:r>
+                        <a:rPr lang="de-DE" dirty="0" err="1"/>
+                        <a:t>TypeScript</a:t>
+                      </a:r>
                       <a:endParaRPr lang="de-DE" dirty="0"/>
                     </a:p>
                   </a:txBody>
@@ -4137,7 +7817,7 @@
                       <a:endParaRPr lang="de-DE" dirty="0"/>
                     </a:p>
                   </a:txBody>
-                  <a:tcPr/>
+                  <a:tcPr anchor="ctr"/>
                 </a:tc>
                 <a:tc>
                   <a:txBody>
@@ -4145,20 +7825,111 @@
                     <a:lstStyle/>
                     <a:p>
                       <a:r>
-                        <a:rPr lang="de-DE" dirty="0" err="1"/>
+                        <a:rPr lang="de-DE" strike="sngStrike" dirty="0" err="1"/>
                         <a:t>no</a:t>
                       </a:r>
                       <a:r>
-                        <a:rPr lang="de-DE" dirty="0"/>
-                        <a:t> (not </a:t>
-                      </a:r>
-                      <a:r>
-                        <a:rPr lang="de-DE" dirty="0" err="1"/>
-                        <a:t>yet</a:t>
-                      </a:r>
-                      <a:r>
-                        <a:rPr lang="de-DE" dirty="0"/>
+                        <a:rPr lang="de-DE" strike="sngStrike" dirty="0"/>
+                        <a:t> </a:t>
+                      </a:r>
+                      <a:r>
+                        <a:rPr lang="de-DE" sz="1400" strike="sngStrike" dirty="0"/>
+                        <a:t>(</a:t>
+                      </a:r>
+                      <a:r>
+                        <a:rPr lang="de-DE" sz="1400" strike="sngStrike" kern="1200" dirty="0">
+                          <a:solidFill>
+                            <a:schemeClr val="tx1"/>
+                          </a:solidFill>
+                          <a:effectLst/>
+                          <a:latin typeface="+mn-lt"/>
+                          <a:ea typeface="+mn-ea"/>
+                          <a:cs typeface="+mn-cs"/>
+                        </a:rPr>
+                        <a:t>experimental</a:t>
+                      </a:r>
+                      <a:r>
+                        <a:rPr lang="de-DE" sz="1400" strike="sngStrike" dirty="0"/>
                         <a:t>)</a:t>
+                      </a:r>
+                    </a:p>
+                    <a:p>
+                      <a:r>
+                        <a:rPr lang="de-DE" sz="1400" strike="noStrike" dirty="0">
+                          <a:solidFill>
+                            <a:schemeClr val="accent3">
+                              <a:lumMod val="60000"/>
+                              <a:lumOff val="40000"/>
+                            </a:schemeClr>
+                          </a:solidFill>
+                        </a:rPr>
+                        <a:t>--experimental-strip-</a:t>
+                      </a:r>
+                      <a:r>
+                        <a:rPr lang="de-DE" sz="1400" strike="noStrike" dirty="0" err="1">
+                          <a:solidFill>
+                            <a:schemeClr val="accent3">
+                              <a:lumMod val="60000"/>
+                              <a:lumOff val="40000"/>
+                            </a:schemeClr>
+                          </a:solidFill>
+                        </a:rPr>
+                        <a:t>types</a:t>
+                      </a:r>
+                      <a:r>
+                        <a:rPr lang="de-DE" sz="1400" strike="noStrike" dirty="0">
+                          <a:solidFill>
+                            <a:schemeClr val="accent3">
+                              <a:lumMod val="60000"/>
+                              <a:lumOff val="40000"/>
+                            </a:schemeClr>
+                          </a:solidFill>
+                        </a:rPr>
+                        <a:t> </a:t>
+                      </a:r>
+                      <a:r>
+                        <a:rPr lang="de-DE" sz="1400" strike="noStrike" dirty="0" err="1">
+                          <a:solidFill>
+                            <a:schemeClr val="accent3">
+                              <a:lumMod val="60000"/>
+                              <a:lumOff val="40000"/>
+                            </a:schemeClr>
+                          </a:solidFill>
+                        </a:rPr>
+                        <a:t>default</a:t>
+                      </a:r>
+                      <a:r>
+                        <a:rPr lang="de-DE" sz="1400" strike="noStrike" dirty="0">
+                          <a:solidFill>
+                            <a:schemeClr val="accent3">
+                              <a:lumMod val="60000"/>
+                              <a:lumOff val="40000"/>
+                            </a:schemeClr>
+                          </a:solidFill>
+                        </a:rPr>
+                        <a:t> </a:t>
+                      </a:r>
+                      <a:r>
+                        <a:rPr lang="de-DE" sz="1400" strike="noStrike" dirty="0" err="1">
+                          <a:solidFill>
+                            <a:schemeClr val="accent3">
+                              <a:lumMod val="60000"/>
+                              <a:lumOff val="40000"/>
+                            </a:schemeClr>
+                          </a:solidFill>
+                        </a:rPr>
+                        <a:t>since</a:t>
+                      </a:r>
+                      <a:r>
+                        <a:rPr lang="de-DE" sz="1400" strike="noStrike" dirty="0">
+                          <a:solidFill>
+                            <a:schemeClr val="accent3">
+                              <a:lumMod val="60000"/>
+                              <a:lumOff val="40000"/>
+                            </a:schemeClr>
+                          </a:solidFill>
+                        </a:rPr>
+                        <a:t> Node 23</a:t>
                       </a:r>
                     </a:p>
                   </a:txBody>
@@ -4190,7 +7961,7 @@
                       </a:endParaRPr>
                     </a:p>
                   </a:txBody>
-                  <a:tcPr/>
+                  <a:tcPr anchor="ctr"/>
                 </a:tc>
                 <a:tc>
                   <a:txBody>
@@ -4218,7 +7989,7 @@
                       </a:endParaRPr>
                     </a:p>
                   </a:txBody>
-                  <a:tcPr/>
+                  <a:tcPr anchor="ctr"/>
                 </a:tc>
                 <a:tc>
                   <a:txBody>
@@ -4503,22 +8274,6 @@
                         <a:rPr lang="de-DE" dirty="0" err="1"/>
                         <a:t>secure</a:t>
                       </a:r>
-                      <a:r>
-                        <a:rPr lang="de-DE" dirty="0"/>
-                        <a:t> </a:t>
-                      </a:r>
-                      <a:r>
-                        <a:rPr lang="de-DE" dirty="0" err="1"/>
-                        <a:t>by</a:t>
-                      </a:r>
-                      <a:r>
-                        <a:rPr lang="de-DE" dirty="0"/>
-                        <a:t> </a:t>
-                      </a:r>
-                      <a:r>
-                        <a:rPr lang="de-DE" dirty="0" err="1"/>
-                        <a:t>default</a:t>
-                      </a:r>
                       <a:endParaRPr lang="de-DE" dirty="0"/>
                     </a:p>
                   </a:txBody>
@@ -4530,10 +8285,102 @@
                     <a:lstStyle/>
                     <a:p>
                       <a:r>
-                        <a:rPr lang="de-DE" dirty="0" err="1"/>
+                        <a:rPr lang="de-DE" strike="sngStrike" dirty="0" err="1"/>
                         <a:t>no</a:t>
                       </a:r>
-                      <a:endParaRPr lang="de-DE" dirty="0"/>
+                      <a:r>
+                        <a:rPr lang="de-DE" dirty="0"/>
+                        <a:t> </a:t>
+                      </a:r>
+                      <a:r>
+                        <a:rPr lang="de-DE" sz="1400" dirty="0">
+                          <a:solidFill>
+                            <a:schemeClr val="accent3">
+                              <a:lumMod val="60000"/>
+                              <a:lumOff val="40000"/>
+                            </a:schemeClr>
+                          </a:solidFill>
+                          <a:latin typeface="Aptos Mono" panose="020B0009020202020204" pitchFamily="49" charset="0"/>
+                        </a:rPr>
+                        <a:t>--permission</a:t>
+                      </a:r>
+                      <a:r>
+                        <a:rPr lang="de-DE" sz="1400" dirty="0">
+                          <a:solidFill>
+                            <a:schemeClr val="accent3">
+                              <a:lumMod val="60000"/>
+                              <a:lumOff val="40000"/>
+                            </a:schemeClr>
+                          </a:solidFill>
+                        </a:rPr>
+                        <a:t> </a:t>
+                      </a:r>
+                      <a:r>
+                        <a:rPr lang="de-DE" sz="1400" dirty="0" err="1">
+                          <a:solidFill>
+                            <a:schemeClr val="accent3">
+                              <a:lumMod val="60000"/>
+                              <a:lumOff val="40000"/>
+                            </a:schemeClr>
+                          </a:solidFill>
+                        </a:rPr>
+                        <a:t>since</a:t>
+                      </a:r>
+                      <a:r>
+                        <a:rPr lang="de-DE" sz="1400" dirty="0">
+                          <a:solidFill>
+                            <a:schemeClr val="accent3">
+                              <a:lumMod val="60000"/>
+                              <a:lumOff val="40000"/>
+                            </a:schemeClr>
+                          </a:solidFill>
+                        </a:rPr>
+                        <a:t> Node 20, </a:t>
+                      </a:r>
+                      <a:r>
+                        <a:rPr lang="de-DE" sz="1400" dirty="0" err="1">
+                          <a:solidFill>
+                            <a:schemeClr val="accent3">
+                              <a:lumMod val="60000"/>
+                              <a:lumOff val="40000"/>
+                            </a:schemeClr>
+                          </a:solidFill>
+                        </a:rPr>
+                        <a:t>stable</a:t>
+                      </a:r>
+                      <a:r>
+                        <a:rPr lang="de-DE" sz="1400" dirty="0">
+                          <a:solidFill>
+                            <a:schemeClr val="accent3">
+                              <a:lumMod val="60000"/>
+                              <a:lumOff val="40000"/>
+                            </a:schemeClr>
+                          </a:solidFill>
+                        </a:rPr>
+                        <a:t> </a:t>
+                      </a:r>
+                      <a:r>
+                        <a:rPr lang="de-DE" sz="1400" dirty="0" err="1">
+                          <a:solidFill>
+                            <a:schemeClr val="accent3">
+                              <a:lumMod val="60000"/>
+                              <a:lumOff val="40000"/>
+                            </a:schemeClr>
+                          </a:solidFill>
+                        </a:rPr>
+                        <a:t>since</a:t>
+                      </a:r>
+                      <a:r>
+                        <a:rPr lang="de-DE" sz="1400" dirty="0">
+                          <a:solidFill>
+                            <a:schemeClr val="accent3">
+                              <a:lumMod val="60000"/>
+                              <a:lumOff val="40000"/>
+                            </a:schemeClr>
+                          </a:solidFill>
+                        </a:rPr>
+                        <a:t> 23</a:t>
+                      </a:r>
                     </a:p>
                   </a:txBody>
                   <a:tcPr anchor="ctr"/>
@@ -4553,6 +8400,37 @@
                           </a:solidFill>
                         </a:rPr>
                         <a:t>yes</a:t>
+                      </a:r>
+                      <a:r>
+                        <a:rPr lang="de-DE" dirty="0">
+                          <a:solidFill>
+                            <a:schemeClr val="accent3">
+                              <a:lumMod val="60000"/>
+                              <a:lumOff val="40000"/>
+                            </a:schemeClr>
+                          </a:solidFill>
+                        </a:rPr>
+                        <a:t> </a:t>
+                      </a:r>
+                      <a:r>
+                        <a:rPr lang="de-DE" dirty="0"/>
+                        <a:t>(</a:t>
+                      </a:r>
+                      <a:r>
+                        <a:rPr lang="de-DE" dirty="0" err="1"/>
+                        <a:t>by</a:t>
+                      </a:r>
+                      <a:r>
+                        <a:rPr lang="de-DE" dirty="0"/>
+                        <a:t> </a:t>
+                      </a:r>
+                      <a:r>
+                        <a:rPr lang="de-DE" dirty="0" err="1"/>
+                        <a:t>default</a:t>
+                      </a:r>
+                      <a:r>
+                        <a:rPr lang="de-DE" dirty="0"/>
+                        <a:t>)</a:t>
                       </a:r>
                       <a:endParaRPr lang="de-DE" dirty="0">
                         <a:solidFill>
@@ -4691,7 +8569,16 @@
                     <a:bodyPr/>
                     <a:lstStyle/>
                     <a:p>
-                      <a:endParaRPr lang="de-DE" dirty="0"/>
+                      <a:r>
+                        <a:rPr lang="de-DE" sz="1400" dirty="0">
+                          <a:hlinkClick r:id="rId6"/>
+                        </a:rPr>
+                        <a:t>https://github.com/awslabs/llrt</a:t>
+                      </a:r>
+                      <a:r>
+                        <a:rPr lang="de-DE" sz="1400" dirty="0"/>
+                        <a:t> </a:t>
+                      </a:r>
                     </a:p>
                   </a:txBody>
                   <a:tcPr/>
@@ -4720,7 +8607,7 @@
         </p:nvSpPr>
         <p:spPr>
           <a:xfrm>
-            <a:off x="592784" y="5765755"/>
+            <a:off x="592784" y="6052782"/>
             <a:ext cx="11225047" cy="646331"/>
           </a:xfrm>
           <a:prstGeom prst="rect">
@@ -4833,42 +8720,6 @@
             <a:extLst>
               <a:ext uri="{FF2B5EF4-FFF2-40B4-BE49-F238E27FC236}">
                 <a16:creationId xmlns:a16="http://schemas.microsoft.com/office/drawing/2014/main" id="{6B9431A7-E776-861B-6DAD-543298DD6DB1}"/>
-              </a:ext>
-            </a:extLst>
-          </p:cNvPr>
-          <p:cNvPicPr>
-            <a:picLocks noChangeAspect="1"/>
-          </p:cNvPicPr>
-          <p:nvPr/>
-        </p:nvPicPr>
-        <p:blipFill>
-          <a:blip r:embed="rId6">
-            <a:extLst>
-              <a:ext uri="{28A0092B-C50C-407E-A947-70E740481C1C}">
-                <a14:useLocalDpi xmlns:a14="http://schemas.microsoft.com/office/drawing/2010/main" val="0"/>
-              </a:ext>
-            </a:extLst>
-          </a:blip>
-          <a:stretch>
-            <a:fillRect/>
-          </a:stretch>
-        </p:blipFill>
-        <p:spPr>
-          <a:xfrm>
-            <a:off x="4671467" y="1008866"/>
-            <a:ext cx="914097" cy="563693"/>
-          </a:xfrm>
-          <a:prstGeom prst="rect">
-            <a:avLst/>
-          </a:prstGeom>
-        </p:spPr>
-      </p:pic>
-      <p:pic>
-        <p:nvPicPr>
-          <p:cNvPr id="4" name="Grafik 3" descr="Ein Bild, das Clipart, Grafiken, Entwurf, Design enthält.&#10;&#10;Automatisch generierte Beschreibung">
-            <a:extLst>
-              <a:ext uri="{FF2B5EF4-FFF2-40B4-BE49-F238E27FC236}">
-                <a16:creationId xmlns:a16="http://schemas.microsoft.com/office/drawing/2014/main" id="{D55544A4-E961-93EF-2B2F-A589FA005DD8}"/>
               </a:ext>
             </a:extLst>
           </p:cNvPr>
@@ -4891,8 +8742,8 @@
         </p:blipFill>
         <p:spPr>
           <a:xfrm>
-            <a:off x="6606437" y="950111"/>
-            <a:ext cx="756568" cy="756568"/>
+            <a:off x="4671467" y="1008866"/>
+            <a:ext cx="914097" cy="563693"/>
           </a:xfrm>
           <a:prstGeom prst="rect">
             <a:avLst/>
@@ -4927,7 +8778,7 @@
         </p:blipFill>
         <p:spPr>
           <a:xfrm>
-            <a:off x="8747902" y="978089"/>
+            <a:off x="8846243" y="965193"/>
             <a:ext cx="756568" cy="756568"/>
           </a:xfrm>
           <a:prstGeom prst="rect">
@@ -4963,8 +8814,44 @@
         </p:blipFill>
         <p:spPr>
           <a:xfrm>
-            <a:off x="11086049" y="1037058"/>
+            <a:off x="11282330" y="1025181"/>
             <a:ext cx="535501" cy="535501"/>
+          </a:xfrm>
+          <a:prstGeom prst="rect">
+            <a:avLst/>
+          </a:prstGeom>
+        </p:spPr>
+      </p:pic>
+      <p:pic>
+        <p:nvPicPr>
+          <p:cNvPr id="9" name="Grafik 8">
+            <a:extLst>
+              <a:ext uri="{FF2B5EF4-FFF2-40B4-BE49-F238E27FC236}">
+                <a16:creationId xmlns:a16="http://schemas.microsoft.com/office/drawing/2014/main" id="{D5193A38-2581-11D2-D123-0D1E8BF7632B}"/>
+              </a:ext>
+            </a:extLst>
+          </p:cNvPr>
+          <p:cNvPicPr>
+            <a:picLocks noChangeAspect="1"/>
+          </p:cNvPicPr>
+          <p:nvPr/>
+        </p:nvPicPr>
+        <p:blipFill>
+          <a:blip r:embed="rId10">
+            <a:extLst>
+              <a:ext uri="{96DAC541-7B7A-43D3-8B79-37D633B846F1}">
+                <asvg:svgBlip xmlns:asvg="http://schemas.microsoft.com/office/drawing/2016/SVG/main" r:embed="rId11"/>
+              </a:ext>
+            </a:extLst>
+          </a:blip>
+          <a:stretch>
+            <a:fillRect/>
+          </a:stretch>
+        </p:blipFill>
+        <p:spPr>
+          <a:xfrm>
+            <a:off x="6688675" y="965193"/>
+            <a:ext cx="756569" cy="756569"/>
           </a:xfrm>
           <a:prstGeom prst="rect">
             <a:avLst/>
@@ -4984,7 +8871,7 @@
 </p:sld>
 </file>
 
-<file path=ppt/slides/slide3.xml><?xml version="1.0" encoding="utf-8"?>
+<file path=ppt/slides/slide6.xml><?xml version="1.0" encoding="utf-8"?>
 <p:sld xmlns:a="http://schemas.openxmlformats.org/drawingml/2006/main" xmlns:r="http://schemas.openxmlformats.org/officeDocument/2006/relationships" xmlns:p="http://schemas.openxmlformats.org/presentationml/2006/main">
   <p:cSld>
     <p:spTree>
@@ -5125,49 +9012,6 @@
             </a:r>
             <a:r>
               <a:rPr lang="en-US" sz="1400" dirty="0"/>
-              <a:t>, module specifiers like </a:t>
-            </a:r>
-            <a:r>
-              <a:rPr lang="en-US" sz="1400" dirty="0" err="1">
-                <a:latin typeface="Aptos Mono" panose="020B0009020202020204" pitchFamily="49" charset="0"/>
-              </a:rPr>
-              <a:t>npm</a:t>
-            </a:r>
-            <a:r>
-              <a:rPr lang="en-US" sz="1400" dirty="0">
-                <a:latin typeface="Aptos Mono" panose="020B0009020202020204" pitchFamily="49" charset="0"/>
-              </a:rPr>
-              <a:t>:</a:t>
-            </a:r>
-            <a:r>
-              <a:rPr lang="en-US" sz="1400" dirty="0"/>
-              <a:t> and </a:t>
-            </a:r>
-            <a:r>
-              <a:rPr lang="en-US" sz="1400" dirty="0">
-                <a:latin typeface="Aptos Mono" panose="020B0009020202020204" pitchFamily="49" charset="0"/>
-              </a:rPr>
-              <a:t>node:</a:t>
-            </a:r>
-            <a:r>
-              <a:rPr lang="en-US" sz="1400" dirty="0"/>
-              <a:t> to import NPM or Node.JS modules.</a:t>
-            </a:r>
-          </a:p>
-          <a:p>
-            <a:pPr lvl="2"/>
-            <a:r>
-              <a:rPr lang="en-US" sz="1600" dirty="0"/>
-              <a:t>Node.js also added </a:t>
-            </a:r>
-            <a:r>
-              <a:rPr lang="en-US" sz="1600" dirty="0">
-                <a:latin typeface="Aptos Mono" panose="020F0502020204030204" pitchFamily="49" charset="0"/>
-              </a:rPr>
-              <a:t>--experimental-network-imports</a:t>
-            </a:r>
-            <a:r>
-              <a:rPr lang="en-US" sz="1600" dirty="0"/>
               <a:t>.</a:t>
             </a:r>
           </a:p>
@@ -5196,6 +9040,7 @@
               <a:rPr lang="en-US" sz="2000" dirty="0"/>
               <a:t>4. Runs TypeScript out of the box.</a:t>
             </a:r>
+            <a:endParaRPr lang="en-US" sz="1400" dirty="0"/>
           </a:p>
           <a:p>
             <a:pPr marL="457200" lvl="1" indent="0">
@@ -5203,7 +9048,7 @@
             </a:pPr>
             <a:r>
               <a:rPr lang="en-US" sz="2000" dirty="0"/>
-              <a:t>6. Restricts file system and network access by default in order to run sandboxed code.</a:t>
+              <a:t>6. Restricts file system and network access by default to run sandboxed code.</a:t>
             </a:r>
           </a:p>
           <a:p>
@@ -5220,12 +9065,49 @@
               </a:rPr>
               <a:t>https://en.wikipedia.org/wiki/Deno_(software)</a:t>
             </a:r>
-            <a:endParaRPr lang="de-DE" dirty="0"/>
+            <a:endParaRPr lang="en-US" sz="1600" dirty="0"/>
+          </a:p>
+          <a:p>
+            <a:pPr marL="457200" lvl="1" indent="0">
+              <a:buNone/>
+            </a:pPr>
+            <a:r>
+              <a:rPr lang="en-US" sz="1600" dirty="0"/>
+              <a:t>10 Things I Regret About Node.js - Ryan Dahl - </a:t>
+            </a:r>
+            <a:r>
+              <a:rPr lang="en-US" sz="1600" dirty="0" err="1"/>
+              <a:t>JSConf</a:t>
+            </a:r>
+            <a:r>
+              <a:rPr lang="en-US" sz="1600" dirty="0"/>
+              <a:t> EU</a:t>
+            </a:r>
+          </a:p>
+          <a:p>
+            <a:pPr marL="457200" lvl="1" indent="0">
+              <a:buNone/>
+            </a:pPr>
+            <a:r>
+              <a:rPr lang="en-US" sz="1600" dirty="0"/>
+              <a:t>	 </a:t>
+            </a:r>
+            <a:r>
+              <a:rPr lang="de-DE" sz="1600" dirty="0">
+                <a:hlinkClick r:id="rId3"/>
+              </a:rPr>
+              <a:t>https://www.youtube.com/watch?v=M3BM9TB-8yA</a:t>
+            </a:r>
+            <a:r>
+              <a:rPr lang="en-US" sz="1600" dirty="0"/>
+              <a:t> </a:t>
+            </a:r>
+            <a:endParaRPr lang="de-DE" sz="1600" dirty="0"/>
           </a:p>
           <a:p>
             <a:r>
               <a:rPr lang="de-DE" dirty="0">
-                <a:hlinkClick r:id="rId3"/>
+                <a:hlinkClick r:id="rId4"/>
               </a:rPr>
               <a:t>https://deno.com/</a:t>
             </a:r>
@@ -5248,7 +9130,7 @@
           <p:nvPr/>
         </p:nvPicPr>
         <p:blipFill>
-          <a:blip r:embed="rId4">
+          <a:blip r:embed="rId5">
             <a:extLst>
               <a:ext uri="{28A0092B-C50C-407E-A947-70E740481C1C}">
                 <a14:useLocalDpi xmlns:a14="http://schemas.microsoft.com/office/drawing/2010/main" val="0"/>
@@ -5284,7 +9166,7 @@
           <p:nvPr/>
         </p:nvPicPr>
         <p:blipFill>
-          <a:blip r:embed="rId5">
+          <a:blip r:embed="rId6">
             <a:extLst>
               <a:ext uri="{28A0092B-C50C-407E-A947-70E740481C1C}">
                 <a14:useLocalDpi xmlns:a14="http://schemas.microsoft.com/office/drawing/2010/main" val="0"/>
@@ -5318,7 +9200,7 @@
 </p:sld>
 </file>
 
-<file path=ppt/slides/slide4.xml><?xml version="1.0" encoding="utf-8"?>
+<file path=ppt/slides/slide7.xml><?xml version="1.0" encoding="utf-8"?>
 <p:sld xmlns:a="http://schemas.openxmlformats.org/drawingml/2006/main" xmlns:r="http://schemas.openxmlformats.org/officeDocument/2006/relationships" xmlns:p="http://schemas.openxmlformats.org/presentationml/2006/main">
   <p:cSld>
     <p:spTree>
@@ -5357,28 +9239,8 @@
           <a:lstStyle/>
           <a:p>
             <a:r>
-              <a:rPr lang="de-DE" dirty="0" err="1"/>
-              <a:t>Should</a:t>
-            </a:r>
-            <a:r>
-              <a:rPr lang="de-DE" dirty="0"/>
-              <a:t> I </a:t>
-            </a:r>
-            <a:r>
-              <a:rPr lang="de-DE" dirty="0" err="1"/>
-              <a:t>use</a:t>
-            </a:r>
-            <a:r>
-              <a:rPr lang="de-DE" dirty="0"/>
-              <a:t> </a:t>
-            </a:r>
-            <a:r>
-              <a:rPr lang="de-DE" dirty="0" err="1"/>
-              <a:t>Deno</a:t>
-            </a:r>
-            <a:r>
-              <a:rPr lang="de-DE" dirty="0"/>
-              <a:t>?</a:t>
+              <a:rPr lang="en-US" dirty="0"/>
+              <a:t>When to use Deno</a:t>
             </a:r>
           </a:p>
         </p:txBody>
@@ -5520,6 +9382,66 @@
             <a:endParaRPr lang="de-DE" dirty="0"/>
           </a:p>
           <a:p>
+            <a:pPr lvl="1"/>
+            <a:r>
+              <a:rPr lang="de-DE" dirty="0"/>
+              <a:t>Maybe Node.js </a:t>
+            </a:r>
+            <a:r>
+              <a:rPr lang="de-DE" dirty="0" err="1"/>
+              <a:t>catches</a:t>
+            </a:r>
+            <a:r>
+              <a:rPr lang="de-DE" dirty="0"/>
+              <a:t> </a:t>
+            </a:r>
+            <a:r>
+              <a:rPr lang="de-DE" dirty="0" err="1"/>
+              <a:t>up</a:t>
+            </a:r>
+            <a:r>
+              <a:rPr lang="de-DE" dirty="0"/>
+              <a:t> and </a:t>
+            </a:r>
+            <a:r>
+              <a:rPr lang="de-DE" dirty="0" err="1"/>
+              <a:t>supports</a:t>
+            </a:r>
+            <a:r>
+              <a:rPr lang="de-DE" dirty="0"/>
+              <a:t> </a:t>
+            </a:r>
+            <a:r>
+              <a:rPr lang="de-DE" dirty="0" err="1"/>
+              <a:t>most</a:t>
+            </a:r>
+            <a:r>
+              <a:rPr lang="de-DE" dirty="0"/>
+              <a:t> </a:t>
+            </a:r>
+            <a:r>
+              <a:rPr lang="de-DE" dirty="0" err="1"/>
+              <a:t>features</a:t>
+            </a:r>
+            <a:r>
+              <a:rPr lang="de-DE" dirty="0"/>
+              <a:t> </a:t>
+            </a:r>
+            <a:r>
+              <a:rPr lang="de-DE" dirty="0" err="1"/>
+              <a:t>of</a:t>
+            </a:r>
+            <a:r>
+              <a:rPr lang="de-DE" dirty="0"/>
+              <a:t> </a:t>
+            </a:r>
+            <a:r>
+              <a:rPr lang="de-DE" dirty="0" err="1"/>
+              <a:t>Deno</a:t>
+            </a:r>
+            <a:endParaRPr lang="de-DE" dirty="0"/>
+          </a:p>
+          <a:p>
             <a:endParaRPr lang="de-DE" dirty="0"/>
           </a:p>
           <a:p>
@@ -5585,6 +9507,50 @@
             <a:r>
               <a:rPr lang="de-DE" dirty="0" err="1"/>
               <a:t>directly</a:t>
+            </a:r>
+            <a:endParaRPr lang="de-DE" dirty="0"/>
+          </a:p>
+          <a:p>
+            <a:pPr lvl="1"/>
+            <a:r>
+              <a:rPr lang="de-DE" dirty="0"/>
+              <a:t>#! </a:t>
+            </a:r>
+            <a:r>
+              <a:rPr lang="de-DE" dirty="0" err="1"/>
+              <a:t>deno</a:t>
+            </a:r>
+            <a:r>
+              <a:rPr lang="de-DE" dirty="0"/>
+              <a:t> </a:t>
+            </a:r>
+            <a:r>
+              <a:rPr lang="de-DE" dirty="0" err="1"/>
+              <a:t>run</a:t>
+            </a:r>
+            <a:r>
+              <a:rPr lang="de-DE" dirty="0"/>
+              <a:t> and </a:t>
+            </a:r>
+            <a:r>
+              <a:rPr lang="de-DE" dirty="0" err="1"/>
+              <a:t>mark</a:t>
+            </a:r>
+            <a:r>
+              <a:rPr lang="de-DE" dirty="0"/>
+              <a:t> </a:t>
+            </a:r>
+            <a:r>
+              <a:rPr lang="de-DE" dirty="0" err="1"/>
+              <a:t>as</a:t>
+            </a:r>
+            <a:r>
+              <a:rPr lang="de-DE" dirty="0"/>
+              <a:t> </a:t>
+            </a:r>
+            <a:r>
+              <a:rPr lang="de-DE" dirty="0" err="1"/>
+              <a:t>executable</a:t>
             </a:r>
             <a:endParaRPr lang="de-DE" dirty="0"/>
           </a:p>
@@ -5603,7 +9569,130 @@
 </p:sld>
 </file>
 
-<file path=ppt/slides/slide5.xml><?xml version="1.0" encoding="utf-8"?>
+<file path=ppt/slides/slide8.xml><?xml version="1.0" encoding="utf-8"?>
+<p:sld xmlns:a="http://schemas.openxmlformats.org/drawingml/2006/main" xmlns:r="http://schemas.openxmlformats.org/officeDocument/2006/relationships" xmlns:p="http://schemas.openxmlformats.org/presentationml/2006/main">
+  <p:cSld>
+    <p:spTree>
+      <p:nvGrpSpPr>
+        <p:cNvPr id="1" name=""/>
+        <p:cNvGrpSpPr/>
+        <p:nvPr/>
+      </p:nvGrpSpPr>
+      <p:grpSpPr>
+        <a:xfrm>
+          <a:off x="0" y="0"/>
+          <a:ext cx="0" cy="0"/>
+          <a:chOff x="0" y="0"/>
+          <a:chExt cx="0" cy="0"/>
+        </a:xfrm>
+      </p:grpSpPr>
+      <p:sp>
+        <p:nvSpPr>
+          <p:cNvPr id="2" name="Titel 1">
+            <a:extLst>
+              <a:ext uri="{FF2B5EF4-FFF2-40B4-BE49-F238E27FC236}">
+                <a16:creationId xmlns:a16="http://schemas.microsoft.com/office/drawing/2014/main" id="{A53E6DD1-AA91-7830-68E9-291BE608ED9C}"/>
+              </a:ext>
+            </a:extLst>
+          </p:cNvPr>
+          <p:cNvSpPr>
+            <a:spLocks noGrp="1"/>
+          </p:cNvSpPr>
+          <p:nvPr>
+            <p:ph type="title"/>
+          </p:nvPr>
+        </p:nvSpPr>
+        <p:spPr/>
+        <p:txBody>
+          <a:bodyPr/>
+          <a:lstStyle/>
+          <a:p>
+            <a:r>
+              <a:rPr lang="en-US" dirty="0"/>
+              <a:t>Important properties for scripts</a:t>
+            </a:r>
+          </a:p>
+        </p:txBody>
+      </p:sp>
+      <p:sp>
+        <p:nvSpPr>
+          <p:cNvPr id="3" name="Inhaltsplatzhalter 2">
+            <a:extLst>
+              <a:ext uri="{FF2B5EF4-FFF2-40B4-BE49-F238E27FC236}">
+                <a16:creationId xmlns:a16="http://schemas.microsoft.com/office/drawing/2014/main" id="{1621F3C7-28BF-8D2C-0806-165CC37F6779}"/>
+              </a:ext>
+            </a:extLst>
+          </p:cNvPr>
+          <p:cNvSpPr>
+            <a:spLocks noGrp="1"/>
+          </p:cNvSpPr>
+          <p:nvPr>
+            <p:ph idx="1"/>
+          </p:nvPr>
+        </p:nvSpPr>
+        <p:spPr/>
+        <p:txBody>
+          <a:bodyPr/>
+          <a:lstStyle/>
+          <a:p>
+            <a:r>
+              <a:rPr lang="de-DE" dirty="0" err="1"/>
+              <a:t>No</a:t>
+            </a:r>
+            <a:r>
+              <a:rPr lang="de-DE" dirty="0"/>
+              <a:t> </a:t>
+            </a:r>
+            <a:r>
+              <a:rPr lang="de-DE" dirty="0" err="1"/>
+              <a:t>build</a:t>
+            </a:r>
+            <a:r>
+              <a:rPr lang="de-DE" dirty="0"/>
+              <a:t>/</a:t>
+            </a:r>
+            <a:r>
+              <a:rPr lang="de-DE" dirty="0" err="1"/>
+              <a:t>compile</a:t>
+            </a:r>
+            <a:r>
+              <a:rPr lang="de-DE" dirty="0"/>
+              <a:t> </a:t>
+            </a:r>
+            <a:r>
+              <a:rPr lang="de-DE" dirty="0" err="1"/>
+              <a:t>steps</a:t>
+            </a:r>
+            <a:endParaRPr lang="en-US" dirty="0"/>
+          </a:p>
+          <a:p>
+            <a:r>
+              <a:rPr lang="en-US" dirty="0"/>
+              <a:t>Self contained</a:t>
+            </a:r>
+          </a:p>
+          <a:p>
+            <a:r>
+              <a:rPr lang="en-US" dirty="0"/>
+              <a:t>Execute like an executable file</a:t>
+            </a:r>
+          </a:p>
+        </p:txBody>
+      </p:sp>
+    </p:spTree>
+    <p:extLst>
+      <p:ext uri="{BB962C8B-B14F-4D97-AF65-F5344CB8AC3E}">
+        <p14:creationId xmlns:p14="http://schemas.microsoft.com/office/powerpoint/2010/main" val="3366192791"/>
+      </p:ext>
+    </p:extLst>
+  </p:cSld>
+  <p:clrMapOvr>
+    <a:masterClrMapping/>
+  </p:clrMapOvr>
+</p:sld>
+</file>
+
+<file path=ppt/slides/slide9.xml><?xml version="1.0" encoding="utf-8"?>
 <p:sld xmlns:a="http://schemas.openxmlformats.org/drawingml/2006/main" xmlns:r="http://schemas.openxmlformats.org/officeDocument/2006/relationships" xmlns:p="http://schemas.openxmlformats.org/presentationml/2006/main">
   <p:cSld>
     <p:spTree>
@@ -5643,7 +9732,7 @@
           <a:p>
             <a:r>
               <a:rPr lang="de-DE" dirty="0" err="1"/>
-              <a:t>How</a:t>
+              <a:t>Comparison</a:t>
             </a:r>
             <a:r>
               <a:rPr lang="de-DE" dirty="0"/>
@@ -5651,25 +9740,20 @@
             </a:r>
             <a:r>
               <a:rPr lang="de-DE" dirty="0" err="1"/>
-              <a:t>to</a:t>
+              <a:t>of</a:t>
             </a:r>
             <a:r>
               <a:rPr lang="de-DE" dirty="0"/>
-              <a:t> </a:t>
-            </a:r>
-            <a:r>
-              <a:rPr lang="de-DE" dirty="0" err="1"/>
-              <a:t>write</a:t>
-            </a:r>
-            <a:r>
-              <a:rPr lang="de-DE" dirty="0"/>
-              <a:t> </a:t>
-            </a:r>
-            <a:r>
-              <a:rPr lang="de-DE" dirty="0" err="1"/>
-              <a:t>scripts</a:t>
-            </a:r>
-            <a:endParaRPr lang="de-DE" dirty="0"/>
+              <a:t> l</a:t>
+            </a:r>
+            <a:r>
+              <a:rPr lang="en-US" dirty="0" err="1"/>
+              <a:t>anguages</a:t>
+            </a:r>
+            <a:r>
+              <a:rPr lang="en-US" dirty="0"/>
+              <a:t> for scripts</a:t>
+            </a:r>
           </a:p>
         </p:txBody>
       </p:sp>
@@ -5689,14 +9773,14 @@
             <p:ph idx="1"/>
             <p:extLst>
               <p:ext uri="{D42A27DB-BD31-4B8C-83A1-F6EECF244321}">
-                <p14:modId xmlns:p14="http://schemas.microsoft.com/office/powerpoint/2010/main" val="468064210"/>
+                <p14:modId xmlns:p14="http://schemas.microsoft.com/office/powerpoint/2010/main" val="3328608932"/>
               </p:ext>
             </p:extLst>
           </p:nvPr>
         </p:nvGraphicFramePr>
         <p:xfrm>
           <a:off x="416210" y="2040036"/>
-          <a:ext cx="11351172" cy="3509426"/>
+          <a:ext cx="11351172" cy="3721098"/>
         </p:xfrm>
         <a:graphic>
           <a:graphicData uri="http://schemas.openxmlformats.org/drawingml/2006/table">
@@ -6281,9 +10365,30 @@
                     <a:bodyPr/>
                     <a:lstStyle/>
                     <a:p>
+                      <a:pPr marL="0" marR="0" lvl="0" indent="0" algn="l" defTabSz="914400" rtl="0" eaLnBrk="1" fontAlgn="auto" latinLnBrk="0" hangingPunct="1">
+                        <a:lnSpc>
+                          <a:spcPct val="100000"/>
+                        </a:lnSpc>
+                        <a:spcBef>
+                          <a:spcPts val="0"/>
+                        </a:spcBef>
+                        <a:spcAft>
+                          <a:spcPts val="0"/>
+                        </a:spcAft>
+                        <a:buClrTx/>
+                        <a:buSzTx/>
+                        <a:buFontTx/>
+                        <a:buNone/>
+                        <a:tabLst/>
+                        <a:defRPr/>
+                      </a:pPr>
+                      <a:r>
+                        <a:rPr lang="de-DE" dirty="0"/>
+                        <a:t>Library </a:t>
+                      </a:r>
                       <a:r>
                         <a:rPr lang="de-DE" dirty="0" err="1"/>
-                        <a:t>Build</a:t>
+                        <a:t>managment</a:t>
                       </a:r>
                       <a:endParaRPr lang="de-DE" dirty="0"/>
                     </a:p>
@@ -6323,10 +10428,6 @@
                     <a:bodyPr/>
                     <a:lstStyle/>
                     <a:p>
-                      <a:r>
-                        <a:rPr lang="de-DE" dirty="0" err="1"/>
-                        <a:t>Bashly</a:t>
-                      </a:r>
                       <a:endParaRPr lang="de-DE" dirty="0"/>
                     </a:p>
                   </a:txBody>
@@ -6374,10 +10475,6 @@
                     <a:bodyPr/>
                     <a:lstStyle/>
                     <a:p>
-                      <a:r>
-                        <a:rPr lang="de-DE" dirty="0" err="1"/>
-                        <a:t>Gradle</a:t>
-                      </a:r>
                       <a:endParaRPr lang="de-DE" dirty="0"/>
                     </a:p>
                   </a:txBody>
@@ -7644,12 +11741,148 @@
           </a:prstGeom>
         </p:spPr>
       </p:pic>
+      <p:sp>
+        <p:nvSpPr>
+          <p:cNvPr id="3" name="Textfeld 2">
+            <a:extLst>
+              <a:ext uri="{FF2B5EF4-FFF2-40B4-BE49-F238E27FC236}">
+                <a16:creationId xmlns:a16="http://schemas.microsoft.com/office/drawing/2014/main" id="{32735387-B225-56A5-0B78-96FAED69F5E5}"/>
+              </a:ext>
+            </a:extLst>
+          </p:cNvPr>
+          <p:cNvSpPr txBox="1"/>
+          <p:nvPr/>
+        </p:nvSpPr>
+        <p:spPr>
+          <a:xfrm>
+            <a:off x="698740" y="5846544"/>
+            <a:ext cx="10308566" cy="646331"/>
+          </a:xfrm>
+          <a:prstGeom prst="rect">
+            <a:avLst/>
+          </a:prstGeom>
+          <a:noFill/>
+        </p:spPr>
+        <p:txBody>
+          <a:bodyPr wrap="square" rtlCol="0">
+            <a:spAutoFit/>
+          </a:bodyPr>
+          <a:lstStyle/>
+          <a:p>
+            <a:r>
+              <a:rPr lang="de-DE" dirty="0"/>
+              <a:t>* Node.js </a:t>
+            </a:r>
+            <a:r>
+              <a:rPr lang="de-DE" dirty="0" err="1"/>
+              <a:t>caught</a:t>
+            </a:r>
+            <a:r>
+              <a:rPr lang="de-DE" dirty="0"/>
+              <a:t> </a:t>
+            </a:r>
+            <a:r>
+              <a:rPr lang="de-DE" dirty="0" err="1"/>
+              <a:t>up</a:t>
+            </a:r>
+            <a:r>
+              <a:rPr lang="de-DE" dirty="0"/>
+              <a:t> and </a:t>
+            </a:r>
+            <a:r>
+              <a:rPr lang="de-DE" dirty="0" err="1"/>
+              <a:t>since</a:t>
+            </a:r>
+            <a:r>
+              <a:rPr lang="de-DE" dirty="0"/>
+              <a:t> </a:t>
+            </a:r>
+            <a:r>
+              <a:rPr lang="de-DE" dirty="0" err="1"/>
+              <a:t>version</a:t>
+            </a:r>
+            <a:r>
+              <a:rPr lang="de-DE" dirty="0"/>
+              <a:t> 23 --experimental-strip-</a:t>
+            </a:r>
+            <a:r>
+              <a:rPr lang="de-DE" dirty="0" err="1"/>
+              <a:t>types</a:t>
+            </a:r>
+            <a:r>
+              <a:rPr lang="de-DE" dirty="0"/>
+              <a:t> </a:t>
+            </a:r>
+            <a:r>
+              <a:rPr lang="de-DE" dirty="0" err="1"/>
+              <a:t>is</a:t>
+            </a:r>
+            <a:r>
+              <a:rPr lang="de-DE" dirty="0"/>
+              <a:t> </a:t>
+            </a:r>
+            <a:r>
+              <a:rPr lang="de-DE" dirty="0" err="1"/>
+              <a:t>default</a:t>
+            </a:r>
+            <a:r>
+              <a:rPr lang="de-DE" dirty="0"/>
+              <a:t> and Node.js </a:t>
+            </a:r>
+            <a:r>
+              <a:rPr lang="de-DE" dirty="0" err="1"/>
+              <a:t>can</a:t>
+            </a:r>
+            <a:r>
+              <a:rPr lang="de-DE" dirty="0"/>
+              <a:t> </a:t>
+            </a:r>
+            <a:r>
+              <a:rPr lang="de-DE" dirty="0" err="1"/>
+              <a:t>run</a:t>
+            </a:r>
+            <a:r>
+              <a:rPr lang="de-DE" dirty="0"/>
+              <a:t> </a:t>
+            </a:r>
+            <a:r>
+              <a:rPr lang="de-DE" dirty="0" err="1"/>
+              <a:t>TypeScript</a:t>
+            </a:r>
+            <a:r>
+              <a:rPr lang="de-DE" dirty="0"/>
+              <a:t> </a:t>
+            </a:r>
+            <a:r>
+              <a:rPr lang="de-DE" dirty="0" err="1"/>
+              <a:t>directly</a:t>
+            </a:r>
+            <a:r>
+              <a:rPr lang="de-DE" dirty="0"/>
+              <a:t> </a:t>
+            </a:r>
+            <a:r>
+              <a:rPr lang="de-DE" dirty="0" err="1"/>
+              <a:t>as</a:t>
+            </a:r>
+            <a:r>
+              <a:rPr lang="de-DE" dirty="0"/>
+              <a:t> </a:t>
+            </a:r>
+            <a:r>
+              <a:rPr lang="de-DE" dirty="0" err="1"/>
+              <a:t>well</a:t>
+            </a:r>
+            <a:endParaRPr lang="de-DE" dirty="0"/>
+          </a:p>
+        </p:txBody>
+      </p:sp>
       <p:pic>
         <p:nvPicPr>
-          <p:cNvPr id="16" name="Grafik 15" descr="Ein Bild, das Clipart, Grafiken, Entwurf, Design enthält.&#10;&#10;Automatisch generierte Beschreibung">
+          <p:cNvPr id="5" name="Grafik 4">
             <a:extLst>
               <a:ext uri="{FF2B5EF4-FFF2-40B4-BE49-F238E27FC236}">
-                <a16:creationId xmlns:a16="http://schemas.microsoft.com/office/drawing/2014/main" id="{6A795B92-2798-DA5F-FE11-210EAE42CC3D}"/>
+                <a16:creationId xmlns:a16="http://schemas.microsoft.com/office/drawing/2014/main" id="{F775A801-96D8-2217-1353-B4EB4B8CF753}"/>
               </a:ext>
             </a:extLst>
           </p:cNvPr>
@@ -7661,8 +11894,8 @@
         <p:blipFill>
           <a:blip r:embed="rId7">
             <a:extLst>
-              <a:ext uri="{28A0092B-C50C-407E-A947-70E740481C1C}">
-                <a14:useLocalDpi xmlns:a14="http://schemas.microsoft.com/office/drawing/2010/main" val="0"/>
+              <a:ext uri="{96DAC541-7B7A-43D3-8B79-37D633B846F1}">
+                <asvg:svgBlip xmlns:asvg="http://schemas.microsoft.com/office/drawing/2016/SVG/main" r:embed="rId8"/>
               </a:ext>
             </a:extLst>
           </a:blip>
@@ -7672,8 +11905,8 @@
         </p:blipFill>
         <p:spPr>
           <a:xfrm>
-            <a:off x="10062363" y="1027906"/>
-            <a:ext cx="1325563" cy="1325563"/>
+            <a:off x="10120412" y="1144029"/>
+            <a:ext cx="1093317" cy="1093317"/>
           </a:xfrm>
           <a:prstGeom prst="rect">
             <a:avLst/>
@@ -7684,356 +11917,6 @@
     <p:extLst>
       <p:ext uri="{BB962C8B-B14F-4D97-AF65-F5344CB8AC3E}">
         <p14:creationId xmlns:p14="http://schemas.microsoft.com/office/powerpoint/2010/main" val="823948957"/>
-      </p:ext>
-    </p:extLst>
-  </p:cSld>
-  <p:clrMapOvr>
-    <a:masterClrMapping/>
-  </p:clrMapOvr>
-</p:sld>
-</file>
-
-<file path=ppt/slides/slide6.xml><?xml version="1.0" encoding="utf-8"?>
-<p:sld xmlns:a="http://schemas.openxmlformats.org/drawingml/2006/main" xmlns:r="http://schemas.openxmlformats.org/officeDocument/2006/relationships" xmlns:p="http://schemas.openxmlformats.org/presentationml/2006/main">
-  <p:cSld>
-    <p:spTree>
-      <p:nvGrpSpPr>
-        <p:cNvPr id="1" name=""/>
-        <p:cNvGrpSpPr/>
-        <p:nvPr/>
-      </p:nvGrpSpPr>
-      <p:grpSpPr>
-        <a:xfrm>
-          <a:off x="0" y="0"/>
-          <a:ext cx="0" cy="0"/>
-          <a:chOff x="0" y="0"/>
-          <a:chExt cx="0" cy="0"/>
-        </a:xfrm>
-      </p:grpSpPr>
-      <p:sp>
-        <p:nvSpPr>
-          <p:cNvPr id="2" name="Titel 1">
-            <a:extLst>
-              <a:ext uri="{FF2B5EF4-FFF2-40B4-BE49-F238E27FC236}">
-                <a16:creationId xmlns:a16="http://schemas.microsoft.com/office/drawing/2014/main" id="{7C7C06E6-DCE0-9641-CB3E-12F9B4A0EC97}"/>
-              </a:ext>
-            </a:extLst>
-          </p:cNvPr>
-          <p:cNvSpPr>
-            <a:spLocks noGrp="1"/>
-          </p:cNvSpPr>
-          <p:nvPr>
-            <p:ph type="title"/>
-          </p:nvPr>
-        </p:nvSpPr>
-        <p:spPr/>
-        <p:txBody>
-          <a:bodyPr/>
-          <a:lstStyle/>
-          <a:p>
-            <a:r>
-              <a:rPr lang="de-DE" dirty="0"/>
-              <a:t>Use </a:t>
-            </a:r>
-            <a:r>
-              <a:rPr lang="de-DE" dirty="0" err="1"/>
-              <a:t>Deno</a:t>
-            </a:r>
-            <a:r>
-              <a:rPr lang="de-DE" dirty="0"/>
-              <a:t> </a:t>
-            </a:r>
-            <a:r>
-              <a:rPr lang="de-DE" dirty="0" err="1"/>
-              <a:t>for</a:t>
-            </a:r>
-            <a:r>
-              <a:rPr lang="de-DE" dirty="0"/>
-              <a:t> Scripts in </a:t>
-            </a:r>
-            <a:r>
-              <a:rPr lang="de-DE" dirty="0" err="1"/>
-              <a:t>existing</a:t>
-            </a:r>
-            <a:r>
-              <a:rPr lang="de-DE" dirty="0"/>
-              <a:t> </a:t>
-            </a:r>
-            <a:r>
-              <a:rPr lang="de-DE" dirty="0" err="1"/>
-              <a:t>projects</a:t>
-            </a:r>
-            <a:endParaRPr lang="de-DE" dirty="0"/>
-          </a:p>
-        </p:txBody>
-      </p:sp>
-      <p:sp>
-        <p:nvSpPr>
-          <p:cNvPr id="3" name="Inhaltsplatzhalter 2">
-            <a:extLst>
-              <a:ext uri="{FF2B5EF4-FFF2-40B4-BE49-F238E27FC236}">
-                <a16:creationId xmlns:a16="http://schemas.microsoft.com/office/drawing/2014/main" id="{C855EE0D-EA6B-9F77-A8E6-5A31D580C148}"/>
-              </a:ext>
-            </a:extLst>
-          </p:cNvPr>
-          <p:cNvSpPr>
-            <a:spLocks noGrp="1"/>
-          </p:cNvSpPr>
-          <p:nvPr>
-            <p:ph idx="1"/>
-          </p:nvPr>
-        </p:nvSpPr>
-        <p:spPr/>
-        <p:txBody>
-          <a:bodyPr/>
-          <a:lstStyle/>
-          <a:p>
-            <a:r>
-              <a:rPr lang="de-DE" dirty="0" err="1"/>
-              <a:t>Better</a:t>
-            </a:r>
-            <a:r>
-              <a:rPr lang="de-DE" dirty="0"/>
-              <a:t> maintainable </a:t>
-            </a:r>
-            <a:r>
-              <a:rPr lang="de-DE" dirty="0" err="1"/>
-              <a:t>than</a:t>
-            </a:r>
-            <a:r>
-              <a:rPr lang="de-DE" dirty="0"/>
-              <a:t> Bash, Groovy </a:t>
-            </a:r>
-            <a:r>
-              <a:rPr lang="de-DE" dirty="0" err="1"/>
-              <a:t>or</a:t>
-            </a:r>
-            <a:r>
-              <a:rPr lang="de-DE" dirty="0"/>
-              <a:t> JavaScript but </a:t>
-            </a:r>
-            <a:r>
-              <a:rPr lang="de-DE" dirty="0" err="1"/>
-              <a:t>as</a:t>
-            </a:r>
-            <a:r>
-              <a:rPr lang="de-DE" dirty="0"/>
-              <a:t> simple</a:t>
-            </a:r>
-          </a:p>
-          <a:p>
-            <a:pPr lvl="1"/>
-            <a:r>
-              <a:rPr lang="de-DE" dirty="0" err="1"/>
-              <a:t>No</a:t>
-            </a:r>
-            <a:r>
-              <a:rPr lang="de-DE" dirty="0"/>
-              <a:t> </a:t>
-            </a:r>
-            <a:r>
-              <a:rPr lang="de-DE" dirty="0" err="1"/>
-              <a:t>config</a:t>
-            </a:r>
-            <a:r>
-              <a:rPr lang="de-DE" dirty="0"/>
-              <a:t>, </a:t>
-            </a:r>
-            <a:r>
-              <a:rPr lang="de-DE" dirty="0" err="1"/>
-              <a:t>no</a:t>
-            </a:r>
-            <a:r>
-              <a:rPr lang="de-DE" dirty="0"/>
-              <a:t> </a:t>
-            </a:r>
-            <a:r>
-              <a:rPr lang="de-DE" dirty="0" err="1"/>
-              <a:t>package.json</a:t>
-            </a:r>
-            <a:r>
-              <a:rPr lang="de-DE" dirty="0"/>
-              <a:t>, </a:t>
-            </a:r>
-            <a:r>
-              <a:rPr lang="de-DE" dirty="0" err="1"/>
-              <a:t>no</a:t>
-            </a:r>
-            <a:r>
-              <a:rPr lang="de-DE" dirty="0"/>
-              <a:t> </a:t>
-            </a:r>
-            <a:r>
-              <a:rPr lang="de-DE" dirty="0" err="1"/>
-              <a:t>build</a:t>
-            </a:r>
-            <a:r>
-              <a:rPr lang="de-DE" dirty="0"/>
-              <a:t> </a:t>
-            </a:r>
-            <a:r>
-              <a:rPr lang="de-DE" dirty="0" err="1"/>
-              <a:t>step</a:t>
-            </a:r>
-            <a:r>
-              <a:rPr lang="de-DE" dirty="0"/>
-              <a:t> </a:t>
-            </a:r>
-            <a:r>
-              <a:rPr lang="de-DE" dirty="0" err="1"/>
-              <a:t>required</a:t>
-            </a:r>
-            <a:endParaRPr lang="de-DE" dirty="0"/>
-          </a:p>
-          <a:p>
-            <a:endParaRPr lang="de-DE" dirty="0"/>
-          </a:p>
-          <a:p>
-            <a:r>
-              <a:rPr lang="de-DE" dirty="0" err="1"/>
-              <a:t>TypeScript</a:t>
-            </a:r>
-            <a:r>
-              <a:rPr lang="de-DE" dirty="0"/>
-              <a:t> </a:t>
-            </a:r>
-            <a:r>
-              <a:rPr lang="de-DE" dirty="0" err="1"/>
-              <a:t>is</a:t>
-            </a:r>
-            <a:r>
-              <a:rPr lang="de-DE" dirty="0"/>
-              <a:t> </a:t>
-            </a:r>
-            <a:r>
-              <a:rPr lang="de-DE" dirty="0" err="1"/>
-              <a:t>commonly</a:t>
-            </a:r>
-            <a:r>
-              <a:rPr lang="de-DE" dirty="0"/>
-              <a:t> </a:t>
-            </a:r>
-            <a:r>
-              <a:rPr lang="de-DE" dirty="0" err="1"/>
-              <a:t>used</a:t>
-            </a:r>
-            <a:r>
-              <a:rPr lang="de-DE" dirty="0"/>
-              <a:t> </a:t>
-            </a:r>
-            <a:r>
-              <a:rPr lang="de-DE" dirty="0" err="1"/>
-              <a:t>by</a:t>
-            </a:r>
-            <a:r>
-              <a:rPr lang="de-DE" dirty="0"/>
-              <a:t> </a:t>
-            </a:r>
-            <a:r>
-              <a:rPr lang="de-DE" dirty="0" err="1"/>
-              <a:t>developers</a:t>
-            </a:r>
-            <a:endParaRPr lang="de-DE" dirty="0"/>
-          </a:p>
-          <a:p>
-            <a:endParaRPr lang="de-DE" dirty="0"/>
-          </a:p>
-          <a:p>
-            <a:r>
-              <a:rPr lang="de-DE" dirty="0" err="1"/>
-              <a:t>Deno</a:t>
-            </a:r>
-            <a:r>
-              <a:rPr lang="de-DE" dirty="0"/>
-              <a:t> </a:t>
-            </a:r>
-            <a:r>
-              <a:rPr lang="de-DE" dirty="0" err="1"/>
-              <a:t>can</a:t>
-            </a:r>
-            <a:r>
-              <a:rPr lang="de-DE" dirty="0"/>
-              <a:t> </a:t>
-            </a:r>
-            <a:r>
-              <a:rPr lang="de-DE" dirty="0" err="1"/>
-              <a:t>be</a:t>
-            </a:r>
-            <a:r>
-              <a:rPr lang="de-DE" dirty="0"/>
-              <a:t> </a:t>
-            </a:r>
-            <a:r>
-              <a:rPr lang="de-DE" dirty="0" err="1"/>
-              <a:t>used</a:t>
-            </a:r>
-            <a:r>
-              <a:rPr lang="de-DE" dirty="0"/>
-              <a:t> via </a:t>
-            </a:r>
-            <a:r>
-              <a:rPr lang="de-DE" dirty="0" err="1"/>
-              <a:t>npm</a:t>
-            </a:r>
-            <a:r>
-              <a:rPr lang="de-DE" dirty="0"/>
-              <a:t>:</a:t>
-            </a:r>
-          </a:p>
-          <a:p>
-            <a:pPr lvl="1"/>
-            <a:r>
-              <a:rPr lang="de-DE" dirty="0" err="1"/>
-              <a:t>npm</a:t>
-            </a:r>
-            <a:r>
-              <a:rPr lang="de-DE" dirty="0"/>
-              <a:t> </a:t>
-            </a:r>
-            <a:r>
-              <a:rPr lang="de-DE" dirty="0" err="1"/>
-              <a:t>install</a:t>
-            </a:r>
-            <a:r>
-              <a:rPr lang="de-DE" dirty="0"/>
-              <a:t> --save-</a:t>
-            </a:r>
-            <a:r>
-              <a:rPr lang="de-DE" dirty="0" err="1"/>
-              <a:t>dev</a:t>
-            </a:r>
-            <a:r>
-              <a:rPr lang="de-DE" dirty="0"/>
-              <a:t> </a:t>
-            </a:r>
-            <a:r>
-              <a:rPr lang="de-DE" dirty="0" err="1"/>
-              <a:t>deno</a:t>
-            </a:r>
-            <a:r>
-              <a:rPr lang="de-DE" dirty="0"/>
-              <a:t>-bin</a:t>
-            </a:r>
-          </a:p>
-          <a:p>
-            <a:pPr lvl="1"/>
-            <a:r>
-              <a:rPr lang="de-DE" dirty="0">
-                <a:hlinkClick r:id="rId2"/>
-              </a:rPr>
-              <a:t>https://www.npmjs.com/package/deno-bin</a:t>
-            </a:r>
-            <a:endParaRPr lang="de-DE" dirty="0"/>
-          </a:p>
-          <a:p>
-            <a:endParaRPr lang="de-DE" dirty="0"/>
-          </a:p>
-        </p:txBody>
-      </p:sp>
-    </p:spTree>
-    <p:extLst>
-      <p:ext uri="{BB962C8B-B14F-4D97-AF65-F5344CB8AC3E}">
-        <p14:creationId xmlns:p14="http://schemas.microsoft.com/office/powerpoint/2010/main" val="3146426777"/>
       </p:ext>
     </p:extLst>
   </p:cSld>
@@ -8359,6 +12242,301 @@
 </file>
 
 <file path=ppt/theme/theme2.xml><?xml version="1.0" encoding="utf-8"?>
+<a:theme xmlns:a="http://schemas.openxmlformats.org/drawingml/2006/main" name="1_Office">
+  <a:themeElements>
+    <a:clrScheme name="Office">
+      <a:dk1>
+        <a:sysClr val="windowText" lastClr="000000"/>
+      </a:dk1>
+      <a:lt1>
+        <a:sysClr val="window" lastClr="FFFFFF"/>
+      </a:lt1>
+      <a:dk2>
+        <a:srgbClr val="44546A"/>
+      </a:dk2>
+      <a:lt2>
+        <a:srgbClr val="E7E6E6"/>
+      </a:lt2>
+      <a:accent1>
+        <a:srgbClr val="4472C4"/>
+      </a:accent1>
+      <a:accent2>
+        <a:srgbClr val="ED7D31"/>
+      </a:accent2>
+      <a:accent3>
+        <a:srgbClr val="A5A5A5"/>
+      </a:accent3>
+      <a:accent4>
+        <a:srgbClr val="FFC000"/>
+      </a:accent4>
+      <a:accent5>
+        <a:srgbClr val="5B9BD5"/>
+      </a:accent5>
+      <a:accent6>
+        <a:srgbClr val="70AD47"/>
+      </a:accent6>
+      <a:hlink>
+        <a:srgbClr val="0563C1"/>
+      </a:hlink>
+      <a:folHlink>
+        <a:srgbClr val="954F72"/>
+      </a:folHlink>
+    </a:clrScheme>
+    <a:fontScheme name="Office">
+      <a:majorFont>
+        <a:latin typeface="Calibri Light" panose="020F0302020204030204"/>
+        <a:ea typeface=""/>
+        <a:cs typeface=""/>
+        <a:font script="Jpan" typeface="游ゴシック Light"/>
+        <a:font script="Hang" typeface="맑은 고딕"/>
+        <a:font script="Hans" typeface="等线 Light"/>
+        <a:font script="Hant" typeface="新細明體"/>
+        <a:font script="Arab" typeface="Times New Roman"/>
+        <a:font script="Hebr" typeface="Times New Roman"/>
+        <a:font script="Thai" typeface="Angsana New"/>
+        <a:font script="Ethi" typeface="Nyala"/>
+        <a:font script="Beng" typeface="Vrinda"/>
+        <a:font script="Gujr" typeface="Shruti"/>
+        <a:font script="Khmr" typeface="MoolBoran"/>
+        <a:font script="Knda" typeface="Tunga"/>
+        <a:font script="Guru" typeface="Raavi"/>
+        <a:font script="Cans" typeface="Euphemia"/>
+        <a:font script="Cher" typeface="Plantagenet Cherokee"/>
+        <a:font script="Yiii" typeface="Microsoft Yi Baiti"/>
+        <a:font script="Tibt" typeface="Microsoft Himalaya"/>
+        <a:font script="Thaa" typeface="MV Boli"/>
+        <a:font script="Deva" typeface="Mangal"/>
+        <a:font script="Telu" typeface="Gautami"/>
+        <a:font script="Taml" typeface="Latha"/>
+        <a:font script="Syrc" typeface="Estrangelo Edessa"/>
+        <a:font script="Orya" typeface="Kalinga"/>
+        <a:font script="Mlym" typeface="Kartika"/>
+        <a:font script="Laoo" typeface="DokChampa"/>
+        <a:font script="Sinh" typeface="Iskoola Pota"/>
+        <a:font script="Mong" typeface="Mongolian Baiti"/>
+        <a:font script="Viet" typeface="Times New Roman"/>
+        <a:font script="Uigh" typeface="Microsoft Uighur"/>
+        <a:font script="Geor" typeface="Sylfaen"/>
+        <a:font script="Armn" typeface="Arial"/>
+        <a:font script="Bugi" typeface="Leelawadee UI"/>
+        <a:font script="Bopo" typeface="Microsoft JhengHei"/>
+        <a:font script="Java" typeface="Javanese Text"/>
+        <a:font script="Lisu" typeface="Segoe UI"/>
+        <a:font script="Mymr" typeface="Myanmar Text"/>
+        <a:font script="Nkoo" typeface="Ebrima"/>
+        <a:font script="Olck" typeface="Nirmala UI"/>
+        <a:font script="Osma" typeface="Ebrima"/>
+        <a:font script="Phag" typeface="Phagspa"/>
+        <a:font script="Syrn" typeface="Estrangelo Edessa"/>
+        <a:font script="Syrj" typeface="Estrangelo Edessa"/>
+        <a:font script="Syre" typeface="Estrangelo Edessa"/>
+        <a:font script="Sora" typeface="Nirmala UI"/>
+        <a:font script="Tale" typeface="Microsoft Tai Le"/>
+        <a:font script="Talu" typeface="Microsoft New Tai Lue"/>
+        <a:font script="Tfng" typeface="Ebrima"/>
+      </a:majorFont>
+      <a:minorFont>
+        <a:latin typeface="Calibri" panose="020F0502020204030204"/>
+        <a:ea typeface=""/>
+        <a:cs typeface=""/>
+        <a:font script="Jpan" typeface="游ゴシック"/>
+        <a:font script="Hang" typeface="맑은 고딕"/>
+        <a:font script="Hans" typeface="等线"/>
+        <a:font script="Hant" typeface="新細明體"/>
+        <a:font script="Arab" typeface="Arial"/>
+        <a:font script="Hebr" typeface="Arial"/>
+        <a:font script="Thai" typeface="Cordia New"/>
+        <a:font script="Ethi" typeface="Nyala"/>
+        <a:font script="Beng" typeface="Vrinda"/>
+        <a:font script="Gujr" typeface="Shruti"/>
+        <a:font script="Khmr" typeface="DaunPenh"/>
+        <a:font script="Knda" typeface="Tunga"/>
+        <a:font script="Guru" typeface="Raavi"/>
+        <a:font script="Cans" typeface="Euphemia"/>
+        <a:font script="Cher" typeface="Plantagenet Cherokee"/>
+        <a:font script="Yiii" typeface="Microsoft Yi Baiti"/>
+        <a:font script="Tibt" typeface="Microsoft Himalaya"/>
+        <a:font script="Thaa" typeface="MV Boli"/>
+        <a:font script="Deva" typeface="Mangal"/>
+        <a:font script="Telu" typeface="Gautami"/>
+        <a:font script="Taml" typeface="Latha"/>
+        <a:font script="Syrc" typeface="Estrangelo Edessa"/>
+        <a:font script="Orya" typeface="Kalinga"/>
+        <a:font script="Mlym" typeface="Kartika"/>
+        <a:font script="Laoo" typeface="DokChampa"/>
+        <a:font script="Sinh" typeface="Iskoola Pota"/>
+        <a:font script="Mong" typeface="Mongolian Baiti"/>
+        <a:font script="Viet" typeface="Arial"/>
+        <a:font script="Uigh" typeface="Microsoft Uighur"/>
+        <a:font script="Geor" typeface="Sylfaen"/>
+        <a:font script="Armn" typeface="Arial"/>
+        <a:font script="Bugi" typeface="Leelawadee UI"/>
+        <a:font script="Bopo" typeface="Microsoft JhengHei"/>
+        <a:font script="Java" typeface="Javanese Text"/>
+        <a:font script="Lisu" typeface="Segoe UI"/>
+        <a:font script="Mymr" typeface="Myanmar Text"/>
+        <a:font script="Nkoo" typeface="Ebrima"/>
+        <a:font script="Olck" typeface="Nirmala UI"/>
+        <a:font script="Osma" typeface="Ebrima"/>
+        <a:font script="Phag" typeface="Phagspa"/>
+        <a:font script="Syrn" typeface="Estrangelo Edessa"/>
+        <a:font script="Syrj" typeface="Estrangelo Edessa"/>
+        <a:font script="Syre" typeface="Estrangelo Edessa"/>
+        <a:font script="Sora" typeface="Nirmala UI"/>
+        <a:font script="Tale" typeface="Microsoft Tai Le"/>
+        <a:font script="Talu" typeface="Microsoft New Tai Lue"/>
+        <a:font script="Tfng" typeface="Ebrima"/>
+      </a:minorFont>
+    </a:fontScheme>
+    <a:fmtScheme name="Office">
+      <a:fillStyleLst>
+        <a:solidFill>
+          <a:schemeClr val="phClr"/>
+        </a:solidFill>
+        <a:gradFill rotWithShape="1">
+          <a:gsLst>
+            <a:gs pos="0">
+              <a:schemeClr val="phClr">
+                <a:lumMod val="110000"/>
+                <a:satMod val="105000"/>
+                <a:tint val="67000"/>
+              </a:schemeClr>
+            </a:gs>
+            <a:gs pos="50000">
+              <a:schemeClr val="phClr">
+                <a:lumMod val="105000"/>
+                <a:satMod val="103000"/>
+                <a:tint val="73000"/>
+              </a:schemeClr>
+            </a:gs>
+            <a:gs pos="100000">
+              <a:schemeClr val="phClr">
+                <a:lumMod val="105000"/>
+                <a:satMod val="109000"/>
+                <a:tint val="81000"/>
+              </a:schemeClr>
+            </a:gs>
+          </a:gsLst>
+          <a:lin ang="5400000" scaled="0"/>
+        </a:gradFill>
+        <a:gradFill rotWithShape="1">
+          <a:gsLst>
+            <a:gs pos="0">
+              <a:schemeClr val="phClr">
+                <a:satMod val="103000"/>
+                <a:lumMod val="102000"/>
+                <a:tint val="94000"/>
+              </a:schemeClr>
+            </a:gs>
+            <a:gs pos="50000">
+              <a:schemeClr val="phClr">
+                <a:satMod val="110000"/>
+                <a:lumMod val="100000"/>
+                <a:shade val="100000"/>
+              </a:schemeClr>
+            </a:gs>
+            <a:gs pos="100000">
+              <a:schemeClr val="phClr">
+                <a:lumMod val="99000"/>
+                <a:satMod val="120000"/>
+                <a:shade val="78000"/>
+              </a:schemeClr>
+            </a:gs>
+          </a:gsLst>
+          <a:lin ang="5400000" scaled="0"/>
+        </a:gradFill>
+      </a:fillStyleLst>
+      <a:lnStyleLst>
+        <a:ln w="6350" cap="flat" cmpd="sng" algn="ctr">
+          <a:solidFill>
+            <a:schemeClr val="phClr"/>
+          </a:solidFill>
+          <a:prstDash val="solid"/>
+          <a:miter lim="800000"/>
+        </a:ln>
+        <a:ln w="12700" cap="flat" cmpd="sng" algn="ctr">
+          <a:solidFill>
+            <a:schemeClr val="phClr"/>
+          </a:solidFill>
+          <a:prstDash val="solid"/>
+          <a:miter lim="800000"/>
+        </a:ln>
+        <a:ln w="19050" cap="flat" cmpd="sng" algn="ctr">
+          <a:solidFill>
+            <a:schemeClr val="phClr"/>
+          </a:solidFill>
+          <a:prstDash val="solid"/>
+          <a:miter lim="800000"/>
+        </a:ln>
+      </a:lnStyleLst>
+      <a:effectStyleLst>
+        <a:effectStyle>
+          <a:effectLst/>
+        </a:effectStyle>
+        <a:effectStyle>
+          <a:effectLst/>
+        </a:effectStyle>
+        <a:effectStyle>
+          <a:effectLst>
+            <a:outerShdw blurRad="57150" dist="19050" dir="5400000" algn="ctr" rotWithShape="0">
+              <a:srgbClr val="000000">
+                <a:alpha val="63000"/>
+              </a:srgbClr>
+            </a:outerShdw>
+          </a:effectLst>
+        </a:effectStyle>
+      </a:effectStyleLst>
+      <a:bgFillStyleLst>
+        <a:solidFill>
+          <a:schemeClr val="phClr"/>
+        </a:solidFill>
+        <a:solidFill>
+          <a:schemeClr val="phClr">
+            <a:tint val="95000"/>
+            <a:satMod val="170000"/>
+          </a:schemeClr>
+        </a:solidFill>
+        <a:gradFill rotWithShape="1">
+          <a:gsLst>
+            <a:gs pos="0">
+              <a:schemeClr val="phClr">
+                <a:tint val="93000"/>
+                <a:satMod val="150000"/>
+                <a:shade val="98000"/>
+                <a:lumMod val="102000"/>
+              </a:schemeClr>
+            </a:gs>
+            <a:gs pos="50000">
+              <a:schemeClr val="phClr">
+                <a:tint val="98000"/>
+                <a:satMod val="130000"/>
+                <a:shade val="90000"/>
+                <a:lumMod val="103000"/>
+              </a:schemeClr>
+            </a:gs>
+            <a:gs pos="100000">
+              <a:schemeClr val="phClr">
+                <a:shade val="63000"/>
+                <a:satMod val="120000"/>
+              </a:schemeClr>
+            </a:gs>
+          </a:gsLst>
+          <a:lin ang="5400000" scaled="0"/>
+        </a:gradFill>
+      </a:bgFillStyleLst>
+    </a:fmtScheme>
+  </a:themeElements>
+  <a:objectDefaults/>
+  <a:extraClrSchemeLst/>
+  <a:extLst>
+    <a:ext uri="{05A4C25C-085E-4340-85A3-A5531E510DB2}">
+      <thm15:themeFamily xmlns:thm15="http://schemas.microsoft.com/office/thememl/2012/main" name="Office Theme" id="{62F939B6-93AF-4DB8-9C6B-D6C7DFDC589F}" vid="{4A3C46E8-61CC-4603-A589-7422A47A8E4A}"/>
+    </a:ext>
+  </a:extLst>
+</a:theme>
+</file>
+
+<file path=ppt/theme/theme3.xml><?xml version="1.0" encoding="utf-8"?>
 <a:theme xmlns:a="http://schemas.openxmlformats.org/drawingml/2006/main" name="Office">
   <a:themeElements>
     <a:clrScheme name="Office">
